--- a/GandG_YPS/Presentation/G&G_Archive.pptx
+++ b/GandG_YPS/Presentation/G&G_Archive.pptx
@@ -5,15 +5,20 @@
     <p:sldMasterId id="2147483661" r:id="rId4"/>
   </p:sldMasterIdLst>
   <p:notesMasterIdLst>
-    <p:notesMasterId r:id="rId11"/>
+    <p:notesMasterId r:id="rId16"/>
   </p:notesMasterIdLst>
   <p:sldIdLst>
     <p:sldId id="2145708748" r:id="rId5"/>
-    <p:sldId id="2145708788" r:id="rId6"/>
-    <p:sldId id="2145708792" r:id="rId7"/>
-    <p:sldId id="2145708793" r:id="rId8"/>
-    <p:sldId id="2145708794" r:id="rId9"/>
-    <p:sldId id="2145708766" r:id="rId10"/>
+    <p:sldId id="2145708800" r:id="rId6"/>
+    <p:sldId id="2145708788" r:id="rId7"/>
+    <p:sldId id="2145708796" r:id="rId8"/>
+    <p:sldId id="2145708799" r:id="rId9"/>
+    <p:sldId id="2145708794" r:id="rId10"/>
+    <p:sldId id="2145708795" r:id="rId11"/>
+    <p:sldId id="2145708798" r:id="rId12"/>
+    <p:sldId id="2145708797" r:id="rId13"/>
+    <p:sldId id="2145708802" r:id="rId14"/>
+    <p:sldId id="2145708766" r:id="rId15"/>
   </p:sldIdLst>
   <p:sldSz cx="12192000" cy="6858000"/>
   <p:notesSz cx="6858000" cy="9144000"/>
@@ -202,7 +207,7 @@
           <a:p>
             <a:fld id="{CFB89EC9-ADF7-4CD8-A359-4B3486574A56}" type="datetimeFigureOut">
               <a:rPr lang="en-US" smtClean="0"/>
-              <a:t>3/31/2026</a:t>
+              <a:t>4/1/2026</a:t>
             </a:fld>
             <a:endParaRPr lang="en-US"/>
           </a:p>
@@ -469,6 +474,714 @@
 </p:notesMaster>
 </file>
 
+<file path=ppt/notesSlides/notesSlide1.xml><?xml version="1.0" encoding="utf-8"?>
+<p:notes xmlns:a="http://schemas.openxmlformats.org/drawingml/2006/main" xmlns:r="http://schemas.openxmlformats.org/officeDocument/2006/relationships" xmlns:p="http://schemas.openxmlformats.org/presentationml/2006/main">
+  <p:cSld>
+    <p:spTree>
+      <p:nvGrpSpPr>
+        <p:cNvPr id="1" name="">
+          <a:extLst>
+            <a:ext uri="{FF2B5EF4-FFF2-40B4-BE49-F238E27FC236}">
+              <a16:creationId xmlns:a16="http://schemas.microsoft.com/office/drawing/2014/main" id="{C88FC656-E928-E5C6-E304-3E13BFC108DA}"/>
+            </a:ext>
+          </a:extLst>
+        </p:cNvPr>
+        <p:cNvGrpSpPr/>
+        <p:nvPr/>
+      </p:nvGrpSpPr>
+      <p:grpSpPr>
+        <a:xfrm>
+          <a:off x="0" y="0"/>
+          <a:ext cx="0" cy="0"/>
+          <a:chOff x="0" y="0"/>
+          <a:chExt cx="0" cy="0"/>
+        </a:xfrm>
+      </p:grpSpPr>
+      <p:sp>
+        <p:nvSpPr>
+          <p:cNvPr id="2" name="Slide Image Placeholder 1">
+            <a:extLst>
+              <a:ext uri="{FF2B5EF4-FFF2-40B4-BE49-F238E27FC236}">
+                <a16:creationId xmlns:a16="http://schemas.microsoft.com/office/drawing/2014/main" id="{7F4EEE11-C271-DFD9-9C36-BCCDA4DC2782}"/>
+              </a:ext>
+            </a:extLst>
+          </p:cNvPr>
+          <p:cNvSpPr>
+            <a:spLocks noGrp="1" noRot="1" noChangeAspect="1"/>
+          </p:cNvSpPr>
+          <p:nvPr>
+            <p:ph type="sldImg"/>
+          </p:nvPr>
+        </p:nvSpPr>
+        <p:spPr/>
+      </p:sp>
+      <p:sp>
+        <p:nvSpPr>
+          <p:cNvPr id="3" name="Notes Placeholder 2">
+            <a:extLst>
+              <a:ext uri="{FF2B5EF4-FFF2-40B4-BE49-F238E27FC236}">
+                <a16:creationId xmlns:a16="http://schemas.microsoft.com/office/drawing/2014/main" id="{A9E0AA18-4D48-51F9-9E79-45042806EF08}"/>
+              </a:ext>
+            </a:extLst>
+          </p:cNvPr>
+          <p:cNvSpPr>
+            <a:spLocks noGrp="1"/>
+          </p:cNvSpPr>
+          <p:nvPr>
+            <p:ph type="body" idx="1"/>
+          </p:nvPr>
+        </p:nvSpPr>
+        <p:spPr/>
+        <p:txBody>
+          <a:bodyPr/>
+          <a:lstStyle/>
+          <a:p>
+            <a:endParaRPr lang="en-US" dirty="0"/>
+          </a:p>
+        </p:txBody>
+      </p:sp>
+      <p:sp>
+        <p:nvSpPr>
+          <p:cNvPr id="4" name="Slide Number Placeholder 3">
+            <a:extLst>
+              <a:ext uri="{FF2B5EF4-FFF2-40B4-BE49-F238E27FC236}">
+                <a16:creationId xmlns:a16="http://schemas.microsoft.com/office/drawing/2014/main" id="{89C44575-9916-7054-2E8A-5B969868350C}"/>
+              </a:ext>
+            </a:extLst>
+          </p:cNvPr>
+          <p:cNvSpPr>
+            <a:spLocks noGrp="1"/>
+          </p:cNvSpPr>
+          <p:nvPr>
+            <p:ph type="sldNum" sz="quarter" idx="5"/>
+          </p:nvPr>
+        </p:nvSpPr>
+        <p:spPr/>
+        <p:txBody>
+          <a:bodyPr/>
+          <a:lstStyle/>
+          <a:p>
+            <a:fld id="{74180750-FA6C-4B62-A27E-0AEE5A77FE02}" type="slidenum">
+              <a:rPr lang="en-US" smtClean="0"/>
+              <a:t>2</a:t>
+            </a:fld>
+            <a:endParaRPr lang="en-US"/>
+          </a:p>
+        </p:txBody>
+      </p:sp>
+    </p:spTree>
+    <p:extLst>
+      <p:ext uri="{BB962C8B-B14F-4D97-AF65-F5344CB8AC3E}">
+        <p14:creationId xmlns:p14="http://schemas.microsoft.com/office/powerpoint/2010/main" val="207568311"/>
+      </p:ext>
+    </p:extLst>
+  </p:cSld>
+  <p:clrMapOvr>
+    <a:masterClrMapping/>
+  </p:clrMapOvr>
+</p:notes>
+</file>
+
+<file path=ppt/notesSlides/notesSlide2.xml><?xml version="1.0" encoding="utf-8"?>
+<p:notes xmlns:a="http://schemas.openxmlformats.org/drawingml/2006/main" xmlns:r="http://schemas.openxmlformats.org/officeDocument/2006/relationships" xmlns:p="http://schemas.openxmlformats.org/presentationml/2006/main">
+  <p:cSld>
+    <p:spTree>
+      <p:nvGrpSpPr>
+        <p:cNvPr id="1" name=""/>
+        <p:cNvGrpSpPr/>
+        <p:nvPr/>
+      </p:nvGrpSpPr>
+      <p:grpSpPr>
+        <a:xfrm>
+          <a:off x="0" y="0"/>
+          <a:ext cx="0" cy="0"/>
+          <a:chOff x="0" y="0"/>
+          <a:chExt cx="0" cy="0"/>
+        </a:xfrm>
+      </p:grpSpPr>
+      <p:sp>
+        <p:nvSpPr>
+          <p:cNvPr id="2" name="Slide Image Placeholder 1"/>
+          <p:cNvSpPr>
+            <a:spLocks noGrp="1" noRot="1" noChangeAspect="1"/>
+          </p:cNvSpPr>
+          <p:nvPr>
+            <p:ph type="sldImg"/>
+          </p:nvPr>
+        </p:nvSpPr>
+        <p:spPr/>
+      </p:sp>
+      <p:sp>
+        <p:nvSpPr>
+          <p:cNvPr id="3" name="Notes Placeholder 2"/>
+          <p:cNvSpPr>
+            <a:spLocks noGrp="1"/>
+          </p:cNvSpPr>
+          <p:nvPr>
+            <p:ph type="body" idx="1"/>
+          </p:nvPr>
+        </p:nvSpPr>
+        <p:spPr/>
+        <p:txBody>
+          <a:bodyPr/>
+          <a:lstStyle/>
+          <a:p>
+            <a:endParaRPr lang="en-US" dirty="0"/>
+          </a:p>
+        </p:txBody>
+      </p:sp>
+      <p:sp>
+        <p:nvSpPr>
+          <p:cNvPr id="4" name="Slide Number Placeholder 3"/>
+          <p:cNvSpPr>
+            <a:spLocks noGrp="1"/>
+          </p:cNvSpPr>
+          <p:nvPr>
+            <p:ph type="sldNum" sz="quarter" idx="5"/>
+          </p:nvPr>
+        </p:nvSpPr>
+        <p:spPr/>
+        <p:txBody>
+          <a:bodyPr/>
+          <a:lstStyle/>
+          <a:p>
+            <a:fld id="{74180750-FA6C-4B62-A27E-0AEE5A77FE02}" type="slidenum">
+              <a:rPr lang="en-US" smtClean="0"/>
+              <a:t>3</a:t>
+            </a:fld>
+            <a:endParaRPr lang="en-US"/>
+          </a:p>
+        </p:txBody>
+      </p:sp>
+    </p:spTree>
+    <p:extLst>
+      <p:ext uri="{BB962C8B-B14F-4D97-AF65-F5344CB8AC3E}">
+        <p14:creationId xmlns:p14="http://schemas.microsoft.com/office/powerpoint/2010/main" val="3570488133"/>
+      </p:ext>
+    </p:extLst>
+  </p:cSld>
+  <p:clrMapOvr>
+    <a:masterClrMapping/>
+  </p:clrMapOvr>
+</p:notes>
+</file>
+
+<file path=ppt/notesSlides/notesSlide3.xml><?xml version="1.0" encoding="utf-8"?>
+<p:notes xmlns:a="http://schemas.openxmlformats.org/drawingml/2006/main" xmlns:r="http://schemas.openxmlformats.org/officeDocument/2006/relationships" xmlns:p="http://schemas.openxmlformats.org/presentationml/2006/main">
+  <p:cSld>
+    <p:spTree>
+      <p:nvGrpSpPr>
+        <p:cNvPr id="1" name=""/>
+        <p:cNvGrpSpPr/>
+        <p:nvPr/>
+      </p:nvGrpSpPr>
+      <p:grpSpPr>
+        <a:xfrm>
+          <a:off x="0" y="0"/>
+          <a:ext cx="0" cy="0"/>
+          <a:chOff x="0" y="0"/>
+          <a:chExt cx="0" cy="0"/>
+        </a:xfrm>
+      </p:grpSpPr>
+      <p:sp>
+        <p:nvSpPr>
+          <p:cNvPr id="2" name="Slide Image Placeholder 1"/>
+          <p:cNvSpPr>
+            <a:spLocks noGrp="1" noRot="1" noChangeAspect="1"/>
+          </p:cNvSpPr>
+          <p:nvPr>
+            <p:ph type="sldImg"/>
+          </p:nvPr>
+        </p:nvSpPr>
+        <p:spPr/>
+      </p:sp>
+      <p:sp>
+        <p:nvSpPr>
+          <p:cNvPr id="3" name="Notes Placeholder 2"/>
+          <p:cNvSpPr>
+            <a:spLocks noGrp="1"/>
+          </p:cNvSpPr>
+          <p:nvPr>
+            <p:ph type="body" idx="1"/>
+          </p:nvPr>
+        </p:nvSpPr>
+        <p:spPr/>
+        <p:txBody>
+          <a:bodyPr/>
+          <a:lstStyle/>
+          <a:p>
+            <a:endParaRPr lang="en-US" dirty="0"/>
+          </a:p>
+        </p:txBody>
+      </p:sp>
+      <p:sp>
+        <p:nvSpPr>
+          <p:cNvPr id="4" name="Slide Number Placeholder 3"/>
+          <p:cNvSpPr>
+            <a:spLocks noGrp="1"/>
+          </p:cNvSpPr>
+          <p:nvPr>
+            <p:ph type="sldNum" sz="quarter" idx="5"/>
+          </p:nvPr>
+        </p:nvSpPr>
+        <p:spPr/>
+        <p:txBody>
+          <a:bodyPr/>
+          <a:lstStyle/>
+          <a:p>
+            <a:fld id="{74180750-FA6C-4B62-A27E-0AEE5A77FE02}" type="slidenum">
+              <a:rPr lang="en-US" smtClean="0"/>
+              <a:t>6</a:t>
+            </a:fld>
+            <a:endParaRPr lang="en-US"/>
+          </a:p>
+        </p:txBody>
+      </p:sp>
+    </p:spTree>
+    <p:extLst>
+      <p:ext uri="{BB962C8B-B14F-4D97-AF65-F5344CB8AC3E}">
+        <p14:creationId xmlns:p14="http://schemas.microsoft.com/office/powerpoint/2010/main" val="895994671"/>
+      </p:ext>
+    </p:extLst>
+  </p:cSld>
+  <p:clrMapOvr>
+    <a:masterClrMapping/>
+  </p:clrMapOvr>
+</p:notes>
+</file>
+
+<file path=ppt/notesSlides/notesSlide4.xml><?xml version="1.0" encoding="utf-8"?>
+<p:notes xmlns:a="http://schemas.openxmlformats.org/drawingml/2006/main" xmlns:r="http://schemas.openxmlformats.org/officeDocument/2006/relationships" xmlns:p="http://schemas.openxmlformats.org/presentationml/2006/main">
+  <p:cSld>
+    <p:spTree>
+      <p:nvGrpSpPr>
+        <p:cNvPr id="1" name="">
+          <a:extLst>
+            <a:ext uri="{FF2B5EF4-FFF2-40B4-BE49-F238E27FC236}">
+              <a16:creationId xmlns:a16="http://schemas.microsoft.com/office/drawing/2014/main" id="{99344DBB-B4F9-D29F-3B3C-99415CDA673E}"/>
+            </a:ext>
+          </a:extLst>
+        </p:cNvPr>
+        <p:cNvGrpSpPr/>
+        <p:nvPr/>
+      </p:nvGrpSpPr>
+      <p:grpSpPr>
+        <a:xfrm>
+          <a:off x="0" y="0"/>
+          <a:ext cx="0" cy="0"/>
+          <a:chOff x="0" y="0"/>
+          <a:chExt cx="0" cy="0"/>
+        </a:xfrm>
+      </p:grpSpPr>
+      <p:sp>
+        <p:nvSpPr>
+          <p:cNvPr id="2" name="Slide Image Placeholder 1">
+            <a:extLst>
+              <a:ext uri="{FF2B5EF4-FFF2-40B4-BE49-F238E27FC236}">
+                <a16:creationId xmlns:a16="http://schemas.microsoft.com/office/drawing/2014/main" id="{8249C567-5694-69B0-5D95-23CC931252CF}"/>
+              </a:ext>
+            </a:extLst>
+          </p:cNvPr>
+          <p:cNvSpPr>
+            <a:spLocks noGrp="1" noRot="1" noChangeAspect="1"/>
+          </p:cNvSpPr>
+          <p:nvPr>
+            <p:ph type="sldImg"/>
+          </p:nvPr>
+        </p:nvSpPr>
+        <p:spPr/>
+      </p:sp>
+      <p:sp>
+        <p:nvSpPr>
+          <p:cNvPr id="3" name="Notes Placeholder 2">
+            <a:extLst>
+              <a:ext uri="{FF2B5EF4-FFF2-40B4-BE49-F238E27FC236}">
+                <a16:creationId xmlns:a16="http://schemas.microsoft.com/office/drawing/2014/main" id="{3AA7B3A4-E485-090A-EE05-0012CBA3F718}"/>
+              </a:ext>
+            </a:extLst>
+          </p:cNvPr>
+          <p:cNvSpPr>
+            <a:spLocks noGrp="1"/>
+          </p:cNvSpPr>
+          <p:nvPr>
+            <p:ph type="body" idx="1"/>
+          </p:nvPr>
+        </p:nvSpPr>
+        <p:spPr/>
+        <p:txBody>
+          <a:bodyPr/>
+          <a:lstStyle/>
+          <a:p>
+            <a:endParaRPr lang="en-US" dirty="0"/>
+          </a:p>
+        </p:txBody>
+      </p:sp>
+      <p:sp>
+        <p:nvSpPr>
+          <p:cNvPr id="4" name="Slide Number Placeholder 3">
+            <a:extLst>
+              <a:ext uri="{FF2B5EF4-FFF2-40B4-BE49-F238E27FC236}">
+                <a16:creationId xmlns:a16="http://schemas.microsoft.com/office/drawing/2014/main" id="{018FB7B4-1F90-EF07-FDF7-34A5140EE4F4}"/>
+              </a:ext>
+            </a:extLst>
+          </p:cNvPr>
+          <p:cNvSpPr>
+            <a:spLocks noGrp="1"/>
+          </p:cNvSpPr>
+          <p:nvPr>
+            <p:ph type="sldNum" sz="quarter" idx="5"/>
+          </p:nvPr>
+        </p:nvSpPr>
+        <p:spPr/>
+        <p:txBody>
+          <a:bodyPr/>
+          <a:lstStyle/>
+          <a:p>
+            <a:fld id="{74180750-FA6C-4B62-A27E-0AEE5A77FE02}" type="slidenum">
+              <a:rPr lang="en-US" smtClean="0"/>
+              <a:t>7</a:t>
+            </a:fld>
+            <a:endParaRPr lang="en-US"/>
+          </a:p>
+        </p:txBody>
+      </p:sp>
+    </p:spTree>
+    <p:extLst>
+      <p:ext uri="{BB962C8B-B14F-4D97-AF65-F5344CB8AC3E}">
+        <p14:creationId xmlns:p14="http://schemas.microsoft.com/office/powerpoint/2010/main" val="950639720"/>
+      </p:ext>
+    </p:extLst>
+  </p:cSld>
+  <p:clrMapOvr>
+    <a:masterClrMapping/>
+  </p:clrMapOvr>
+</p:notes>
+</file>
+
+<file path=ppt/notesSlides/notesSlide5.xml><?xml version="1.0" encoding="utf-8"?>
+<p:notes xmlns:a="http://schemas.openxmlformats.org/drawingml/2006/main" xmlns:r="http://schemas.openxmlformats.org/officeDocument/2006/relationships" xmlns:p="http://schemas.openxmlformats.org/presentationml/2006/main">
+  <p:cSld>
+    <p:spTree>
+      <p:nvGrpSpPr>
+        <p:cNvPr id="1" name="">
+          <a:extLst>
+            <a:ext uri="{FF2B5EF4-FFF2-40B4-BE49-F238E27FC236}">
+              <a16:creationId xmlns:a16="http://schemas.microsoft.com/office/drawing/2014/main" id="{4F2A61D8-AD97-DC3A-3EEF-C352061F6A7F}"/>
+            </a:ext>
+          </a:extLst>
+        </p:cNvPr>
+        <p:cNvGrpSpPr/>
+        <p:nvPr/>
+      </p:nvGrpSpPr>
+      <p:grpSpPr>
+        <a:xfrm>
+          <a:off x="0" y="0"/>
+          <a:ext cx="0" cy="0"/>
+          <a:chOff x="0" y="0"/>
+          <a:chExt cx="0" cy="0"/>
+        </a:xfrm>
+      </p:grpSpPr>
+      <p:sp>
+        <p:nvSpPr>
+          <p:cNvPr id="2" name="Slide Image Placeholder 1">
+            <a:extLst>
+              <a:ext uri="{FF2B5EF4-FFF2-40B4-BE49-F238E27FC236}">
+                <a16:creationId xmlns:a16="http://schemas.microsoft.com/office/drawing/2014/main" id="{CCD947CA-2590-BC11-065B-54B9A208A895}"/>
+              </a:ext>
+            </a:extLst>
+          </p:cNvPr>
+          <p:cNvSpPr>
+            <a:spLocks noGrp="1" noRot="1" noChangeAspect="1"/>
+          </p:cNvSpPr>
+          <p:nvPr>
+            <p:ph type="sldImg"/>
+          </p:nvPr>
+        </p:nvSpPr>
+        <p:spPr/>
+      </p:sp>
+      <p:sp>
+        <p:nvSpPr>
+          <p:cNvPr id="3" name="Notes Placeholder 2">
+            <a:extLst>
+              <a:ext uri="{FF2B5EF4-FFF2-40B4-BE49-F238E27FC236}">
+                <a16:creationId xmlns:a16="http://schemas.microsoft.com/office/drawing/2014/main" id="{23751E42-EC84-37DF-E645-33143531418B}"/>
+              </a:ext>
+            </a:extLst>
+          </p:cNvPr>
+          <p:cNvSpPr>
+            <a:spLocks noGrp="1"/>
+          </p:cNvSpPr>
+          <p:nvPr>
+            <p:ph type="body" idx="1"/>
+          </p:nvPr>
+        </p:nvSpPr>
+        <p:spPr/>
+        <p:txBody>
+          <a:bodyPr/>
+          <a:lstStyle/>
+          <a:p>
+            <a:endParaRPr lang="en-US" dirty="0"/>
+          </a:p>
+        </p:txBody>
+      </p:sp>
+      <p:sp>
+        <p:nvSpPr>
+          <p:cNvPr id="4" name="Slide Number Placeholder 3">
+            <a:extLst>
+              <a:ext uri="{FF2B5EF4-FFF2-40B4-BE49-F238E27FC236}">
+                <a16:creationId xmlns:a16="http://schemas.microsoft.com/office/drawing/2014/main" id="{1C8F5BC6-3C8A-102F-9421-F58D47253B8E}"/>
+              </a:ext>
+            </a:extLst>
+          </p:cNvPr>
+          <p:cNvSpPr>
+            <a:spLocks noGrp="1"/>
+          </p:cNvSpPr>
+          <p:nvPr>
+            <p:ph type="sldNum" sz="quarter" idx="5"/>
+          </p:nvPr>
+        </p:nvSpPr>
+        <p:spPr/>
+        <p:txBody>
+          <a:bodyPr/>
+          <a:lstStyle/>
+          <a:p>
+            <a:fld id="{74180750-FA6C-4B62-A27E-0AEE5A77FE02}" type="slidenum">
+              <a:rPr lang="en-US" smtClean="0"/>
+              <a:t>8</a:t>
+            </a:fld>
+            <a:endParaRPr lang="en-US"/>
+          </a:p>
+        </p:txBody>
+      </p:sp>
+    </p:spTree>
+    <p:extLst>
+      <p:ext uri="{BB962C8B-B14F-4D97-AF65-F5344CB8AC3E}">
+        <p14:creationId xmlns:p14="http://schemas.microsoft.com/office/powerpoint/2010/main" val="2745930826"/>
+      </p:ext>
+    </p:extLst>
+  </p:cSld>
+  <p:clrMapOvr>
+    <a:masterClrMapping/>
+  </p:clrMapOvr>
+</p:notes>
+</file>
+
+<file path=ppt/notesSlides/notesSlide6.xml><?xml version="1.0" encoding="utf-8"?>
+<p:notes xmlns:a="http://schemas.openxmlformats.org/drawingml/2006/main" xmlns:r="http://schemas.openxmlformats.org/officeDocument/2006/relationships" xmlns:p="http://schemas.openxmlformats.org/presentationml/2006/main">
+  <p:cSld>
+    <p:spTree>
+      <p:nvGrpSpPr>
+        <p:cNvPr id="1" name="">
+          <a:extLst>
+            <a:ext uri="{FF2B5EF4-FFF2-40B4-BE49-F238E27FC236}">
+              <a16:creationId xmlns:a16="http://schemas.microsoft.com/office/drawing/2014/main" id="{19BD6FF6-F587-63DE-73EF-79E723122ACC}"/>
+            </a:ext>
+          </a:extLst>
+        </p:cNvPr>
+        <p:cNvGrpSpPr/>
+        <p:nvPr/>
+      </p:nvGrpSpPr>
+      <p:grpSpPr>
+        <a:xfrm>
+          <a:off x="0" y="0"/>
+          <a:ext cx="0" cy="0"/>
+          <a:chOff x="0" y="0"/>
+          <a:chExt cx="0" cy="0"/>
+        </a:xfrm>
+      </p:grpSpPr>
+      <p:sp>
+        <p:nvSpPr>
+          <p:cNvPr id="2" name="Slide Image Placeholder 1">
+            <a:extLst>
+              <a:ext uri="{FF2B5EF4-FFF2-40B4-BE49-F238E27FC236}">
+                <a16:creationId xmlns:a16="http://schemas.microsoft.com/office/drawing/2014/main" id="{B439259F-98C6-2D2C-4316-5B49A44C7C80}"/>
+              </a:ext>
+            </a:extLst>
+          </p:cNvPr>
+          <p:cNvSpPr>
+            <a:spLocks noGrp="1" noRot="1" noChangeAspect="1"/>
+          </p:cNvSpPr>
+          <p:nvPr>
+            <p:ph type="sldImg"/>
+          </p:nvPr>
+        </p:nvSpPr>
+        <p:spPr/>
+      </p:sp>
+      <p:sp>
+        <p:nvSpPr>
+          <p:cNvPr id="3" name="Notes Placeholder 2">
+            <a:extLst>
+              <a:ext uri="{FF2B5EF4-FFF2-40B4-BE49-F238E27FC236}">
+                <a16:creationId xmlns:a16="http://schemas.microsoft.com/office/drawing/2014/main" id="{4337DBF5-E5E1-39A8-735A-E752A3BFBAF9}"/>
+              </a:ext>
+            </a:extLst>
+          </p:cNvPr>
+          <p:cNvSpPr>
+            <a:spLocks noGrp="1"/>
+          </p:cNvSpPr>
+          <p:nvPr>
+            <p:ph type="body" idx="1"/>
+          </p:nvPr>
+        </p:nvSpPr>
+        <p:spPr/>
+        <p:txBody>
+          <a:bodyPr/>
+          <a:lstStyle/>
+          <a:p>
+            <a:endParaRPr lang="en-US" dirty="0"/>
+          </a:p>
+        </p:txBody>
+      </p:sp>
+      <p:sp>
+        <p:nvSpPr>
+          <p:cNvPr id="4" name="Slide Number Placeholder 3">
+            <a:extLst>
+              <a:ext uri="{FF2B5EF4-FFF2-40B4-BE49-F238E27FC236}">
+                <a16:creationId xmlns:a16="http://schemas.microsoft.com/office/drawing/2014/main" id="{1999E6F6-C2FB-463F-AF92-9D1206ABE873}"/>
+              </a:ext>
+            </a:extLst>
+          </p:cNvPr>
+          <p:cNvSpPr>
+            <a:spLocks noGrp="1"/>
+          </p:cNvSpPr>
+          <p:nvPr>
+            <p:ph type="sldNum" sz="quarter" idx="5"/>
+          </p:nvPr>
+        </p:nvSpPr>
+        <p:spPr/>
+        <p:txBody>
+          <a:bodyPr/>
+          <a:lstStyle/>
+          <a:p>
+            <a:fld id="{74180750-FA6C-4B62-A27E-0AEE5A77FE02}" type="slidenum">
+              <a:rPr lang="en-US" smtClean="0"/>
+              <a:t>9</a:t>
+            </a:fld>
+            <a:endParaRPr lang="en-US"/>
+          </a:p>
+        </p:txBody>
+      </p:sp>
+    </p:spTree>
+    <p:extLst>
+      <p:ext uri="{BB962C8B-B14F-4D97-AF65-F5344CB8AC3E}">
+        <p14:creationId xmlns:p14="http://schemas.microsoft.com/office/powerpoint/2010/main" val="2935080964"/>
+      </p:ext>
+    </p:extLst>
+  </p:cSld>
+  <p:clrMapOvr>
+    <a:masterClrMapping/>
+  </p:clrMapOvr>
+</p:notes>
+</file>
+
+<file path=ppt/notesSlides/notesSlide7.xml><?xml version="1.0" encoding="utf-8"?>
+<p:notes xmlns:a="http://schemas.openxmlformats.org/drawingml/2006/main" xmlns:r="http://schemas.openxmlformats.org/officeDocument/2006/relationships" xmlns:p="http://schemas.openxmlformats.org/presentationml/2006/main">
+  <p:cSld>
+    <p:spTree>
+      <p:nvGrpSpPr>
+        <p:cNvPr id="1" name="">
+          <a:extLst>
+            <a:ext uri="{FF2B5EF4-FFF2-40B4-BE49-F238E27FC236}">
+              <a16:creationId xmlns:a16="http://schemas.microsoft.com/office/drawing/2014/main" id="{555F5994-04CE-FD32-F9B0-B96E07E74725}"/>
+            </a:ext>
+          </a:extLst>
+        </p:cNvPr>
+        <p:cNvGrpSpPr/>
+        <p:nvPr/>
+      </p:nvGrpSpPr>
+      <p:grpSpPr>
+        <a:xfrm>
+          <a:off x="0" y="0"/>
+          <a:ext cx="0" cy="0"/>
+          <a:chOff x="0" y="0"/>
+          <a:chExt cx="0" cy="0"/>
+        </a:xfrm>
+      </p:grpSpPr>
+      <p:sp>
+        <p:nvSpPr>
+          <p:cNvPr id="2" name="Slide Image Placeholder 1">
+            <a:extLst>
+              <a:ext uri="{FF2B5EF4-FFF2-40B4-BE49-F238E27FC236}">
+                <a16:creationId xmlns:a16="http://schemas.microsoft.com/office/drawing/2014/main" id="{EBF89CA9-4E9C-B133-7C5C-2029243D4519}"/>
+              </a:ext>
+            </a:extLst>
+          </p:cNvPr>
+          <p:cNvSpPr>
+            <a:spLocks noGrp="1" noRot="1" noChangeAspect="1"/>
+          </p:cNvSpPr>
+          <p:nvPr>
+            <p:ph type="sldImg"/>
+          </p:nvPr>
+        </p:nvSpPr>
+        <p:spPr/>
+      </p:sp>
+      <p:sp>
+        <p:nvSpPr>
+          <p:cNvPr id="3" name="Notes Placeholder 2">
+            <a:extLst>
+              <a:ext uri="{FF2B5EF4-FFF2-40B4-BE49-F238E27FC236}">
+                <a16:creationId xmlns:a16="http://schemas.microsoft.com/office/drawing/2014/main" id="{B1B8DE56-0B33-AD2A-D440-F65F0E907CD4}"/>
+              </a:ext>
+            </a:extLst>
+          </p:cNvPr>
+          <p:cNvSpPr>
+            <a:spLocks noGrp="1"/>
+          </p:cNvSpPr>
+          <p:nvPr>
+            <p:ph type="body" idx="1"/>
+          </p:nvPr>
+        </p:nvSpPr>
+        <p:spPr/>
+        <p:txBody>
+          <a:bodyPr/>
+          <a:lstStyle/>
+          <a:p>
+            <a:endParaRPr lang="en-US" dirty="0"/>
+          </a:p>
+        </p:txBody>
+      </p:sp>
+      <p:sp>
+        <p:nvSpPr>
+          <p:cNvPr id="4" name="Slide Number Placeholder 3">
+            <a:extLst>
+              <a:ext uri="{FF2B5EF4-FFF2-40B4-BE49-F238E27FC236}">
+                <a16:creationId xmlns:a16="http://schemas.microsoft.com/office/drawing/2014/main" id="{4A15CB6D-FC0C-F131-23FF-B2801B0B5308}"/>
+              </a:ext>
+            </a:extLst>
+          </p:cNvPr>
+          <p:cNvSpPr>
+            <a:spLocks noGrp="1"/>
+          </p:cNvSpPr>
+          <p:nvPr>
+            <p:ph type="sldNum" sz="quarter" idx="5"/>
+          </p:nvPr>
+        </p:nvSpPr>
+        <p:spPr/>
+        <p:txBody>
+          <a:bodyPr/>
+          <a:lstStyle/>
+          <a:p>
+            <a:fld id="{74180750-FA6C-4B62-A27E-0AEE5A77FE02}" type="slidenum">
+              <a:rPr lang="en-US" smtClean="0"/>
+              <a:t>10</a:t>
+            </a:fld>
+            <a:endParaRPr lang="en-US"/>
+          </a:p>
+        </p:txBody>
+      </p:sp>
+    </p:spTree>
+    <p:extLst>
+      <p:ext uri="{BB962C8B-B14F-4D97-AF65-F5344CB8AC3E}">
+        <p14:creationId xmlns:p14="http://schemas.microsoft.com/office/powerpoint/2010/main" val="3737489022"/>
+      </p:ext>
+    </p:extLst>
+  </p:cSld>
+  <p:clrMapOvr>
+    <a:masterClrMapping/>
+  </p:clrMapOvr>
+</p:notes>
+</file>
+
 <file path=ppt/slideLayouts/slideLayout1.xml><?xml version="1.0" encoding="utf-8"?>
 <p:sldLayout xmlns:a="http://schemas.openxmlformats.org/drawingml/2006/main" xmlns:r="http://schemas.openxmlformats.org/officeDocument/2006/relationships" xmlns:p="http://schemas.openxmlformats.org/presentationml/2006/main" preserve="1" userDrawn="1">
   <p:cSld name="1_Title and Content">
@@ -667,7 +1380,7 @@
                   </a:prstClr>
                 </a:solidFill>
               </a:rPr>
-              <a:t>3/31/2026</a:t>
+              <a:t>4/1/2026</a:t>
             </a:fld>
             <a:endParaRPr lang="en-US">
               <a:solidFill>
@@ -1508,7 +2221,7 @@
           <a:p>
             <a:fld id="{A1CDCD78-8B7B-4976-8AE0-648AF1DF3CEB}" type="datetime1">
               <a:rPr lang="en-US" smtClean="0"/>
-              <a:t>3/31/2026</a:t>
+              <a:t>4/1/2026</a:t>
             </a:fld>
             <a:endParaRPr lang="en-US"/>
           </a:p>
@@ -1946,7 +2659,7 @@
                 </a:spcAft>
                 <a:defRPr/>
               </a:pPr>
-              <a:t>3/31/2026</a:t>
+              <a:t>4/1/2026</a:t>
             </a:fld>
             <a:endParaRPr lang="en-US">
               <a:solidFill>
@@ -2698,16 +3411,7 @@
               <a:rPr lang="en-GB" sz="3600" dirty="0">
                 <a:latin typeface="Aptos Narrow" panose="020B0004020202020204" pitchFamily="34" charset="0"/>
               </a:rPr>
-              <a:t>G&amp; G Archive</a:t>
-            </a:r>
-          </a:p>
-          <a:p>
-            <a:pPr algn="ctr"/>
-            <a:r>
-              <a:rPr lang="en-GB" sz="3600" b="0" dirty="0">
-                <a:latin typeface="Aptos Narrow" panose="020B0004020202020204" pitchFamily="34" charset="0"/>
-              </a:rPr>
-              <a:t>Proposal</a:t>
+              <a:t>G&amp; G Data Management</a:t>
             </a:r>
           </a:p>
           <a:p>
@@ -2722,54 +3426,11 @@
               <a:latin typeface="Aptos Narrow" panose="020B0004020202020204" pitchFamily="34" charset="0"/>
             </a:endParaRPr>
           </a:p>
-        </p:txBody>
-      </p:sp>
-      <p:sp>
-        <p:nvSpPr>
-          <p:cNvPr id="4" name="TextBox 3">
-            <a:extLst>
-              <a:ext uri="{FF2B5EF4-FFF2-40B4-BE49-F238E27FC236}">
-                <a16:creationId xmlns:a16="http://schemas.microsoft.com/office/drawing/2014/main" id="{DC6C52E4-7A16-A6FD-0E8E-5DB151B24147}"/>
-              </a:ext>
-            </a:extLst>
-          </p:cNvPr>
-          <p:cNvSpPr txBox="1"/>
-          <p:nvPr/>
-        </p:nvSpPr>
-        <p:spPr>
-          <a:xfrm>
-            <a:off x="9827741" y="5272219"/>
-            <a:ext cx="2195285" cy="646331"/>
-          </a:xfrm>
-          <a:prstGeom prst="rect">
-            <a:avLst/>
-          </a:prstGeom>
-          <a:noFill/>
-        </p:spPr>
-        <p:txBody>
-          <a:bodyPr wrap="square" rtlCol="0">
-            <a:spAutoFit/>
-          </a:bodyPr>
-          <a:lstStyle/>
-          <a:p>
-            <a:r>
-              <a:rPr lang="en-US" dirty="0">
-                <a:solidFill>
-                  <a:schemeClr val="bg1"/>
-                </a:solidFill>
-              </a:rPr>
-              <a:t>Solution Architect</a:t>
-            </a:r>
-          </a:p>
-          <a:p>
-            <a:r>
-              <a:rPr lang="en-US" dirty="0">
-                <a:solidFill>
-                  <a:schemeClr val="bg1"/>
-                </a:solidFill>
-              </a:rPr>
-              <a:t>Date</a:t>
-            </a:r>
+          <a:p>
+            <a:pPr algn="ctr"/>
+            <a:endParaRPr lang="en-GB" sz="3600" b="0" dirty="0">
+              <a:latin typeface="Aptos Narrow" panose="020B0004020202020204" pitchFamily="34" charset="0"/>
+            </a:endParaRPr>
           </a:p>
         </p:txBody>
       </p:sp>
@@ -2786,7 +3447,495 @@
 </p:sld>
 </file>
 
+<file path=ppt/slides/slide10.xml><?xml version="1.0" encoding="utf-8"?>
+<p:sld xmlns:a="http://schemas.openxmlformats.org/drawingml/2006/main" xmlns:r="http://schemas.openxmlformats.org/officeDocument/2006/relationships" xmlns:p="http://schemas.openxmlformats.org/presentationml/2006/main">
+  <p:cSld>
+    <p:spTree>
+      <p:nvGrpSpPr>
+        <p:cNvPr id="1" name="">
+          <a:extLst>
+            <a:ext uri="{FF2B5EF4-FFF2-40B4-BE49-F238E27FC236}">
+              <a16:creationId xmlns:a16="http://schemas.microsoft.com/office/drawing/2014/main" id="{1539C861-D135-ECEA-D3DE-917BB2353B03}"/>
+            </a:ext>
+          </a:extLst>
+        </p:cNvPr>
+        <p:cNvGrpSpPr/>
+        <p:nvPr/>
+      </p:nvGrpSpPr>
+      <p:grpSpPr>
+        <a:xfrm>
+          <a:off x="0" y="0"/>
+          <a:ext cx="0" cy="0"/>
+          <a:chOff x="0" y="0"/>
+          <a:chExt cx="0" cy="0"/>
+        </a:xfrm>
+      </p:grpSpPr>
+      <p:sp>
+        <p:nvSpPr>
+          <p:cNvPr id="2" name="Slide Number Placeholder 1">
+            <a:extLst>
+              <a:ext uri="{FF2B5EF4-FFF2-40B4-BE49-F238E27FC236}">
+                <a16:creationId xmlns:a16="http://schemas.microsoft.com/office/drawing/2014/main" id="{C45C2F6E-845F-43E2-3A73-19362F6ECF40}"/>
+              </a:ext>
+            </a:extLst>
+          </p:cNvPr>
+          <p:cNvSpPr>
+            <a:spLocks noGrp="1"/>
+          </p:cNvSpPr>
+          <p:nvPr>
+            <p:ph type="sldNum" sz="quarter" idx="12"/>
+          </p:nvPr>
+        </p:nvSpPr>
+        <p:spPr/>
+        <p:txBody>
+          <a:bodyPr/>
+          <a:lstStyle/>
+          <a:p>
+            <a:fld id="{93288B1A-0894-4E52-95D8-2AC74CBED725}" type="slidenum">
+              <a:rPr lang="en-US" smtClean="0"/>
+              <a:t>10</a:t>
+            </a:fld>
+            <a:endParaRPr lang="en-US"/>
+          </a:p>
+        </p:txBody>
+      </p:sp>
+      <p:sp>
+        <p:nvSpPr>
+          <p:cNvPr id="3" name="Text Placeholder 2">
+            <a:extLst>
+              <a:ext uri="{FF2B5EF4-FFF2-40B4-BE49-F238E27FC236}">
+                <a16:creationId xmlns:a16="http://schemas.microsoft.com/office/drawing/2014/main" id="{E59B804F-5730-FD49-EB4D-B8A1734C8105}"/>
+              </a:ext>
+            </a:extLst>
+          </p:cNvPr>
+          <p:cNvSpPr>
+            <a:spLocks noGrp="1"/>
+          </p:cNvSpPr>
+          <p:nvPr>
+            <p:ph type="body" idx="1"/>
+          </p:nvPr>
+        </p:nvSpPr>
+        <p:spPr/>
+        <p:txBody>
+          <a:bodyPr/>
+          <a:lstStyle/>
+          <a:p>
+            <a:r>
+              <a:rPr lang="en-US" dirty="0"/>
+              <a:t>Future Consideration (Accessing Archived Data)</a:t>
+            </a:r>
+          </a:p>
+        </p:txBody>
+      </p:sp>
+      <p:sp>
+        <p:nvSpPr>
+          <p:cNvPr id="10" name="TextBox 9">
+            <a:extLst>
+              <a:ext uri="{FF2B5EF4-FFF2-40B4-BE49-F238E27FC236}">
+                <a16:creationId xmlns:a16="http://schemas.microsoft.com/office/drawing/2014/main" id="{A7AA6CF1-1EE1-3841-86E9-9D5C18463E91}"/>
+              </a:ext>
+            </a:extLst>
+          </p:cNvPr>
+          <p:cNvSpPr txBox="1"/>
+          <p:nvPr/>
+        </p:nvSpPr>
+        <p:spPr>
+          <a:xfrm>
+            <a:off x="609599" y="1015483"/>
+            <a:ext cx="10412627" cy="3416320"/>
+          </a:xfrm>
+          <a:prstGeom prst="rect">
+            <a:avLst/>
+          </a:prstGeom>
+          <a:noFill/>
+        </p:spPr>
+        <p:txBody>
+          <a:bodyPr wrap="square">
+            <a:spAutoFit/>
+          </a:bodyPr>
+          <a:lstStyle/>
+          <a:p>
+            <a:pPr>
+              <a:lnSpc>
+                <a:spcPct val="150000"/>
+              </a:lnSpc>
+            </a:pPr>
+            <a:r>
+              <a:rPr lang="en-US" b="1" dirty="0"/>
+              <a:t>1. Database Replica</a:t>
+            </a:r>
+            <a:r>
+              <a:rPr lang="en-US" dirty="0"/>
+              <a:t> </a:t>
+            </a:r>
+          </a:p>
+          <a:p>
+            <a:pPr lvl="1">
+              <a:lnSpc>
+                <a:spcPct val="150000"/>
+              </a:lnSpc>
+            </a:pPr>
+            <a:r>
+              <a:rPr lang="en-US" dirty="0"/>
+              <a:t>Read-only access to archived data </a:t>
+            </a:r>
+          </a:p>
+          <a:p>
+            <a:pPr>
+              <a:lnSpc>
+                <a:spcPct val="150000"/>
+              </a:lnSpc>
+            </a:pPr>
+            <a:r>
+              <a:rPr lang="en-US" b="1" dirty="0"/>
+              <a:t>2. Data Lake / Reporting Layer</a:t>
+            </a:r>
+            <a:r>
+              <a:rPr lang="en-US" dirty="0"/>
+              <a:t> </a:t>
+            </a:r>
+          </a:p>
+          <a:p>
+            <a:pPr lvl="1">
+              <a:lnSpc>
+                <a:spcPct val="150000"/>
+              </a:lnSpc>
+            </a:pPr>
+            <a:r>
+              <a:rPr lang="en-US" dirty="0"/>
+              <a:t>Centralized reporting system </a:t>
+            </a:r>
+          </a:p>
+          <a:p>
+            <a:pPr>
+              <a:lnSpc>
+                <a:spcPct val="150000"/>
+              </a:lnSpc>
+            </a:pPr>
+            <a:r>
+              <a:rPr lang="en-US" b="1" dirty="0"/>
+              <a:t>3. Application Integration</a:t>
+            </a:r>
+            <a:r>
+              <a:rPr lang="en-US" dirty="0"/>
+              <a:t> </a:t>
+            </a:r>
+          </a:p>
+          <a:p>
+            <a:pPr lvl="1">
+              <a:lnSpc>
+                <a:spcPct val="150000"/>
+              </a:lnSpc>
+            </a:pPr>
+            <a:r>
+              <a:rPr lang="en-US" dirty="0"/>
+              <a:t>Query both active + archive data if needed</a:t>
+            </a:r>
+          </a:p>
+          <a:p>
+            <a:endParaRPr lang="en-US" dirty="0"/>
+          </a:p>
+          <a:p>
+            <a:endParaRPr lang="en-US" dirty="0"/>
+          </a:p>
+          <a:p>
+            <a:endParaRPr lang="en-US" dirty="0"/>
+          </a:p>
+        </p:txBody>
+      </p:sp>
+    </p:spTree>
+    <p:extLst>
+      <p:ext uri="{BB962C8B-B14F-4D97-AF65-F5344CB8AC3E}">
+        <p14:creationId xmlns:p14="http://schemas.microsoft.com/office/powerpoint/2010/main" val="51548162"/>
+      </p:ext>
+    </p:extLst>
+  </p:cSld>
+  <p:clrMapOvr>
+    <a:masterClrMapping/>
+  </p:clrMapOvr>
+</p:sld>
+</file>
+
+<file path=ppt/slides/slide11.xml><?xml version="1.0" encoding="utf-8"?>
+<p:sld xmlns:a="http://schemas.openxmlformats.org/drawingml/2006/main" xmlns:r="http://schemas.openxmlformats.org/officeDocument/2006/relationships" xmlns:p="http://schemas.openxmlformats.org/presentationml/2006/main">
+  <p:cSld>
+    <p:spTree>
+      <p:nvGrpSpPr>
+        <p:cNvPr id="1" name=""/>
+        <p:cNvGrpSpPr/>
+        <p:nvPr/>
+      </p:nvGrpSpPr>
+      <p:grpSpPr>
+        <a:xfrm>
+          <a:off x="0" y="0"/>
+          <a:ext cx="0" cy="0"/>
+          <a:chOff x="0" y="0"/>
+          <a:chExt cx="0" cy="0"/>
+        </a:xfrm>
+      </p:grpSpPr>
+      <p:sp>
+        <p:nvSpPr>
+          <p:cNvPr id="2" name="Slide Number Placeholder 1">
+            <a:extLst>
+              <a:ext uri="{FF2B5EF4-FFF2-40B4-BE49-F238E27FC236}">
+                <a16:creationId xmlns:a16="http://schemas.microsoft.com/office/drawing/2014/main" id="{FD9C983F-458B-06E6-E4F8-F1462FB49156}"/>
+              </a:ext>
+            </a:extLst>
+          </p:cNvPr>
+          <p:cNvSpPr>
+            <a:spLocks noGrp="1"/>
+          </p:cNvSpPr>
+          <p:nvPr>
+            <p:ph type="sldNum" sz="quarter" idx="12"/>
+          </p:nvPr>
+        </p:nvSpPr>
+        <p:spPr/>
+        <p:txBody>
+          <a:bodyPr/>
+          <a:lstStyle/>
+          <a:p>
+            <a:fld id="{93288B1A-0894-4E52-95D8-2AC74CBED725}" type="slidenum">
+              <a:rPr lang="en-US" smtClean="0"/>
+              <a:t>11</a:t>
+            </a:fld>
+            <a:endParaRPr lang="en-US"/>
+          </a:p>
+        </p:txBody>
+      </p:sp>
+      <p:sp>
+        <p:nvSpPr>
+          <p:cNvPr id="3" name="Text Placeholder 2">
+            <a:extLst>
+              <a:ext uri="{FF2B5EF4-FFF2-40B4-BE49-F238E27FC236}">
+                <a16:creationId xmlns:a16="http://schemas.microsoft.com/office/drawing/2014/main" id="{E2F2EA55-F46C-8AB0-0140-A4E9772F2B82}"/>
+              </a:ext>
+            </a:extLst>
+          </p:cNvPr>
+          <p:cNvSpPr>
+            <a:spLocks noGrp="1"/>
+          </p:cNvSpPr>
+          <p:nvPr>
+            <p:ph type="body" idx="1"/>
+          </p:nvPr>
+        </p:nvSpPr>
+        <p:spPr>
+          <a:xfrm>
+            <a:off x="0" y="3000635"/>
+            <a:ext cx="12191999" cy="518983"/>
+          </a:xfrm>
+        </p:spPr>
+        <p:txBody>
+          <a:bodyPr/>
+          <a:lstStyle/>
+          <a:p>
+            <a:pPr algn="ctr"/>
+            <a:r>
+              <a:rPr lang="en-US" dirty="0"/>
+              <a:t>Thank You!</a:t>
+            </a:r>
+          </a:p>
+        </p:txBody>
+      </p:sp>
+    </p:spTree>
+    <p:extLst>
+      <p:ext uri="{BB962C8B-B14F-4D97-AF65-F5344CB8AC3E}">
+        <p14:creationId xmlns:p14="http://schemas.microsoft.com/office/powerpoint/2010/main" val="1784669213"/>
+      </p:ext>
+    </p:extLst>
+  </p:cSld>
+  <p:clrMapOvr>
+    <a:masterClrMapping/>
+  </p:clrMapOvr>
+</p:sld>
+</file>
+
 <file path=ppt/slides/slide2.xml><?xml version="1.0" encoding="utf-8"?>
+<p:sld xmlns:a="http://schemas.openxmlformats.org/drawingml/2006/main" xmlns:r="http://schemas.openxmlformats.org/officeDocument/2006/relationships" xmlns:p="http://schemas.openxmlformats.org/presentationml/2006/main">
+  <p:cSld>
+    <p:spTree>
+      <p:nvGrpSpPr>
+        <p:cNvPr id="1" name="">
+          <a:extLst>
+            <a:ext uri="{FF2B5EF4-FFF2-40B4-BE49-F238E27FC236}">
+              <a16:creationId xmlns:a16="http://schemas.microsoft.com/office/drawing/2014/main" id="{8C30A47B-7C79-2FD3-208D-85959C536ED1}"/>
+            </a:ext>
+          </a:extLst>
+        </p:cNvPr>
+        <p:cNvGrpSpPr/>
+        <p:nvPr/>
+      </p:nvGrpSpPr>
+      <p:grpSpPr>
+        <a:xfrm>
+          <a:off x="0" y="0"/>
+          <a:ext cx="0" cy="0"/>
+          <a:chOff x="0" y="0"/>
+          <a:chExt cx="0" cy="0"/>
+        </a:xfrm>
+      </p:grpSpPr>
+      <p:sp>
+        <p:nvSpPr>
+          <p:cNvPr id="2" name="Slide Number Placeholder 1">
+            <a:extLst>
+              <a:ext uri="{FF2B5EF4-FFF2-40B4-BE49-F238E27FC236}">
+                <a16:creationId xmlns:a16="http://schemas.microsoft.com/office/drawing/2014/main" id="{07FD6095-9105-0298-EC5C-D17125A79CBF}"/>
+              </a:ext>
+            </a:extLst>
+          </p:cNvPr>
+          <p:cNvSpPr>
+            <a:spLocks noGrp="1"/>
+          </p:cNvSpPr>
+          <p:nvPr>
+            <p:ph type="sldNum" sz="quarter" idx="12"/>
+          </p:nvPr>
+        </p:nvSpPr>
+        <p:spPr/>
+        <p:txBody>
+          <a:bodyPr/>
+          <a:lstStyle/>
+          <a:p>
+            <a:fld id="{93288B1A-0894-4E52-95D8-2AC74CBED725}" type="slidenum">
+              <a:rPr lang="en-US" smtClean="0"/>
+              <a:t>2</a:t>
+            </a:fld>
+            <a:endParaRPr lang="en-US"/>
+          </a:p>
+        </p:txBody>
+      </p:sp>
+      <p:sp>
+        <p:nvSpPr>
+          <p:cNvPr id="3" name="Text Placeholder 2">
+            <a:extLst>
+              <a:ext uri="{FF2B5EF4-FFF2-40B4-BE49-F238E27FC236}">
+                <a16:creationId xmlns:a16="http://schemas.microsoft.com/office/drawing/2014/main" id="{ACB43DE3-EEDF-A94A-0EAE-C7F6C3004D33}"/>
+              </a:ext>
+            </a:extLst>
+          </p:cNvPr>
+          <p:cNvSpPr>
+            <a:spLocks noGrp="1"/>
+          </p:cNvSpPr>
+          <p:nvPr>
+            <p:ph type="body" idx="1"/>
+          </p:nvPr>
+        </p:nvSpPr>
+        <p:spPr/>
+        <p:txBody>
+          <a:bodyPr/>
+          <a:lstStyle/>
+          <a:p>
+            <a:r>
+              <a:rPr lang="en-US" dirty="0"/>
+              <a:t>Objective</a:t>
+            </a:r>
+          </a:p>
+        </p:txBody>
+      </p:sp>
+      <p:sp>
+        <p:nvSpPr>
+          <p:cNvPr id="10" name="TextBox 9">
+            <a:extLst>
+              <a:ext uri="{FF2B5EF4-FFF2-40B4-BE49-F238E27FC236}">
+                <a16:creationId xmlns:a16="http://schemas.microsoft.com/office/drawing/2014/main" id="{3F33C3D5-239C-0839-9ACD-697752781856}"/>
+              </a:ext>
+            </a:extLst>
+          </p:cNvPr>
+          <p:cNvSpPr txBox="1"/>
+          <p:nvPr/>
+        </p:nvSpPr>
+        <p:spPr>
+          <a:xfrm>
+            <a:off x="267462" y="1254261"/>
+            <a:ext cx="10412627" cy="2308324"/>
+          </a:xfrm>
+          <a:prstGeom prst="rect">
+            <a:avLst/>
+          </a:prstGeom>
+          <a:noFill/>
+        </p:spPr>
+        <p:txBody>
+          <a:bodyPr wrap="square">
+            <a:spAutoFit/>
+          </a:bodyPr>
+          <a:lstStyle/>
+          <a:p>
+            <a:pPr>
+              <a:lnSpc>
+                <a:spcPct val="150000"/>
+              </a:lnSpc>
+            </a:pPr>
+            <a:r>
+              <a:rPr lang="en-US" dirty="0"/>
+              <a:t>To improve G&amp;G </a:t>
+            </a:r>
+            <a:r>
+              <a:rPr lang="en-US" dirty="0" err="1"/>
+              <a:t>Eservice</a:t>
+            </a:r>
+            <a:r>
+              <a:rPr lang="en-US" dirty="0"/>
+              <a:t> database performance and stability by:</a:t>
+            </a:r>
+          </a:p>
+          <a:p>
+            <a:pPr marL="742950" lvl="1" indent="-285750">
+              <a:lnSpc>
+                <a:spcPct val="150000"/>
+              </a:lnSpc>
+              <a:buFont typeface="Wingdings" panose="05000000000000000000" pitchFamily="2" charset="2"/>
+              <a:buChar char="Ø"/>
+            </a:pPr>
+            <a:r>
+              <a:rPr lang="en-US" dirty="0"/>
+              <a:t>Reducing data volume in primary tables </a:t>
+            </a:r>
+          </a:p>
+          <a:p>
+            <a:pPr marL="742950" lvl="1" indent="-285750">
+              <a:lnSpc>
+                <a:spcPct val="150000"/>
+              </a:lnSpc>
+              <a:buFont typeface="Wingdings" panose="05000000000000000000" pitchFamily="2" charset="2"/>
+              <a:buChar char="Ø"/>
+            </a:pPr>
+            <a:r>
+              <a:rPr lang="en-US" dirty="0"/>
+              <a:t>Eliminating full table scans </a:t>
+            </a:r>
+          </a:p>
+          <a:p>
+            <a:pPr marL="742950" lvl="1" indent="-285750">
+              <a:lnSpc>
+                <a:spcPct val="150000"/>
+              </a:lnSpc>
+              <a:buFont typeface="Wingdings" panose="05000000000000000000" pitchFamily="2" charset="2"/>
+              <a:buChar char="Ø"/>
+            </a:pPr>
+            <a:r>
+              <a:rPr lang="en-US" dirty="0"/>
+              <a:t>Ensuring system readiness for future expansion</a:t>
+            </a:r>
+          </a:p>
+          <a:p>
+            <a:endParaRPr lang="en-US" dirty="0"/>
+          </a:p>
+          <a:p>
+            <a:endParaRPr lang="en-US" dirty="0"/>
+          </a:p>
+        </p:txBody>
+      </p:sp>
+    </p:spTree>
+    <p:extLst>
+      <p:ext uri="{BB962C8B-B14F-4D97-AF65-F5344CB8AC3E}">
+        <p14:creationId xmlns:p14="http://schemas.microsoft.com/office/powerpoint/2010/main" val="1478448038"/>
+      </p:ext>
+    </p:extLst>
+  </p:cSld>
+  <p:clrMapOvr>
+    <a:masterClrMapping/>
+  </p:clrMapOvr>
+</p:sld>
+</file>
+
+<file path=ppt/slides/slide3.xml><?xml version="1.0" encoding="utf-8"?>
 <p:sld xmlns:a="http://schemas.openxmlformats.org/drawingml/2006/main" xmlns:r="http://schemas.openxmlformats.org/officeDocument/2006/relationships" xmlns:p="http://schemas.openxmlformats.org/presentationml/2006/main">
   <p:cSld>
     <p:spTree>
@@ -2832,7 +3981,7 @@
           <a:p>
             <a:fld id="{93288B1A-0894-4E52-95D8-2AC74CBED725}" type="slidenum">
               <a:rPr lang="en-US" smtClean="0"/>
-              <a:t>2</a:t>
+              <a:t>3</a:t>
             </a:fld>
             <a:endParaRPr lang="en-US"/>
           </a:p>
@@ -2861,7 +4010,7 @@
           <a:p>
             <a:r>
               <a:rPr lang="en-US" dirty="0"/>
-              <a:t>About large volume table</a:t>
+              <a:t>Current Database Situation</a:t>
             </a:r>
           </a:p>
         </p:txBody>
@@ -2880,8 +4029,8 @@
         </p:nvSpPr>
         <p:spPr>
           <a:xfrm>
-            <a:off x="609599" y="1015483"/>
-            <a:ext cx="10412627" cy="1200329"/>
+            <a:off x="267462" y="1254261"/>
+            <a:ext cx="10412627" cy="3462486"/>
           </a:xfrm>
           <a:prstGeom prst="rect">
             <a:avLst/>
@@ -2894,42 +4043,241 @@
           </a:bodyPr>
           <a:lstStyle/>
           <a:p>
-            <a:r>
-              <a:rPr lang="en-US" dirty="0"/>
-              <a:t>Current </a:t>
-            </a:r>
-            <a:r>
-              <a:rPr lang="en-US" dirty="0" err="1"/>
-              <a:t>G&amp;Geservice</a:t>
-            </a:r>
-            <a:r>
-              <a:rPr lang="en-US" dirty="0"/>
-              <a:t> database have following table with large volume which cause </a:t>
-            </a:r>
-            <a:r>
-              <a:rPr lang="en-US" b="1" dirty="0"/>
-              <a:t>large CPU usage </a:t>
-            </a:r>
-            <a:r>
-              <a:rPr lang="en-US" dirty="0"/>
-              <a:t>,</a:t>
-            </a:r>
-            <a:r>
-              <a:rPr lang="en-US" b="1" dirty="0"/>
-              <a:t>disk</a:t>
-            </a:r>
-            <a:r>
-              <a:rPr lang="en-US" dirty="0"/>
-              <a:t> and impact on </a:t>
-            </a:r>
-            <a:r>
-              <a:rPr lang="en-US" b="1" dirty="0"/>
-              <a:t>query performance </a:t>
-            </a:r>
-            <a:r>
-              <a:rPr lang="en-US" dirty="0"/>
-              <a:t>database process which lead to failure on doing database transaction</a:t>
-            </a:r>
+            <a:pPr>
+              <a:lnSpc>
+                <a:spcPct val="150000"/>
+              </a:lnSpc>
+            </a:pPr>
+            <a:r>
+              <a:rPr lang="en-US" dirty="0">
+                <a:latin typeface="+mj-lt"/>
+              </a:rPr>
+              <a:t>The G&amp;G </a:t>
+            </a:r>
+            <a:r>
+              <a:rPr lang="en-US" dirty="0" err="1">
+                <a:latin typeface="+mj-lt"/>
+              </a:rPr>
+              <a:t>Eservice</a:t>
+            </a:r>
+            <a:r>
+              <a:rPr lang="en-US" dirty="0">
+                <a:latin typeface="+mj-lt"/>
+              </a:rPr>
+              <a:t> database contains several high-volume tables that are continuously growing due to daily transaction processing.</a:t>
+            </a:r>
+            <a:endParaRPr lang="en-US" altLang="en-US" dirty="0">
+              <a:latin typeface="+mj-lt"/>
+            </a:endParaRPr>
+          </a:p>
+          <a:p>
+            <a:pPr lvl="0" eaLnBrk="0" fontAlgn="base" hangingPunct="0">
+              <a:lnSpc>
+                <a:spcPct val="150000"/>
+              </a:lnSpc>
+              <a:spcBef>
+                <a:spcPct val="0"/>
+              </a:spcBef>
+              <a:spcAft>
+                <a:spcPct val="0"/>
+              </a:spcAft>
+              <a:buFontTx/>
+              <a:buChar char="•"/>
+            </a:pPr>
+            <a:r>
+              <a:rPr lang="en-US" altLang="en-US" dirty="0">
+                <a:latin typeface="+mj-lt"/>
+              </a:rPr>
+              <a:t>The system processes </a:t>
+            </a:r>
+            <a:r>
+              <a:rPr lang="en-US" altLang="en-US" b="1" dirty="0">
+                <a:latin typeface="+mj-lt"/>
+              </a:rPr>
+              <a:t>8,000–14,000 transactions per day</a:t>
+            </a:r>
+            <a:r>
+              <a:rPr lang="en-US" altLang="en-US" dirty="0">
+                <a:latin typeface="+mj-lt"/>
+              </a:rPr>
+              <a:t> </a:t>
+            </a:r>
+          </a:p>
+          <a:p>
+            <a:pPr lvl="0" eaLnBrk="0" fontAlgn="base" hangingPunct="0">
+              <a:lnSpc>
+                <a:spcPct val="150000"/>
+              </a:lnSpc>
+              <a:spcBef>
+                <a:spcPct val="0"/>
+              </a:spcBef>
+              <a:spcAft>
+                <a:spcPct val="0"/>
+              </a:spcAft>
+              <a:buFontTx/>
+              <a:buChar char="•"/>
+            </a:pPr>
+            <a:r>
+              <a:rPr lang="en-US" altLang="en-US" dirty="0">
+                <a:latin typeface="+mj-lt"/>
+              </a:rPr>
+              <a:t>Around </a:t>
+            </a:r>
+            <a:r>
+              <a:rPr lang="en-US" altLang="en-US" b="1" dirty="0">
+                <a:latin typeface="+mj-lt"/>
+              </a:rPr>
+              <a:t>280,000 records are inserted monthly</a:t>
+            </a:r>
+            <a:r>
+              <a:rPr lang="en-US" altLang="en-US" dirty="0">
+                <a:latin typeface="+mj-lt"/>
+              </a:rPr>
+              <a:t> into </a:t>
+            </a:r>
+            <a:r>
+              <a:rPr lang="en-US" altLang="en-US" dirty="0" err="1">
+                <a:latin typeface="+mj-lt"/>
+              </a:rPr>
+              <a:t>sale_transaction</a:t>
+            </a:r>
+            <a:r>
+              <a:rPr lang="en-US" altLang="en-US" dirty="0">
+                <a:latin typeface="+mj-lt"/>
+              </a:rPr>
+              <a:t> </a:t>
+            </a:r>
+          </a:p>
+          <a:p>
+            <a:pPr lvl="0" eaLnBrk="0" fontAlgn="base" hangingPunct="0">
+              <a:lnSpc>
+                <a:spcPct val="150000"/>
+              </a:lnSpc>
+              <a:spcBef>
+                <a:spcPct val="0"/>
+              </a:spcBef>
+              <a:spcAft>
+                <a:spcPct val="0"/>
+              </a:spcAft>
+              <a:buFontTx/>
+              <a:buChar char="•"/>
+            </a:pPr>
+            <a:r>
+              <a:rPr lang="en-US" altLang="en-US" dirty="0">
+                <a:latin typeface="+mj-lt"/>
+              </a:rPr>
+              <a:t>Each transaction affects multiple related tables: </a:t>
+            </a:r>
+          </a:p>
+          <a:p>
+            <a:pPr marL="171450" lvl="0" indent="-171450" eaLnBrk="0" fontAlgn="base" hangingPunct="0">
+              <a:lnSpc>
+                <a:spcPct val="150000"/>
+              </a:lnSpc>
+              <a:spcBef>
+                <a:spcPct val="0"/>
+              </a:spcBef>
+              <a:spcAft>
+                <a:spcPct val="0"/>
+              </a:spcAft>
+              <a:buFont typeface="Wingdings" panose="05000000000000000000" pitchFamily="2" charset="2"/>
+              <a:buChar char="ü"/>
+            </a:pPr>
+            <a:r>
+              <a:rPr lang="en-US" altLang="en-US" sz="1600" dirty="0" err="1">
+                <a:latin typeface="Courier New" panose="02070309020205020404" pitchFamily="49" charset="0"/>
+                <a:cs typeface="Courier New" panose="02070309020205020404" pitchFamily="49" charset="0"/>
+              </a:rPr>
+              <a:t>commission_transaction</a:t>
+            </a:r>
+            <a:r>
+              <a:rPr lang="en-US" altLang="en-US" sz="1600" dirty="0">
+                <a:latin typeface="Courier New" panose="02070309020205020404" pitchFamily="49" charset="0"/>
+                <a:cs typeface="Courier New" panose="02070309020205020404" pitchFamily="49" charset="0"/>
+              </a:rPr>
+              <a:t>  , </a:t>
+            </a:r>
+            <a:r>
+              <a:rPr lang="en-US" altLang="en-US" sz="1600" dirty="0" err="1">
+                <a:latin typeface="Courier New" panose="02070309020205020404" pitchFamily="49" charset="0"/>
+                <a:cs typeface="Courier New" panose="02070309020205020404" pitchFamily="49" charset="0"/>
+              </a:rPr>
+              <a:t>integration_history</a:t>
+            </a:r>
+            <a:r>
+              <a:rPr lang="en-US" altLang="en-US" sz="1600" dirty="0">
+                <a:latin typeface="Courier New" panose="02070309020205020404" pitchFamily="49" charset="0"/>
+                <a:cs typeface="Courier New" panose="02070309020205020404" pitchFamily="49" charset="0"/>
+              </a:rPr>
+              <a:t> , </a:t>
+            </a:r>
+            <a:r>
+              <a:rPr lang="en-US" altLang="en-US" sz="1600" dirty="0" err="1">
+                <a:latin typeface="Courier New" panose="02070309020205020404" pitchFamily="49" charset="0"/>
+                <a:cs typeface="Courier New" panose="02070309020205020404" pitchFamily="49" charset="0"/>
+              </a:rPr>
+              <a:t>yps_integration</a:t>
+            </a:r>
+            <a:r>
+              <a:rPr lang="en-US" altLang="en-US" sz="1600" dirty="0">
+                <a:latin typeface="Courier New" panose="02070309020205020404" pitchFamily="49" charset="0"/>
+                <a:cs typeface="Courier New" panose="02070309020205020404" pitchFamily="49" charset="0"/>
+              </a:rPr>
+              <a:t> , </a:t>
+            </a:r>
+            <a:r>
+              <a:rPr lang="en-US" altLang="en-US" sz="1600" dirty="0" err="1">
+                <a:latin typeface="Courier New" panose="02070309020205020404" pitchFamily="49" charset="0"/>
+                <a:cs typeface="Courier New" panose="02070309020205020404" pitchFamily="49" charset="0"/>
+              </a:rPr>
+              <a:t>re_print</a:t>
+            </a:r>
+            <a:r>
+              <a:rPr lang="en-US" altLang="en-US" sz="1600" dirty="0">
+                <a:latin typeface="Courier New" panose="02070309020205020404" pitchFamily="49" charset="0"/>
+                <a:cs typeface="Courier New" panose="02070309020205020404" pitchFamily="49" charset="0"/>
+              </a:rPr>
+              <a:t> , </a:t>
+            </a:r>
+            <a:r>
+              <a:rPr lang="en-US" altLang="en-US" sz="1600" dirty="0" err="1">
+                <a:latin typeface="Courier New" panose="02070309020205020404" pitchFamily="49" charset="0"/>
+                <a:cs typeface="Courier New" panose="02070309020205020404" pitchFamily="49" charset="0"/>
+              </a:rPr>
+              <a:t>prefunding_log</a:t>
+            </a:r>
+            <a:r>
+              <a:rPr lang="en-US" altLang="en-US" sz="1600" dirty="0">
+                <a:latin typeface="Courier New" panose="02070309020205020404" pitchFamily="49" charset="0"/>
+                <a:cs typeface="Courier New" panose="02070309020205020404" pitchFamily="49" charset="0"/>
+              </a:rPr>
+              <a:t> ,</a:t>
+            </a:r>
+            <a:r>
+              <a:rPr lang="en-US" altLang="en-US" sz="1600" dirty="0" err="1">
+                <a:latin typeface="Courier New" panose="02070309020205020404" pitchFamily="49" charset="0"/>
+                <a:cs typeface="Courier New" panose="02070309020205020404" pitchFamily="49" charset="0"/>
+              </a:rPr>
+              <a:t>print_summary</a:t>
+            </a:r>
+            <a:r>
+              <a:rPr lang="en-US" altLang="en-US" sz="1600" dirty="0">
+                <a:latin typeface="Courier New" panose="02070309020205020404" pitchFamily="49" charset="0"/>
+                <a:cs typeface="Courier New" panose="02070309020205020404" pitchFamily="49" charset="0"/>
+              </a:rPr>
+              <a:t>  ,</a:t>
+            </a:r>
+            <a:r>
+              <a:rPr lang="en-US" altLang="en-US" sz="1600" dirty="0" err="1">
+                <a:latin typeface="Courier New" panose="02070309020205020404" pitchFamily="49" charset="0"/>
+                <a:cs typeface="Courier New" panose="02070309020205020404" pitchFamily="49" charset="0"/>
+              </a:rPr>
+              <a:t>workshift_action</a:t>
+            </a:r>
+            <a:endParaRPr lang="en-US" altLang="en-US" sz="1600" dirty="0">
+              <a:latin typeface="Courier New" panose="02070309020205020404" pitchFamily="49" charset="0"/>
+              <a:cs typeface="Courier New" panose="02070309020205020404" pitchFamily="49" charset="0"/>
+            </a:endParaRPr>
           </a:p>
           <a:p>
             <a:endParaRPr lang="en-US" dirty="0"/>
@@ -2939,36 +4287,142 @@
           </a:p>
         </p:txBody>
       </p:sp>
-      <p:pic>
-        <p:nvPicPr>
-          <p:cNvPr id="7" name="Picture 6">
+      <p:sp>
+        <p:nvSpPr>
+          <p:cNvPr id="6" name="TextBox 5">
             <a:extLst>
               <a:ext uri="{FF2B5EF4-FFF2-40B4-BE49-F238E27FC236}">
-                <a16:creationId xmlns:a16="http://schemas.microsoft.com/office/drawing/2014/main" id="{2F70AED5-C218-F2F7-C043-2BAF911CB87C}"/>
+                <a16:creationId xmlns:a16="http://schemas.microsoft.com/office/drawing/2014/main" id="{E8977681-DE78-80E7-CEC5-090747F4C33D}"/>
               </a:ext>
             </a:extLst>
           </p:cNvPr>
-          <p:cNvPicPr>
-            <a:picLocks noChangeAspect="1"/>
-          </p:cNvPicPr>
+          <p:cNvSpPr txBox="1"/>
           <p:nvPr/>
-        </p:nvPicPr>
-        <p:blipFill>
-          <a:blip r:embed="rId2"/>
-          <a:stretch>
-            <a:fillRect/>
-          </a:stretch>
-        </p:blipFill>
+        </p:nvSpPr>
         <p:spPr>
           <a:xfrm>
-            <a:off x="1904079" y="2026481"/>
-            <a:ext cx="4953921" cy="3689090"/>
+            <a:off x="267462" y="884929"/>
+            <a:ext cx="6094476" cy="400110"/>
           </a:xfrm>
           <a:prstGeom prst="rect">
             <a:avLst/>
           </a:prstGeom>
+          <a:noFill/>
         </p:spPr>
-      </p:pic>
+        <p:txBody>
+          <a:bodyPr wrap="square">
+            <a:spAutoFit/>
+          </a:bodyPr>
+          <a:lstStyle/>
+          <a:p>
+            <a:r>
+              <a:rPr lang="en-US" sz="2000" b="1" dirty="0"/>
+              <a:t>High Data Volume &amp; Growth Impact</a:t>
+            </a:r>
+          </a:p>
+        </p:txBody>
+      </p:sp>
+      <p:sp>
+        <p:nvSpPr>
+          <p:cNvPr id="15" name="TextBox 14">
+            <a:extLst>
+              <a:ext uri="{FF2B5EF4-FFF2-40B4-BE49-F238E27FC236}">
+                <a16:creationId xmlns:a16="http://schemas.microsoft.com/office/drawing/2014/main" id="{141E0265-8DF2-0261-59C1-778167F723BA}"/>
+              </a:ext>
+            </a:extLst>
+          </p:cNvPr>
+          <p:cNvSpPr txBox="1"/>
+          <p:nvPr/>
+        </p:nvSpPr>
+        <p:spPr>
+          <a:xfrm>
+            <a:off x="395478" y="4178327"/>
+            <a:ext cx="6094476" cy="1880643"/>
+          </a:xfrm>
+          <a:prstGeom prst="rect">
+            <a:avLst/>
+          </a:prstGeom>
+          <a:noFill/>
+        </p:spPr>
+        <p:txBody>
+          <a:bodyPr wrap="square">
+            <a:spAutoFit/>
+          </a:bodyPr>
+          <a:lstStyle/>
+          <a:p>
+            <a:endParaRPr lang="en-US" dirty="0"/>
+          </a:p>
+          <a:p>
+            <a:r>
+              <a:rPr lang="en-US" sz="2000" b="1" dirty="0"/>
+              <a:t>Impact:</a:t>
+            </a:r>
+          </a:p>
+          <a:p>
+            <a:pPr lvl="0" eaLnBrk="0" fontAlgn="base" hangingPunct="0">
+              <a:lnSpc>
+                <a:spcPct val="150000"/>
+              </a:lnSpc>
+              <a:spcBef>
+                <a:spcPct val="0"/>
+              </a:spcBef>
+              <a:spcAft>
+                <a:spcPct val="0"/>
+              </a:spcAft>
+              <a:buFontTx/>
+              <a:buChar char="•"/>
+            </a:pPr>
+            <a:r>
+              <a:rPr lang="en-US" altLang="en-US" dirty="0">
+                <a:latin typeface="+mj-lt"/>
+              </a:rPr>
+              <a:t>Increased CPU and disk usage </a:t>
+            </a:r>
+          </a:p>
+          <a:p>
+            <a:pPr lvl="0" eaLnBrk="0" fontAlgn="base" hangingPunct="0">
+              <a:lnSpc>
+                <a:spcPct val="150000"/>
+              </a:lnSpc>
+              <a:spcBef>
+                <a:spcPct val="0"/>
+              </a:spcBef>
+              <a:spcAft>
+                <a:spcPct val="0"/>
+              </a:spcAft>
+              <a:buFontTx/>
+              <a:buChar char="•"/>
+            </a:pPr>
+            <a:r>
+              <a:rPr lang="en-US" altLang="en-US" dirty="0">
+                <a:latin typeface="+mj-lt"/>
+              </a:rPr>
+              <a:t>Slower query performance </a:t>
+            </a:r>
+          </a:p>
+          <a:p>
+            <a:pPr lvl="0" eaLnBrk="0" fontAlgn="base" hangingPunct="0">
+              <a:lnSpc>
+                <a:spcPct val="150000"/>
+              </a:lnSpc>
+              <a:spcBef>
+                <a:spcPct val="0"/>
+              </a:spcBef>
+              <a:spcAft>
+                <a:spcPct val="0"/>
+              </a:spcAft>
+              <a:buFontTx/>
+              <a:buChar char="•"/>
+            </a:pPr>
+            <a:r>
+              <a:rPr lang="en-US" altLang="en-US" dirty="0">
+                <a:latin typeface="+mj-lt"/>
+              </a:rPr>
+              <a:t>Higher risk of transaction delay or failure </a:t>
+            </a:r>
+          </a:p>
+        </p:txBody>
+      </p:sp>
     </p:spTree>
     <p:extLst>
       <p:ext uri="{BB962C8B-B14F-4D97-AF65-F5344CB8AC3E}">
@@ -2982,7 +4436,7 @@
 </p:sld>
 </file>
 
-<file path=ppt/slides/slide3.xml><?xml version="1.0" encoding="utf-8"?>
+<file path=ppt/slides/slide4.xml><?xml version="1.0" encoding="utf-8"?>
 <p:sld xmlns:a="http://schemas.openxmlformats.org/drawingml/2006/main" xmlns:r="http://schemas.openxmlformats.org/officeDocument/2006/relationships" xmlns:p="http://schemas.openxmlformats.org/presentationml/2006/main">
   <p:cSld>
     <p:spTree>
@@ -2990,7 +4444,7 @@
         <p:cNvPr id="1" name="">
           <a:extLst>
             <a:ext uri="{FF2B5EF4-FFF2-40B4-BE49-F238E27FC236}">
-              <a16:creationId xmlns:a16="http://schemas.microsoft.com/office/drawing/2014/main" id="{A3487F1A-6BF4-D1F6-91B2-C0A55966F7C6}"/>
+              <a16:creationId xmlns:a16="http://schemas.microsoft.com/office/drawing/2014/main" id="{5E093E78-33EF-AB1E-ECE7-200961025472}"/>
             </a:ext>
           </a:extLst>
         </p:cNvPr>
@@ -3010,7 +4464,7 @@
           <p:cNvPr id="2" name="Slide Number Placeholder 1">
             <a:extLst>
               <a:ext uri="{FF2B5EF4-FFF2-40B4-BE49-F238E27FC236}">
-                <a16:creationId xmlns:a16="http://schemas.microsoft.com/office/drawing/2014/main" id="{CC1173C9-ACA7-F18F-9684-1D11439B5627}"/>
+                <a16:creationId xmlns:a16="http://schemas.microsoft.com/office/drawing/2014/main" id="{0E8FE512-6FBF-1DD3-D0DB-90EAEC82F3F9}"/>
               </a:ext>
             </a:extLst>
           </p:cNvPr>
@@ -3028,7 +4482,7 @@
           <a:p>
             <a:fld id="{93288B1A-0894-4E52-95D8-2AC74CBED725}" type="slidenum">
               <a:rPr lang="en-US" smtClean="0"/>
-              <a:t>3</a:t>
+              <a:t>4</a:t>
             </a:fld>
             <a:endParaRPr lang="en-US"/>
           </a:p>
@@ -3039,7 +4493,7 @@
           <p:cNvPr id="3" name="Text Placeholder 2">
             <a:extLst>
               <a:ext uri="{FF2B5EF4-FFF2-40B4-BE49-F238E27FC236}">
-                <a16:creationId xmlns:a16="http://schemas.microsoft.com/office/drawing/2014/main" id="{197FDA4F-00C4-28C3-E2AF-CD2A06ED6A1A}"/>
+                <a16:creationId xmlns:a16="http://schemas.microsoft.com/office/drawing/2014/main" id="{61DF6BE7-6CCD-4586-049A-15870D20D294}"/>
               </a:ext>
             </a:extLst>
           </p:cNvPr>
@@ -3057,7 +4511,7 @@
           <a:p>
             <a:r>
               <a:rPr lang="en-US" dirty="0"/>
-              <a:t>Consideration for Archive , Retention and Improvement</a:t>
+              <a:t>Key Performance Issue</a:t>
             </a:r>
           </a:p>
         </p:txBody>
@@ -3067,7 +4521,7 @@
           <p:cNvPr id="10" name="TextBox 9">
             <a:extLst>
               <a:ext uri="{FF2B5EF4-FFF2-40B4-BE49-F238E27FC236}">
-                <a16:creationId xmlns:a16="http://schemas.microsoft.com/office/drawing/2014/main" id="{69382937-D68B-F1E1-FD00-D62CBF30C2C3}"/>
+                <a16:creationId xmlns:a16="http://schemas.microsoft.com/office/drawing/2014/main" id="{6527E361-9E60-C76E-40A2-199FFBD77473}"/>
               </a:ext>
             </a:extLst>
           </p:cNvPr>
@@ -3076,8 +4530,8 @@
         </p:nvSpPr>
         <p:spPr>
           <a:xfrm>
-            <a:off x="698896" y="1191330"/>
-            <a:ext cx="10412627" cy="4196020"/>
+            <a:off x="644032" y="913835"/>
+            <a:ext cx="10412627" cy="5678478"/>
           </a:xfrm>
           <a:prstGeom prst="rect">
             <a:avLst/>
@@ -3090,425 +4544,373 @@
           </a:bodyPr>
           <a:lstStyle/>
           <a:p>
-            <a:pPr lvl="0" eaLnBrk="0" fontAlgn="base" hangingPunct="0">
-              <a:lnSpc>
-                <a:spcPct val="150000"/>
-              </a:lnSpc>
+            <a:pPr>
               <a:spcBef>
-                <a:spcPct val="0"/>
+                <a:spcPts val="300"/>
               </a:spcBef>
               <a:spcAft>
-                <a:spcPct val="0"/>
+                <a:spcPts val="300"/>
               </a:spcAft>
-              <a:buFontTx/>
-              <a:buChar char="•"/>
             </a:pPr>
             <a:r>
-              <a:rPr lang="en-US" altLang="en-US" dirty="0">
-                <a:latin typeface="Arial" panose="020B0604020202020204" pitchFamily="34" charset="0"/>
-                <a:cs typeface="Arial" panose="020B0604020202020204" pitchFamily="34" charset="0"/>
+              <a:rPr lang="en-US" b="1" dirty="0">
+                <a:latin typeface="+mj-lt"/>
               </a:rPr>
-              <a:t>G&amp;G </a:t>
-            </a:r>
-            <a:r>
-              <a:rPr lang="en-US" altLang="en-US" dirty="0" err="1">
-                <a:latin typeface="Arial" panose="020B0604020202020204" pitchFamily="34" charset="0"/>
-                <a:cs typeface="Arial" panose="020B0604020202020204" pitchFamily="34" charset="0"/>
+              <a:t>Example: Print Summary Bottleneck</a:t>
+            </a:r>
+            <a:endParaRPr lang="en-US" dirty="0">
+              <a:latin typeface="+mj-lt"/>
+            </a:endParaRPr>
+          </a:p>
+          <a:p>
+            <a:pPr>
+              <a:spcBef>
+                <a:spcPts val="300"/>
+              </a:spcBef>
+              <a:spcAft>
+                <a:spcPts val="300"/>
+              </a:spcAft>
+            </a:pPr>
+            <a:r>
+              <a:rPr lang="en-US" dirty="0">
+                <a:latin typeface="+mj-lt"/>
               </a:rPr>
-              <a:t>Eservice</a:t>
-            </a:r>
-            <a:r>
-              <a:rPr lang="en-US" altLang="en-US" dirty="0">
-                <a:latin typeface="Arial" panose="020B0604020202020204" pitchFamily="34" charset="0"/>
-                <a:cs typeface="Arial" panose="020B0604020202020204" pitchFamily="34" charset="0"/>
+              <a:t>For each sale transaction:</a:t>
+            </a:r>
+          </a:p>
+          <a:p>
+            <a:pPr marL="742950" lvl="1" indent="-285750">
+              <a:spcBef>
+                <a:spcPts val="300"/>
+              </a:spcBef>
+              <a:spcAft>
+                <a:spcPts val="300"/>
+              </a:spcAft>
+              <a:buFont typeface="Wingdings" panose="05000000000000000000" pitchFamily="2" charset="2"/>
+              <a:buChar char="§"/>
+            </a:pPr>
+            <a:r>
+              <a:rPr lang="en-US" dirty="0">
+                <a:latin typeface="+mj-lt"/>
               </a:rPr>
-              <a:t> processes </a:t>
-            </a:r>
-            <a:r>
-              <a:rPr lang="en-US" altLang="en-US" b="1" dirty="0">
-                <a:latin typeface="Arial" panose="020B0604020202020204" pitchFamily="34" charset="0"/>
-                <a:cs typeface="Arial" panose="020B0604020202020204" pitchFamily="34" charset="0"/>
+              <a:t>System performs </a:t>
+            </a:r>
+            <a:r>
+              <a:rPr lang="en-US" b="1" dirty="0">
+                <a:latin typeface="+mj-lt"/>
               </a:rPr>
-              <a:t>8,000–12,000 sales transactions per day</a:t>
-            </a:r>
-            <a:r>
-              <a:rPr lang="en-US" altLang="en-US" dirty="0">
-                <a:latin typeface="Arial" panose="020B0604020202020204" pitchFamily="34" charset="0"/>
-                <a:cs typeface="Arial" panose="020B0604020202020204" pitchFamily="34" charset="0"/>
+              <a:t>lookup on </a:t>
+            </a:r>
+            <a:r>
+              <a:rPr lang="en-US" b="1" dirty="0" err="1">
+                <a:latin typeface="+mj-lt"/>
               </a:rPr>
-              <a:t> and </a:t>
-            </a:r>
-            <a:r>
-              <a:rPr lang="en-US" altLang="en-US" b="1" dirty="0">
-                <a:latin typeface="Arial" panose="020B0604020202020204" pitchFamily="34" charset="0"/>
-                <a:cs typeface="Arial" panose="020B0604020202020204" pitchFamily="34" charset="0"/>
-              </a:rPr>
-              <a:t>500–1,200 transactions per hour</a:t>
-            </a:r>
-            <a:r>
-              <a:rPr lang="en-US" altLang="en-US" dirty="0">
-                <a:latin typeface="Arial" panose="020B0604020202020204" pitchFamily="34" charset="0"/>
-                <a:cs typeface="Arial" panose="020B0604020202020204" pitchFamily="34" charset="0"/>
+              <a:t>print_summary</a:t>
+            </a:r>
+            <a:r>
+              <a:rPr lang="en-US" dirty="0">
+                <a:latin typeface="+mj-lt"/>
               </a:rPr>
               <a:t> </a:t>
             </a:r>
           </a:p>
           <a:p>
-            <a:pPr lvl="0" eaLnBrk="0" fontAlgn="base" hangingPunct="0">
-              <a:lnSpc>
-                <a:spcPct val="150000"/>
-              </a:lnSpc>
+            <a:pPr marL="742950" lvl="1" indent="-285750">
               <a:spcBef>
-                <a:spcPct val="0"/>
+                <a:spcPts val="300"/>
               </a:spcBef>
               <a:spcAft>
-                <a:spcPct val="0"/>
+                <a:spcPts val="300"/>
               </a:spcAft>
-              <a:buFontTx/>
-              <a:buChar char="•"/>
+              <a:buFont typeface="Wingdings" panose="05000000000000000000" pitchFamily="2" charset="2"/>
+              <a:buChar char="§"/>
             </a:pPr>
             <a:r>
-              <a:rPr lang="en-US" altLang="en-US" dirty="0">
-                <a:latin typeface="Arial" panose="020B0604020202020204" pitchFamily="34" charset="0"/>
-                <a:cs typeface="Arial" panose="020B0604020202020204" pitchFamily="34" charset="0"/>
+              <a:rPr lang="en-US" dirty="0">
+                <a:latin typeface="+mj-lt"/>
               </a:rPr>
-              <a:t>Around </a:t>
-            </a:r>
-            <a:r>
-              <a:rPr lang="en-US" altLang="en-US" b="1" dirty="0">
-                <a:latin typeface="Arial" panose="020B0604020202020204" pitchFamily="34" charset="0"/>
-                <a:cs typeface="Arial" panose="020B0604020202020204" pitchFamily="34" charset="0"/>
+              <a:t>Condition: </a:t>
+            </a:r>
+            <a:r>
+              <a:rPr lang="en-US" dirty="0" err="1">
+                <a:latin typeface="+mj-lt"/>
               </a:rPr>
-              <a:t>280,000 records</a:t>
-            </a:r>
-            <a:r>
-              <a:rPr lang="en-US" altLang="en-US" dirty="0">
-                <a:latin typeface="Arial" panose="020B0604020202020204" pitchFamily="34" charset="0"/>
-                <a:cs typeface="Arial" panose="020B0604020202020204" pitchFamily="34" charset="0"/>
+              <a:t>product_id</a:t>
+            </a:r>
+            <a:r>
+              <a:rPr lang="en-US" dirty="0">
+                <a:latin typeface="+mj-lt"/>
               </a:rPr>
-              <a:t> are inserted into </a:t>
-            </a:r>
-            <a:r>
-              <a:rPr lang="en-US" altLang="en-US" dirty="0" err="1">
-                <a:latin typeface="Courier New" panose="02070309020205020404" pitchFamily="49" charset="0"/>
-                <a:cs typeface="Courier New" panose="02070309020205020404" pitchFamily="49" charset="0"/>
+              <a:t> + </a:t>
+            </a:r>
+            <a:r>
+              <a:rPr lang="en-US" dirty="0" err="1">
+                <a:latin typeface="+mj-lt"/>
               </a:rPr>
-              <a:t>sale_transaction</a:t>
-            </a:r>
-            <a:r>
-              <a:rPr lang="en-US" altLang="en-US" dirty="0">
-                <a:latin typeface="Courier New" panose="02070309020205020404" pitchFamily="49" charset="0"/>
-                <a:cs typeface="Courier New" panose="02070309020205020404" pitchFamily="49" charset="0"/>
+              <a:t>session_id</a:t>
+            </a:r>
+            <a:r>
+              <a:rPr lang="en-US" dirty="0">
+                <a:latin typeface="+mj-lt"/>
               </a:rPr>
               <a:t> </a:t>
             </a:r>
-            <a:r>
-              <a:rPr lang="en-US" altLang="en-US" dirty="0">
-                <a:latin typeface="Arial" panose="020B0604020202020204" pitchFamily="34" charset="0"/>
-                <a:cs typeface="Arial" panose="020B0604020202020204" pitchFamily="34" charset="0"/>
-              </a:rPr>
-              <a:t>every month </a:t>
-            </a:r>
-          </a:p>
-          <a:p>
-            <a:pPr lvl="0" eaLnBrk="0" fontAlgn="base" hangingPunct="0">
-              <a:lnSpc>
-                <a:spcPct val="150000"/>
-              </a:lnSpc>
+          </a:p>
+          <a:p>
+            <a:pPr>
               <a:spcBef>
-                <a:spcPct val="0"/>
+                <a:spcPts val="300"/>
               </a:spcBef>
               <a:spcAft>
-                <a:spcPct val="0"/>
+                <a:spcPts val="300"/>
               </a:spcAft>
-              <a:buFontTx/>
-              <a:buChar char="•"/>
             </a:pPr>
             <a:r>
-              <a:rPr lang="en-US" altLang="en-US" dirty="0">
-                <a:latin typeface="Arial" panose="020B0604020202020204" pitchFamily="34" charset="0"/>
-                <a:cs typeface="Arial" panose="020B0604020202020204" pitchFamily="34" charset="0"/>
+              <a:rPr lang="en-US" b="1" dirty="0">
+                <a:latin typeface="+mj-lt"/>
               </a:rPr>
-              <a:t>Each sale transaction also affects multiple related tables:</a:t>
-            </a:r>
-            <a:br>
-              <a:rPr lang="en-US" altLang="en-US" dirty="0">
-                <a:latin typeface="Arial" panose="020B0604020202020204" pitchFamily="34" charset="0"/>
-                <a:cs typeface="Arial" panose="020B0604020202020204" pitchFamily="34" charset="0"/>
+              <a:t>Current issue:</a:t>
+            </a:r>
+          </a:p>
+          <a:p>
+            <a:pPr marL="742950" lvl="1" indent="-285750">
+              <a:spcBef>
+                <a:spcPts val="300"/>
+              </a:spcBef>
+              <a:spcAft>
+                <a:spcPts val="300"/>
+              </a:spcAft>
+              <a:buFont typeface="Wingdings" panose="05000000000000000000" pitchFamily="2" charset="2"/>
+              <a:buChar char="§"/>
+            </a:pPr>
+            <a:r>
+              <a:rPr lang="en-US" dirty="0">
+                <a:latin typeface="+mj-lt"/>
               </a:rPr>
-            </a:br>
-            <a:r>
-              <a:rPr lang="en-US" altLang="en-US" dirty="0" err="1">
-                <a:latin typeface="Courier New" panose="02070309020205020404" pitchFamily="49" charset="0"/>
-                <a:cs typeface="Courier New" panose="02070309020205020404" pitchFamily="49" charset="0"/>
+              <a:t>These columns are </a:t>
+            </a:r>
+            <a:r>
+              <a:rPr lang="en-US" b="1" dirty="0">
+                <a:latin typeface="+mj-lt"/>
               </a:rPr>
-              <a:t>commission_transaction</a:t>
-            </a:r>
-            <a:r>
-              <a:rPr lang="en-US" altLang="en-US" dirty="0">
-                <a:latin typeface="Courier New" panose="02070309020205020404" pitchFamily="49" charset="0"/>
-                <a:cs typeface="Courier New" panose="02070309020205020404" pitchFamily="49" charset="0"/>
-              </a:rPr>
-              <a:t>, </a:t>
-            </a:r>
-            <a:r>
-              <a:rPr lang="en-US" altLang="en-US" dirty="0" err="1">
-                <a:latin typeface="Courier New" panose="02070309020205020404" pitchFamily="49" charset="0"/>
-                <a:cs typeface="Courier New" panose="02070309020205020404" pitchFamily="49" charset="0"/>
-              </a:rPr>
-              <a:t>integration_history</a:t>
-            </a:r>
-            <a:r>
-              <a:rPr lang="en-US" altLang="en-US" dirty="0">
-                <a:latin typeface="Courier New" panose="02070309020205020404" pitchFamily="49" charset="0"/>
-                <a:cs typeface="Courier New" panose="02070309020205020404" pitchFamily="49" charset="0"/>
-              </a:rPr>
-              <a:t>, </a:t>
-            </a:r>
-            <a:r>
-              <a:rPr lang="en-US" altLang="en-US" dirty="0" err="1">
-                <a:latin typeface="Courier New" panose="02070309020205020404" pitchFamily="49" charset="0"/>
-                <a:cs typeface="Courier New" panose="02070309020205020404" pitchFamily="49" charset="0"/>
-              </a:rPr>
-              <a:t>yps_integration</a:t>
-            </a:r>
-            <a:r>
-              <a:rPr lang="en-US" altLang="en-US" dirty="0">
-                <a:latin typeface="Courier New" panose="02070309020205020404" pitchFamily="49" charset="0"/>
-                <a:cs typeface="Courier New" panose="02070309020205020404" pitchFamily="49" charset="0"/>
-              </a:rPr>
-              <a:t>, </a:t>
-            </a:r>
-            <a:r>
-              <a:rPr lang="en-US" altLang="en-US" dirty="0" err="1">
-                <a:latin typeface="Courier New" panose="02070309020205020404" pitchFamily="49" charset="0"/>
-                <a:cs typeface="Courier New" panose="02070309020205020404" pitchFamily="49" charset="0"/>
-              </a:rPr>
-              <a:t>re_print</a:t>
-            </a:r>
-            <a:r>
-              <a:rPr lang="en-US" altLang="en-US" dirty="0">
-                <a:latin typeface="Courier New" panose="02070309020205020404" pitchFamily="49" charset="0"/>
-                <a:cs typeface="Courier New" panose="02070309020205020404" pitchFamily="49" charset="0"/>
-              </a:rPr>
-              <a:t>, </a:t>
-            </a:r>
-            <a:r>
-              <a:rPr lang="en-US" altLang="en-US" dirty="0" err="1">
-                <a:latin typeface="Courier New" panose="02070309020205020404" pitchFamily="49" charset="0"/>
-                <a:cs typeface="Courier New" panose="02070309020205020404" pitchFamily="49" charset="0"/>
-              </a:rPr>
-              <a:t>prefunding_log</a:t>
-            </a:r>
-            <a:r>
-              <a:rPr lang="en-US" altLang="en-US" dirty="0">
-                <a:latin typeface="Courier New" panose="02070309020205020404" pitchFamily="49" charset="0"/>
-                <a:cs typeface="Courier New" panose="02070309020205020404" pitchFamily="49" charset="0"/>
-              </a:rPr>
-              <a:t>, </a:t>
-            </a:r>
-            <a:r>
-              <a:rPr lang="en-US" altLang="en-US" dirty="0" err="1">
-                <a:solidFill>
-                  <a:srgbClr val="FF0000"/>
-                </a:solidFill>
-                <a:latin typeface="Courier New" panose="02070309020205020404" pitchFamily="49" charset="0"/>
-                <a:cs typeface="Courier New" panose="02070309020205020404" pitchFamily="49" charset="0"/>
-              </a:rPr>
-              <a:t>print_summary</a:t>
-            </a:r>
-            <a:r>
-              <a:rPr lang="en-US" altLang="en-US" dirty="0">
-                <a:latin typeface="Courier New" panose="02070309020205020404" pitchFamily="49" charset="0"/>
-                <a:cs typeface="Courier New" panose="02070309020205020404" pitchFamily="49" charset="0"/>
-              </a:rPr>
-              <a:t>, and </a:t>
-            </a:r>
-            <a:r>
-              <a:rPr lang="en-US" altLang="en-US" dirty="0" err="1">
-                <a:latin typeface="Courier New" panose="02070309020205020404" pitchFamily="49" charset="0"/>
-                <a:cs typeface="Courier New" panose="02070309020205020404" pitchFamily="49" charset="0"/>
-              </a:rPr>
-              <a:t>workshift_action</a:t>
-            </a:r>
-            <a:r>
-              <a:rPr lang="en-US" altLang="en-US" dirty="0">
-                <a:latin typeface="Courier New" panose="02070309020205020404" pitchFamily="49" charset="0"/>
-                <a:cs typeface="Courier New" panose="02070309020205020404" pitchFamily="49" charset="0"/>
+              <a:t>not indexed</a:t>
+            </a:r>
+            <a:r>
+              <a:rPr lang="en-US" dirty="0">
+                <a:latin typeface="+mj-lt"/>
               </a:rPr>
               <a:t> </a:t>
             </a:r>
           </a:p>
           <a:p>
-            <a:pPr lvl="0" eaLnBrk="0" fontAlgn="base" hangingPunct="0">
-              <a:lnSpc>
-                <a:spcPct val="150000"/>
-              </a:lnSpc>
+            <a:pPr marL="742950" lvl="1" indent="-285750">
               <a:spcBef>
-                <a:spcPct val="0"/>
+                <a:spcPts val="300"/>
               </a:spcBef>
               <a:spcAft>
-                <a:spcPct val="0"/>
+                <a:spcPts val="300"/>
               </a:spcAft>
-              <a:buFontTx/>
-              <a:buChar char="•"/>
+              <a:buFont typeface="Wingdings" panose="05000000000000000000" pitchFamily="2" charset="2"/>
+              <a:buChar char="§"/>
             </a:pPr>
             <a:r>
-              <a:rPr lang="en-US" altLang="en-US" dirty="0">
-                <a:latin typeface="Arial" panose="020B0604020202020204" pitchFamily="34" charset="0"/>
-                <a:cs typeface="Arial" panose="020B0604020202020204" pitchFamily="34" charset="0"/>
+              <a:rPr lang="en-US" dirty="0">
+                <a:latin typeface="+mj-lt"/>
               </a:rPr>
-              <a:t>Before updating </a:t>
-            </a:r>
-            <a:r>
-              <a:rPr lang="en-US" altLang="en-US" dirty="0" err="1">
-                <a:latin typeface="Courier New" panose="02070309020205020404" pitchFamily="49" charset="0"/>
-                <a:cs typeface="Courier New" panose="02070309020205020404" pitchFamily="49" charset="0"/>
+              <a:t>Table size: ~</a:t>
+            </a:r>
+            <a:r>
+              <a:rPr lang="en-US" b="1" dirty="0">
+                <a:latin typeface="+mj-lt"/>
               </a:rPr>
-              <a:t>print_summary</a:t>
-            </a:r>
-            <a:r>
-              <a:rPr lang="en-US" altLang="en-US" dirty="0">
-                <a:latin typeface="Arial" panose="020B0604020202020204" pitchFamily="34" charset="0"/>
-                <a:cs typeface="Arial" panose="020B0604020202020204" pitchFamily="34" charset="0"/>
-              </a:rPr>
-              <a:t>, the system searches by </a:t>
-            </a:r>
-            <a:r>
-              <a:rPr lang="en-US" altLang="en-US" b="1" dirty="0" err="1">
-                <a:latin typeface="Arial" panose="020B0604020202020204" pitchFamily="34" charset="0"/>
-                <a:cs typeface="Arial" panose="020B0604020202020204" pitchFamily="34" charset="0"/>
-              </a:rPr>
-              <a:t>product_id</a:t>
-            </a:r>
-            <a:r>
-              <a:rPr lang="en-US" altLang="en-US" dirty="0">
-                <a:latin typeface="Arial" panose="020B0604020202020204" pitchFamily="34" charset="0"/>
-                <a:cs typeface="Arial" panose="020B0604020202020204" pitchFamily="34" charset="0"/>
-              </a:rPr>
-              <a:t> and </a:t>
-            </a:r>
-            <a:r>
-              <a:rPr lang="en-US" altLang="en-US" b="1" dirty="0" err="1">
-                <a:latin typeface="Arial" panose="020B0604020202020204" pitchFamily="34" charset="0"/>
-                <a:cs typeface="Arial" panose="020B0604020202020204" pitchFamily="34" charset="0"/>
-              </a:rPr>
-              <a:t>session_id</a:t>
-            </a:r>
-            <a:r>
-              <a:rPr lang="en-US" altLang="en-US" b="1" dirty="0">
-                <a:latin typeface="Arial" panose="020B0604020202020204" pitchFamily="34" charset="0"/>
-                <a:cs typeface="Arial" panose="020B0604020202020204" pitchFamily="34" charset="0"/>
+              <a:t>2 million rows</a:t>
+            </a:r>
+            <a:r>
+              <a:rPr lang="en-US" dirty="0">
+                <a:latin typeface="+mj-lt"/>
               </a:rPr>
               <a:t> </a:t>
             </a:r>
           </a:p>
           <a:p>
-            <a:pPr lvl="0" eaLnBrk="0" fontAlgn="base" hangingPunct="0">
-              <a:lnSpc>
-                <a:spcPct val="150000"/>
-              </a:lnSpc>
+            <a:pPr>
               <a:spcBef>
-                <a:spcPct val="0"/>
+                <a:spcPts val="300"/>
               </a:spcBef>
               <a:spcAft>
-                <a:spcPct val="0"/>
+                <a:spcPts val="300"/>
               </a:spcAft>
-              <a:buFontTx/>
-              <a:buChar char="•"/>
             </a:pPr>
             <a:r>
-              <a:rPr lang="en-US" altLang="en-US" dirty="0">
-                <a:latin typeface="Arial" panose="020B0604020202020204" pitchFamily="34" charset="0"/>
-                <a:cs typeface="Arial" panose="020B0604020202020204" pitchFamily="34" charset="0"/>
+              <a:rPr lang="en-US" b="1" dirty="0">
+                <a:latin typeface="+mj-lt"/>
               </a:rPr>
-              <a:t>These columns are </a:t>
-            </a:r>
-            <a:r>
-              <a:rPr lang="en-US" altLang="en-US" b="1" dirty="0">
-                <a:latin typeface="Arial" panose="020B0604020202020204" pitchFamily="34" charset="0"/>
-                <a:cs typeface="Arial" panose="020B0604020202020204" pitchFamily="34" charset="0"/>
+              <a:t>Result:</a:t>
+            </a:r>
+          </a:p>
+          <a:p>
+            <a:pPr marL="742950" lvl="1" indent="-285750">
+              <a:spcBef>
+                <a:spcPts val="300"/>
+              </a:spcBef>
+              <a:spcAft>
+                <a:spcPts val="300"/>
+              </a:spcAft>
+              <a:buFont typeface="Wingdings" panose="05000000000000000000" pitchFamily="2" charset="2"/>
+              <a:buChar char="§"/>
+            </a:pPr>
+            <a:r>
+              <a:rPr lang="en-US" dirty="0">
+                <a:latin typeface="+mj-lt"/>
               </a:rPr>
-              <a:t>not indexed</a:t>
-            </a:r>
-            <a:r>
-              <a:rPr lang="en-US" altLang="en-US" dirty="0">
-                <a:latin typeface="Arial" panose="020B0604020202020204" pitchFamily="34" charset="0"/>
-                <a:cs typeface="Arial" panose="020B0604020202020204" pitchFamily="34" charset="0"/>
+              <a:t>Each lookup triggers </a:t>
+            </a:r>
+            <a:r>
+              <a:rPr lang="en-US" b="1" dirty="0">
+                <a:latin typeface="+mj-lt"/>
               </a:rPr>
-              <a:t>, causing a </a:t>
-            </a:r>
-            <a:r>
-              <a:rPr lang="en-US" altLang="en-US" b="1" dirty="0">
-                <a:latin typeface="Arial" panose="020B0604020202020204" pitchFamily="34" charset="0"/>
-                <a:cs typeface="Arial" panose="020B0604020202020204" pitchFamily="34" charset="0"/>
-              </a:rPr>
-              <a:t>full scan</a:t>
-            </a:r>
-            <a:r>
-              <a:rPr lang="en-US" altLang="en-US" dirty="0">
-                <a:latin typeface="Arial" panose="020B0604020202020204" pitchFamily="34" charset="0"/>
-                <a:cs typeface="Arial" panose="020B0604020202020204" pitchFamily="34" charset="0"/>
-              </a:rPr>
-              <a:t> on about </a:t>
-            </a:r>
-            <a:r>
-              <a:rPr lang="en-US" altLang="en-US" b="1" dirty="0">
-                <a:latin typeface="Arial" panose="020B0604020202020204" pitchFamily="34" charset="0"/>
-                <a:cs typeface="Arial" panose="020B0604020202020204" pitchFamily="34" charset="0"/>
-              </a:rPr>
-              <a:t>2 million records</a:t>
-            </a:r>
-            <a:r>
-              <a:rPr lang="en-US" altLang="en-US" dirty="0">
-                <a:latin typeface="Arial" panose="020B0604020202020204" pitchFamily="34" charset="0"/>
-                <a:cs typeface="Arial" panose="020B0604020202020204" pitchFamily="34" charset="0"/>
+              <a:t>full table scan</a:t>
+            </a:r>
+            <a:r>
+              <a:rPr lang="en-US" dirty="0">
+                <a:latin typeface="+mj-lt"/>
               </a:rPr>
               <a:t> </a:t>
             </a:r>
           </a:p>
           <a:p>
-            <a:pPr lvl="0" eaLnBrk="0" fontAlgn="base" hangingPunct="0">
-              <a:lnSpc>
-                <a:spcPct val="150000"/>
-              </a:lnSpc>
+            <a:pPr marL="742950" lvl="1" indent="-285750">
               <a:spcBef>
-                <a:spcPct val="0"/>
+                <a:spcPts val="300"/>
               </a:spcBef>
               <a:spcAft>
-                <a:spcPct val="0"/>
+                <a:spcPts val="300"/>
               </a:spcAft>
-              <a:buFontTx/>
-              <a:buChar char="•"/>
+              <a:buFont typeface="Wingdings" panose="05000000000000000000" pitchFamily="2" charset="2"/>
+              <a:buChar char="§"/>
             </a:pPr>
             <a:r>
-              <a:rPr lang="en-US" altLang="en-US" dirty="0">
-                <a:latin typeface="Arial" panose="020B0604020202020204" pitchFamily="34" charset="0"/>
-                <a:cs typeface="Arial" panose="020B0604020202020204" pitchFamily="34" charset="0"/>
+              <a:rPr lang="en-US" dirty="0">
+                <a:latin typeface="+mj-lt"/>
               </a:rPr>
-              <a:t>At 500 transactions, this can result in roughly </a:t>
-            </a:r>
-            <a:r>
-              <a:rPr lang="en-US" altLang="en-US" b="1" dirty="0">
-                <a:latin typeface="Arial" panose="020B0604020202020204" pitchFamily="34" charset="0"/>
-                <a:cs typeface="Arial" panose="020B0604020202020204" pitchFamily="34" charset="0"/>
+              <a:t>At 500 transactions: </a:t>
+            </a:r>
+          </a:p>
+          <a:p>
+            <a:pPr lvl="2">
+              <a:spcBef>
+                <a:spcPts val="300"/>
+              </a:spcBef>
+              <a:spcAft>
+                <a:spcPts val="300"/>
+              </a:spcAft>
+            </a:pPr>
+            <a:r>
+              <a:rPr lang="en-US" b="1" dirty="0">
+                <a:latin typeface="+mj-lt"/>
               </a:rPr>
-              <a:t>1 billion row scans</a:t>
-            </a:r>
-            <a:r>
-              <a:rPr lang="en-US" altLang="en-US" dirty="0">
-                <a:latin typeface="Arial" panose="020B0604020202020204" pitchFamily="34" charset="0"/>
-                <a:cs typeface="Arial" panose="020B0604020202020204" pitchFamily="34" charset="0"/>
+              <a:t>2,000,000 × 500 = 1 billion row scans</a:t>
+            </a:r>
+            <a:r>
+              <a:rPr lang="en-US" dirty="0">
+                <a:latin typeface="+mj-lt"/>
               </a:rPr>
-              <a:t>, creating significant database performance issues </a:t>
-            </a:r>
+              <a:t> </a:t>
+            </a:r>
+          </a:p>
+          <a:p>
+            <a:pPr>
+              <a:spcBef>
+                <a:spcPts val="300"/>
+              </a:spcBef>
+              <a:spcAft>
+                <a:spcPts val="300"/>
+              </a:spcAft>
+            </a:pPr>
+            <a:r>
+              <a:rPr lang="en-US" b="1" dirty="0">
+                <a:latin typeface="+mj-lt"/>
+              </a:rPr>
+              <a:t>Impact:</a:t>
+            </a:r>
+            <a:endParaRPr lang="en-US" dirty="0">
+              <a:latin typeface="+mj-lt"/>
+            </a:endParaRPr>
+          </a:p>
+          <a:p>
+            <a:pPr marL="742950" lvl="1" indent="-285750">
+              <a:spcBef>
+                <a:spcPts val="300"/>
+              </a:spcBef>
+              <a:spcAft>
+                <a:spcPts val="300"/>
+              </a:spcAft>
+              <a:buFont typeface="Wingdings" panose="05000000000000000000" pitchFamily="2" charset="2"/>
+              <a:buChar char="§"/>
+            </a:pPr>
+            <a:r>
+              <a:rPr lang="en-US" dirty="0">
+                <a:latin typeface="+mj-lt"/>
+              </a:rPr>
+              <a:t>Severe database load </a:t>
+            </a:r>
+          </a:p>
+          <a:p>
+            <a:pPr marL="742950" lvl="1" indent="-285750">
+              <a:spcBef>
+                <a:spcPts val="300"/>
+              </a:spcBef>
+              <a:spcAft>
+                <a:spcPts val="300"/>
+              </a:spcAft>
+              <a:buFont typeface="Wingdings" panose="05000000000000000000" pitchFamily="2" charset="2"/>
+              <a:buChar char="§"/>
+            </a:pPr>
+            <a:r>
+              <a:rPr lang="en-US" dirty="0">
+                <a:latin typeface="+mj-lt"/>
+              </a:rPr>
+              <a:t>Increased latency </a:t>
+            </a:r>
+          </a:p>
+          <a:p>
+            <a:pPr marL="742950" lvl="1" indent="-285750">
+              <a:spcBef>
+                <a:spcPts val="300"/>
+              </a:spcBef>
+              <a:spcAft>
+                <a:spcPts val="300"/>
+              </a:spcAft>
+              <a:buFont typeface="Wingdings" panose="05000000000000000000" pitchFamily="2" charset="2"/>
+              <a:buChar char="§"/>
+            </a:pPr>
+            <a:r>
+              <a:rPr lang="en-US" dirty="0">
+                <a:latin typeface="+mj-lt"/>
+              </a:rPr>
+              <a:t>Risk of system slowdown</a:t>
+            </a:r>
+          </a:p>
+          <a:p>
+            <a:pPr lvl="0" eaLnBrk="0" fontAlgn="base" hangingPunct="0">
+              <a:spcBef>
+                <a:spcPts val="300"/>
+              </a:spcBef>
+              <a:spcAft>
+                <a:spcPts val="300"/>
+              </a:spcAft>
+            </a:pPr>
+            <a:endParaRPr lang="en-US" altLang="en-US" dirty="0">
+              <a:latin typeface="+mj-lt"/>
+              <a:cs typeface="Arial" panose="020B0604020202020204" pitchFamily="34" charset="0"/>
+            </a:endParaRPr>
           </a:p>
         </p:txBody>
       </p:sp>
     </p:spTree>
     <p:extLst>
       <p:ext uri="{BB962C8B-B14F-4D97-AF65-F5344CB8AC3E}">
-        <p14:creationId xmlns:p14="http://schemas.microsoft.com/office/powerpoint/2010/main" val="2131667284"/>
+        <p14:creationId xmlns:p14="http://schemas.microsoft.com/office/powerpoint/2010/main" val="359547733"/>
       </p:ext>
     </p:extLst>
   </p:cSld>
@@ -3518,7 +4920,7 @@
 </p:sld>
 </file>
 
-<file path=ppt/slides/slide4.xml><?xml version="1.0" encoding="utf-8"?>
+<file path=ppt/slides/slide5.xml><?xml version="1.0" encoding="utf-8"?>
 <p:sld xmlns:a="http://schemas.openxmlformats.org/drawingml/2006/main" xmlns:r="http://schemas.openxmlformats.org/officeDocument/2006/relationships" xmlns:p="http://schemas.openxmlformats.org/presentationml/2006/main">
   <p:cSld>
     <p:spTree>
@@ -3526,7 +4928,7 @@
         <p:cNvPr id="1" name="">
           <a:extLst>
             <a:ext uri="{FF2B5EF4-FFF2-40B4-BE49-F238E27FC236}">
-              <a16:creationId xmlns:a16="http://schemas.microsoft.com/office/drawing/2014/main" id="{6DCCB19E-E24C-061F-3F35-3C68059ACA3B}"/>
+              <a16:creationId xmlns:a16="http://schemas.microsoft.com/office/drawing/2014/main" id="{43C84614-2D23-1ECE-38A9-F70BDEB33B91}"/>
             </a:ext>
           </a:extLst>
         </p:cNvPr>
@@ -3546,7 +4948,7 @@
           <p:cNvPr id="2" name="Slide Number Placeholder 1">
             <a:extLst>
               <a:ext uri="{FF2B5EF4-FFF2-40B4-BE49-F238E27FC236}">
-                <a16:creationId xmlns:a16="http://schemas.microsoft.com/office/drawing/2014/main" id="{41AA4CBE-8E0C-2C62-4593-26CBCBF2D0FE}"/>
+                <a16:creationId xmlns:a16="http://schemas.microsoft.com/office/drawing/2014/main" id="{F731820F-FF07-2D74-847E-E068B29C4629}"/>
               </a:ext>
             </a:extLst>
           </p:cNvPr>
@@ -3564,7 +4966,7 @@
           <a:p>
             <a:fld id="{93288B1A-0894-4E52-95D8-2AC74CBED725}" type="slidenum">
               <a:rPr lang="en-US" smtClean="0"/>
-              <a:t>4</a:t>
+              <a:t>5</a:t>
             </a:fld>
             <a:endParaRPr lang="en-US"/>
           </a:p>
@@ -3575,7 +4977,7 @@
           <p:cNvPr id="3" name="Text Placeholder 2">
             <a:extLst>
               <a:ext uri="{FF2B5EF4-FFF2-40B4-BE49-F238E27FC236}">
-                <a16:creationId xmlns:a16="http://schemas.microsoft.com/office/drawing/2014/main" id="{7C35229E-4565-9A9A-8A29-1CE713D89254}"/>
+                <a16:creationId xmlns:a16="http://schemas.microsoft.com/office/drawing/2014/main" id="{C02F8705-575F-F161-DC77-B710C736E3BF}"/>
               </a:ext>
             </a:extLst>
           </p:cNvPr>
@@ -3593,7 +4995,7 @@
           <a:p>
             <a:r>
               <a:rPr lang="en-US" dirty="0"/>
-              <a:t>Propose Solution for Archiving ,Retention &amp; Improvement</a:t>
+              <a:t>Why Archiving is required</a:t>
             </a:r>
           </a:p>
         </p:txBody>
@@ -3603,7 +5005,7 @@
           <p:cNvPr id="10" name="TextBox 9">
             <a:extLst>
               <a:ext uri="{FF2B5EF4-FFF2-40B4-BE49-F238E27FC236}">
-                <a16:creationId xmlns:a16="http://schemas.microsoft.com/office/drawing/2014/main" id="{1F5CCD31-7DE3-F4A7-CB78-529B94D0BFEB}"/>
+                <a16:creationId xmlns:a16="http://schemas.microsoft.com/office/drawing/2014/main" id="{95ABA9E5-2A2F-DDF6-E490-D299746E62CB}"/>
               </a:ext>
             </a:extLst>
           </p:cNvPr>
@@ -3612,8 +5014,8 @@
         </p:nvSpPr>
         <p:spPr>
           <a:xfrm>
-            <a:off x="609599" y="1015483"/>
-            <a:ext cx="10412627" cy="1477328"/>
+            <a:off x="644032" y="913835"/>
+            <a:ext cx="10412627" cy="3731791"/>
           </a:xfrm>
           <a:prstGeom prst="rect">
             <a:avLst/>
@@ -3626,711 +5028,192 @@
           </a:bodyPr>
           <a:lstStyle/>
           <a:p>
+            <a:pPr>
+              <a:lnSpc>
+                <a:spcPct val="150000"/>
+              </a:lnSpc>
+            </a:pPr>
+            <a:r>
+              <a:rPr lang="en-US" b="1" dirty="0">
+                <a:latin typeface="+mj-lt"/>
+              </a:rPr>
+              <a:t>Current Challenges</a:t>
+            </a:r>
+            <a:endParaRPr lang="en-US" dirty="0">
+              <a:latin typeface="+mj-lt"/>
+            </a:endParaRPr>
+          </a:p>
+          <a:p>
             <a:pPr marL="285750" indent="-285750">
+              <a:lnSpc>
+                <a:spcPct val="150000"/>
+              </a:lnSpc>
               <a:buFont typeface="Wingdings" panose="05000000000000000000" pitchFamily="2" charset="2"/>
               <a:buChar char="Ø"/>
             </a:pPr>
-            <a:endParaRPr lang="en-US" dirty="0"/>
-          </a:p>
-          <a:p>
-            <a:endParaRPr lang="en-US" dirty="0"/>
+            <a:r>
+              <a:rPr lang="en-US" dirty="0">
+                <a:latin typeface="+mj-lt"/>
+              </a:rPr>
+              <a:t>Continuous </a:t>
+            </a:r>
+            <a:r>
+              <a:rPr lang="en-US" b="1" dirty="0">
+                <a:latin typeface="+mj-lt"/>
+              </a:rPr>
+              <a:t>data growth </a:t>
+            </a:r>
+            <a:r>
+              <a:rPr lang="en-US" dirty="0">
+                <a:latin typeface="+mj-lt"/>
+              </a:rPr>
+              <a:t>in transactional tables </a:t>
+            </a:r>
           </a:p>
           <a:p>
             <a:pPr marL="285750" indent="-285750">
+              <a:lnSpc>
+                <a:spcPct val="150000"/>
+              </a:lnSpc>
               <a:buFont typeface="Wingdings" panose="05000000000000000000" pitchFamily="2" charset="2"/>
               <a:buChar char="Ø"/>
             </a:pPr>
-            <a:endParaRPr lang="en-US" dirty="0"/>
+            <a:r>
+              <a:rPr lang="en-US" dirty="0">
+                <a:latin typeface="+mj-lt"/>
+              </a:rPr>
+              <a:t>Large tables </a:t>
+            </a:r>
+            <a:r>
+              <a:rPr lang="en-US" b="1" dirty="0">
+                <a:latin typeface="+mj-lt"/>
+              </a:rPr>
+              <a:t>degrade query performance </a:t>
+            </a:r>
           </a:p>
           <a:p>
             <a:pPr marL="285750" indent="-285750">
+              <a:lnSpc>
+                <a:spcPct val="150000"/>
+              </a:lnSpc>
               <a:buFont typeface="Wingdings" panose="05000000000000000000" pitchFamily="2" charset="2"/>
               <a:buChar char="Ø"/>
             </a:pPr>
-            <a:endParaRPr lang="en-US" dirty="0"/>
-          </a:p>
-          <a:p>
-            <a:endParaRPr lang="en-US" dirty="0"/>
+            <a:r>
+              <a:rPr lang="en-US" dirty="0">
+                <a:latin typeface="+mj-lt"/>
+              </a:rPr>
+              <a:t>Increased database </a:t>
+            </a:r>
+            <a:r>
+              <a:rPr lang="en-US" b="1" dirty="0">
+                <a:latin typeface="+mj-lt"/>
+              </a:rPr>
+              <a:t>resource consumption </a:t>
+            </a:r>
+          </a:p>
+          <a:p>
+            <a:pPr marL="285750" indent="-285750">
+              <a:lnSpc>
+                <a:spcPct val="150000"/>
+              </a:lnSpc>
+              <a:buFont typeface="Wingdings" panose="05000000000000000000" pitchFamily="2" charset="2"/>
+              <a:buChar char="Ø"/>
+            </a:pPr>
+            <a:r>
+              <a:rPr lang="en-US" dirty="0">
+                <a:latin typeface="+mj-lt"/>
+              </a:rPr>
+              <a:t>Difficult to scale with future expansion (</a:t>
+            </a:r>
+            <a:r>
+              <a:rPr lang="en-US" b="1" dirty="0">
+                <a:latin typeface="+mj-lt"/>
+              </a:rPr>
+              <a:t>500+ stores</a:t>
+            </a:r>
+            <a:r>
+              <a:rPr lang="en-US" dirty="0">
+                <a:latin typeface="+mj-lt"/>
+              </a:rPr>
+              <a:t>) </a:t>
+            </a:r>
+          </a:p>
+          <a:p>
+            <a:pPr>
+              <a:lnSpc>
+                <a:spcPct val="150000"/>
+              </a:lnSpc>
+            </a:pPr>
+            <a:r>
+              <a:rPr lang="en-US" b="1" dirty="0">
+                <a:latin typeface="+mj-lt"/>
+              </a:rPr>
+              <a:t>Conclusion:</a:t>
+            </a:r>
+            <a:endParaRPr lang="en-US" dirty="0">
+              <a:latin typeface="+mj-lt"/>
+            </a:endParaRPr>
+          </a:p>
+          <a:p>
+            <a:pPr marL="285750" indent="-285750">
+              <a:lnSpc>
+                <a:spcPct val="150000"/>
+              </a:lnSpc>
+              <a:buFont typeface="Wingdings" panose="05000000000000000000" pitchFamily="2" charset="2"/>
+              <a:buChar char="Ø"/>
+            </a:pPr>
+            <a:r>
+              <a:rPr lang="en-US" b="1" dirty="0">
+                <a:latin typeface="+mj-lt"/>
+              </a:rPr>
+              <a:t>Without data archiving and indexing, </a:t>
+            </a:r>
+            <a:r>
+              <a:rPr lang="en-US" dirty="0">
+                <a:latin typeface="+mj-lt"/>
+              </a:rPr>
+              <a:t>system performance will continue to </a:t>
+            </a:r>
+            <a:r>
+              <a:rPr lang="en-US" b="1" dirty="0">
+                <a:latin typeface="+mj-lt"/>
+              </a:rPr>
+              <a:t>degrad</a:t>
+            </a:r>
+            <a:r>
+              <a:rPr lang="en-US" dirty="0">
+                <a:latin typeface="+mj-lt"/>
+              </a:rPr>
+              <a:t>e as </a:t>
+            </a:r>
+            <a:r>
+              <a:rPr lang="en-US" b="1" dirty="0">
+                <a:latin typeface="+mj-lt"/>
+              </a:rPr>
+              <a:t>transaction volume increases.</a:t>
+            </a:r>
+          </a:p>
+          <a:p>
+            <a:pPr lvl="0" eaLnBrk="0" fontAlgn="base" hangingPunct="0">
+              <a:spcBef>
+                <a:spcPts val="300"/>
+              </a:spcBef>
+              <a:spcAft>
+                <a:spcPts val="300"/>
+              </a:spcAft>
+            </a:pPr>
+            <a:endParaRPr lang="en-US" altLang="en-US" dirty="0">
+              <a:latin typeface="+mj-lt"/>
+              <a:cs typeface="Arial" panose="020B0604020202020204" pitchFamily="34" charset="0"/>
+            </a:endParaRPr>
           </a:p>
         </p:txBody>
       </p:sp>
-      <p:graphicFrame>
-        <p:nvGraphicFramePr>
-          <p:cNvPr id="6" name="Table 5">
-            <a:extLst>
-              <a:ext uri="{FF2B5EF4-FFF2-40B4-BE49-F238E27FC236}">
-                <a16:creationId xmlns:a16="http://schemas.microsoft.com/office/drawing/2014/main" id="{26E73597-1C6C-15BA-56BD-FFA8FC7D7420}"/>
-              </a:ext>
-            </a:extLst>
-          </p:cNvPr>
-          <p:cNvGraphicFramePr>
-            <a:graphicFrameLocks noGrp="1"/>
-          </p:cNvGraphicFramePr>
-          <p:nvPr>
-            <p:extLst>
-              <p:ext uri="{D42A27DB-BD31-4B8C-83A1-F6EECF244321}">
-                <p14:modId xmlns:p14="http://schemas.microsoft.com/office/powerpoint/2010/main" val="1978722174"/>
-              </p:ext>
-            </p:extLst>
-          </p:nvPr>
-        </p:nvGraphicFramePr>
-        <p:xfrm>
-          <a:off x="331787" y="1134257"/>
-          <a:ext cx="11657013" cy="4023360"/>
-        </p:xfrm>
-        <a:graphic>
-          <a:graphicData uri="http://schemas.openxmlformats.org/drawingml/2006/table">
-            <a:tbl>
-              <a:tblPr/>
-              <a:tblGrid>
-                <a:gridCol w="11657013">
-                  <a:extLst>
-                    <a:ext uri="{9D8B030D-6E8A-4147-A177-3AD203B41FA5}">
-                      <a16:colId xmlns:a16="http://schemas.microsoft.com/office/drawing/2014/main" val="2735788894"/>
-                    </a:ext>
-                  </a:extLst>
-                </a:gridCol>
-              </a:tblGrid>
-              <a:tr h="0">
-                <a:tc>
-                  <a:txBody>
-                    <a:bodyPr/>
-                    <a:lstStyle/>
-                    <a:p>
-                      <a:pPr marL="0" marR="0" lvl="0" indent="0" algn="l" defTabSz="914400" rtl="0" eaLnBrk="0" fontAlgn="base" latinLnBrk="0" hangingPunct="0">
-                        <a:lnSpc>
-                          <a:spcPct val="150000"/>
-                        </a:lnSpc>
-                        <a:spcBef>
-                          <a:spcPct val="0"/>
-                        </a:spcBef>
-                        <a:spcAft>
-                          <a:spcPct val="0"/>
-                        </a:spcAft>
-                        <a:buClrTx/>
-                        <a:buSzTx/>
-                        <a:buFontTx/>
-                        <a:buChar char="•"/>
-                        <a:tabLst/>
-                      </a:pPr>
-                      <a:r>
-                        <a:rPr kumimoji="0" lang="en-US" altLang="en-US" sz="1600" b="1" i="0" u="none" strike="noStrike" cap="none" normalizeH="0" baseline="0" dirty="0">
-                          <a:ln>
-                            <a:noFill/>
-                          </a:ln>
-                          <a:solidFill>
-                            <a:schemeClr val="tx1"/>
-                          </a:solidFill>
-                          <a:effectLst/>
-                          <a:latin typeface="Arial" panose="020B0604020202020204" pitchFamily="34" charset="0"/>
-                          <a:cs typeface="Arial" panose="020B0604020202020204" pitchFamily="34" charset="0"/>
-                        </a:rPr>
-                        <a:t>Low-impact tables</a:t>
-                      </a:r>
-                      <a:r>
-                        <a:rPr kumimoji="0" lang="en-US" altLang="en-US" sz="1600" b="0" i="0" u="none" strike="noStrike" cap="none" normalizeH="0" baseline="0" dirty="0">
-                          <a:ln>
-                            <a:noFill/>
-                          </a:ln>
-                          <a:solidFill>
-                            <a:schemeClr val="tx1"/>
-                          </a:solidFill>
-                          <a:effectLst/>
-                          <a:latin typeface="Arial" panose="020B0604020202020204" pitchFamily="34" charset="0"/>
-                          <a:cs typeface="Arial" panose="020B0604020202020204" pitchFamily="34" charset="0"/>
-                        </a:rPr>
-                        <a:t> (</a:t>
-                      </a:r>
-                      <a:r>
-                        <a:rPr kumimoji="0" lang="en-US" altLang="en-US" sz="1600" b="0" i="0" u="none" strike="noStrike" cap="none" normalizeH="0" baseline="0" dirty="0" err="1">
-                          <a:ln>
-                            <a:noFill/>
-                          </a:ln>
-                          <a:solidFill>
-                            <a:schemeClr val="tx1"/>
-                          </a:solidFill>
-                          <a:effectLst/>
-                          <a:latin typeface="Arial" panose="020B0604020202020204" pitchFamily="34" charset="0"/>
-                          <a:cs typeface="Arial" panose="020B0604020202020204" pitchFamily="34" charset="0"/>
-                        </a:rPr>
-                        <a:t>re_print</a:t>
-                      </a:r>
-                      <a:r>
-                        <a:rPr kumimoji="0" lang="en-US" altLang="en-US" sz="1600" b="0" i="0" u="none" strike="noStrike" cap="none" normalizeH="0" baseline="0" dirty="0">
-                          <a:ln>
-                            <a:noFill/>
-                          </a:ln>
-                          <a:solidFill>
-                            <a:schemeClr val="tx1"/>
-                          </a:solidFill>
-                          <a:effectLst/>
-                          <a:latin typeface="Arial" panose="020B0604020202020204" pitchFamily="34" charset="0"/>
-                          <a:cs typeface="Arial" panose="020B0604020202020204" pitchFamily="34" charset="0"/>
-                        </a:rPr>
-                        <a:t>, </a:t>
-                      </a:r>
-                      <a:r>
-                        <a:rPr kumimoji="0" lang="en-US" altLang="en-US" sz="1600" b="0" i="0" u="none" strike="noStrike" cap="none" normalizeH="0" baseline="0" dirty="0" err="1">
-                          <a:ln>
-                            <a:noFill/>
-                          </a:ln>
-                          <a:solidFill>
-                            <a:schemeClr val="tx1"/>
-                          </a:solidFill>
-                          <a:effectLst/>
-                          <a:latin typeface="Arial" panose="020B0604020202020204" pitchFamily="34" charset="0"/>
-                          <a:cs typeface="Arial" panose="020B0604020202020204" pitchFamily="34" charset="0"/>
-                        </a:rPr>
-                        <a:t>print_summary</a:t>
-                      </a:r>
-                      <a:r>
-                        <a:rPr kumimoji="0" lang="en-US" altLang="en-US" sz="1600" b="0" i="0" u="none" strike="noStrike" cap="none" normalizeH="0" baseline="0" dirty="0">
-                          <a:ln>
-                            <a:noFill/>
-                          </a:ln>
-                          <a:solidFill>
-                            <a:schemeClr val="tx1"/>
-                          </a:solidFill>
-                          <a:effectLst/>
-                          <a:latin typeface="Arial" panose="020B0604020202020204" pitchFamily="34" charset="0"/>
-                          <a:cs typeface="Arial" panose="020B0604020202020204" pitchFamily="34" charset="0"/>
-                        </a:rPr>
-                        <a:t>, </a:t>
-                      </a:r>
-                      <a:r>
-                        <a:rPr kumimoji="0" lang="en-US" altLang="en-US" sz="1600" b="0" i="0" u="none" strike="noStrike" cap="none" normalizeH="0" baseline="0" dirty="0" err="1">
-                          <a:ln>
-                            <a:noFill/>
-                          </a:ln>
-                          <a:solidFill>
-                            <a:schemeClr val="tx1"/>
-                          </a:solidFill>
-                          <a:effectLst/>
-                          <a:latin typeface="Arial" panose="020B0604020202020204" pitchFamily="34" charset="0"/>
-                          <a:cs typeface="Arial" panose="020B0604020202020204" pitchFamily="34" charset="0"/>
-                        </a:rPr>
-                        <a:t>workshift_action</a:t>
-                      </a:r>
-                      <a:r>
-                        <a:rPr kumimoji="0" lang="en-US" altLang="en-US" sz="1600" b="0" i="0" u="none" strike="noStrike" cap="none" normalizeH="0" baseline="0" dirty="0">
-                          <a:ln>
-                            <a:noFill/>
-                          </a:ln>
-                          <a:solidFill>
-                            <a:schemeClr val="tx1"/>
-                          </a:solidFill>
-                          <a:effectLst/>
-                          <a:latin typeface="Arial" panose="020B0604020202020204" pitchFamily="34" charset="0"/>
-                          <a:cs typeface="Arial" panose="020B0604020202020204" pitchFamily="34" charset="0"/>
-                        </a:rPr>
-                        <a:t>)</a:t>
-                      </a:r>
-                      <a:br>
-                        <a:rPr kumimoji="0" lang="en-US" altLang="en-US" sz="1600" b="0" i="0" u="none" strike="noStrike" cap="none" normalizeH="0" baseline="0" dirty="0">
-                          <a:ln>
-                            <a:noFill/>
-                          </a:ln>
-                          <a:solidFill>
-                            <a:schemeClr val="tx1"/>
-                          </a:solidFill>
-                          <a:effectLst/>
-                          <a:latin typeface="Arial" panose="020B0604020202020204" pitchFamily="34" charset="0"/>
-                          <a:cs typeface="Arial" panose="020B0604020202020204" pitchFamily="34" charset="0"/>
-                        </a:rPr>
-                      </a:br>
-                      <a:r>
-                        <a:rPr kumimoji="0" lang="en-US" altLang="en-US" sz="1600" b="0" i="0" u="none" strike="noStrike" cap="none" normalizeH="0" baseline="0" dirty="0">
-                          <a:ln>
-                            <a:noFill/>
-                          </a:ln>
-                          <a:solidFill>
-                            <a:schemeClr val="tx1"/>
-                          </a:solidFill>
-                          <a:effectLst/>
-                          <a:latin typeface="Arial" panose="020B0604020202020204" pitchFamily="34" charset="0"/>
-                          <a:cs typeface="Arial" panose="020B0604020202020204" pitchFamily="34" charset="0"/>
-                        </a:rPr>
-                        <a:t>  Archive aggressively, retain only </a:t>
-                      </a:r>
-                      <a:r>
-                        <a:rPr kumimoji="0" lang="en-US" altLang="en-US" sz="1600" b="1" i="0" u="none" strike="noStrike" cap="none" normalizeH="0" baseline="0" dirty="0">
-                          <a:ln>
-                            <a:noFill/>
-                          </a:ln>
-                          <a:solidFill>
-                            <a:schemeClr val="tx1"/>
-                          </a:solidFill>
-                          <a:effectLst/>
-                          <a:latin typeface="Arial" panose="020B0604020202020204" pitchFamily="34" charset="0"/>
-                          <a:cs typeface="Arial" panose="020B0604020202020204" pitchFamily="34" charset="0"/>
-                        </a:rPr>
-                        <a:t>4 months</a:t>
-                      </a:r>
-                      <a:r>
-                        <a:rPr kumimoji="0" lang="en-US" altLang="en-US" sz="1600" b="0" i="0" u="none" strike="noStrike" cap="none" normalizeH="0" baseline="0" dirty="0">
-                          <a:ln>
-                            <a:noFill/>
-                          </a:ln>
-                          <a:solidFill>
-                            <a:schemeClr val="tx1"/>
-                          </a:solidFill>
-                          <a:effectLst/>
-                          <a:latin typeface="Arial" panose="020B0604020202020204" pitchFamily="34" charset="0"/>
-                          <a:cs typeface="Arial" panose="020B0604020202020204" pitchFamily="34" charset="0"/>
-                        </a:rPr>
-                        <a:t> </a:t>
-                      </a:r>
-                    </a:p>
-                    <a:p>
-                      <a:pPr marL="0" marR="0" lvl="0" indent="0" algn="l" defTabSz="914400" rtl="0" eaLnBrk="0" fontAlgn="base" latinLnBrk="0" hangingPunct="0">
-                        <a:lnSpc>
-                          <a:spcPct val="150000"/>
-                        </a:lnSpc>
-                        <a:spcBef>
-                          <a:spcPct val="0"/>
-                        </a:spcBef>
-                        <a:spcAft>
-                          <a:spcPct val="0"/>
-                        </a:spcAft>
-                        <a:buClrTx/>
-                        <a:buSzTx/>
-                        <a:buFontTx/>
-                        <a:buChar char="•"/>
-                        <a:tabLst/>
-                      </a:pPr>
-                      <a:r>
-                        <a:rPr kumimoji="0" lang="en-US" altLang="en-US" sz="1600" b="1" i="0" u="none" strike="noStrike" cap="none" normalizeH="0" baseline="0" dirty="0">
-                          <a:ln>
-                            <a:noFill/>
-                          </a:ln>
-                          <a:solidFill>
-                            <a:schemeClr val="tx1"/>
-                          </a:solidFill>
-                          <a:effectLst/>
-                          <a:latin typeface="Arial" panose="020B0604020202020204" pitchFamily="34" charset="0"/>
-                          <a:cs typeface="Arial" panose="020B0604020202020204" pitchFamily="34" charset="0"/>
-                        </a:rPr>
-                        <a:t>Core transaction tables</a:t>
-                      </a:r>
-                      <a:r>
-                        <a:rPr kumimoji="0" lang="en-US" altLang="en-US" sz="1600" b="0" i="0" u="none" strike="noStrike" cap="none" normalizeH="0" baseline="0" dirty="0">
-                          <a:ln>
-                            <a:noFill/>
-                          </a:ln>
-                          <a:solidFill>
-                            <a:schemeClr val="tx1"/>
-                          </a:solidFill>
-                          <a:effectLst/>
-                          <a:latin typeface="Arial" panose="020B0604020202020204" pitchFamily="34" charset="0"/>
-                          <a:cs typeface="Arial" panose="020B0604020202020204" pitchFamily="34" charset="0"/>
-                        </a:rPr>
-                        <a:t> (</a:t>
-                      </a:r>
-                      <a:r>
-                        <a:rPr kumimoji="0" lang="en-US" altLang="en-US" sz="1600" b="0" i="0" u="none" strike="noStrike" cap="none" normalizeH="0" baseline="0" dirty="0" err="1">
-                          <a:ln>
-                            <a:noFill/>
-                          </a:ln>
-                          <a:solidFill>
-                            <a:schemeClr val="tx1"/>
-                          </a:solidFill>
-                          <a:effectLst/>
-                          <a:latin typeface="Arial" panose="020B0604020202020204" pitchFamily="34" charset="0"/>
-                          <a:cs typeface="Arial" panose="020B0604020202020204" pitchFamily="34" charset="0"/>
-                        </a:rPr>
-                        <a:t>sale_transaction</a:t>
-                      </a:r>
-                      <a:r>
-                        <a:rPr kumimoji="0" lang="en-US" altLang="en-US" sz="1600" b="0" i="0" u="none" strike="noStrike" cap="none" normalizeH="0" baseline="0" dirty="0">
-                          <a:ln>
-                            <a:noFill/>
-                          </a:ln>
-                          <a:solidFill>
-                            <a:schemeClr val="tx1"/>
-                          </a:solidFill>
-                          <a:effectLst/>
-                          <a:latin typeface="Arial" panose="020B0604020202020204" pitchFamily="34" charset="0"/>
-                          <a:cs typeface="Arial" panose="020B0604020202020204" pitchFamily="34" charset="0"/>
-                        </a:rPr>
-                        <a:t>, </a:t>
-                      </a:r>
-                      <a:r>
-                        <a:rPr kumimoji="0" lang="en-US" altLang="en-US" sz="1600" b="0" i="0" u="none" strike="noStrike" cap="none" normalizeH="0" baseline="0" dirty="0" err="1">
-                          <a:ln>
-                            <a:noFill/>
-                          </a:ln>
-                          <a:solidFill>
-                            <a:schemeClr val="tx1"/>
-                          </a:solidFill>
-                          <a:effectLst/>
-                          <a:latin typeface="Arial" panose="020B0604020202020204" pitchFamily="34" charset="0"/>
-                          <a:cs typeface="Arial" panose="020B0604020202020204" pitchFamily="34" charset="0"/>
-                        </a:rPr>
-                        <a:t>commission_transaction</a:t>
-                      </a:r>
-                      <a:r>
-                        <a:rPr kumimoji="0" lang="en-US" altLang="en-US" sz="1600" b="0" i="0" u="none" strike="noStrike" cap="none" normalizeH="0" baseline="0" dirty="0">
-                          <a:ln>
-                            <a:noFill/>
-                          </a:ln>
-                          <a:solidFill>
-                            <a:schemeClr val="tx1"/>
-                          </a:solidFill>
-                          <a:effectLst/>
-                          <a:latin typeface="Arial" panose="020B0604020202020204" pitchFamily="34" charset="0"/>
-                          <a:cs typeface="Arial" panose="020B0604020202020204" pitchFamily="34" charset="0"/>
-                        </a:rPr>
-                        <a:t>)</a:t>
-                      </a:r>
-                      <a:br>
-                        <a:rPr kumimoji="0" lang="en-US" altLang="en-US" sz="1600" b="0" i="0" u="none" strike="noStrike" cap="none" normalizeH="0" baseline="0" dirty="0">
-                          <a:ln>
-                            <a:noFill/>
-                          </a:ln>
-                          <a:solidFill>
-                            <a:schemeClr val="tx1"/>
-                          </a:solidFill>
-                          <a:effectLst/>
-                          <a:latin typeface="Arial" panose="020B0604020202020204" pitchFamily="34" charset="0"/>
-                          <a:cs typeface="Arial" panose="020B0604020202020204" pitchFamily="34" charset="0"/>
-                        </a:rPr>
-                      </a:br>
-                      <a:r>
-                        <a:rPr kumimoji="0" lang="en-US" altLang="en-US" sz="1600" b="0" i="0" u="none" strike="noStrike" cap="none" normalizeH="0" baseline="0" dirty="0">
-                          <a:ln>
-                            <a:noFill/>
-                          </a:ln>
-                          <a:solidFill>
-                            <a:schemeClr val="tx1"/>
-                          </a:solidFill>
-                          <a:effectLst/>
-                          <a:latin typeface="Arial" panose="020B0604020202020204" pitchFamily="34" charset="0"/>
-                          <a:cs typeface="Arial" panose="020B0604020202020204" pitchFamily="34" charset="0"/>
-                        </a:rPr>
-                        <a:t> Retain </a:t>
-                      </a:r>
-                      <a:r>
-                        <a:rPr kumimoji="0" lang="en-US" altLang="en-US" sz="1600" b="1" i="0" u="none" strike="noStrike" cap="none" normalizeH="0" baseline="0" dirty="0">
-                          <a:ln>
-                            <a:noFill/>
-                          </a:ln>
-                          <a:solidFill>
-                            <a:schemeClr val="tx1"/>
-                          </a:solidFill>
-                          <a:effectLst/>
-                          <a:latin typeface="Arial" panose="020B0604020202020204" pitchFamily="34" charset="0"/>
-                          <a:cs typeface="Arial" panose="020B0604020202020204" pitchFamily="34" charset="0"/>
-                        </a:rPr>
-                        <a:t>6 months (~1.8M records)</a:t>
-                      </a:r>
-                      <a:br>
-                        <a:rPr kumimoji="0" lang="en-US" altLang="en-US" sz="1600" b="0" i="0" u="none" strike="noStrike" cap="none" normalizeH="0" baseline="0" dirty="0">
-                          <a:ln>
-                            <a:noFill/>
-                          </a:ln>
-                          <a:solidFill>
-                            <a:schemeClr val="tx1"/>
-                          </a:solidFill>
-                          <a:effectLst/>
-                          <a:latin typeface="Arial" panose="020B0604020202020204" pitchFamily="34" charset="0"/>
-                          <a:cs typeface="Arial" panose="020B0604020202020204" pitchFamily="34" charset="0"/>
-                        </a:rPr>
-                      </a:br>
-                      <a:r>
-                        <a:rPr kumimoji="0" lang="en-US" altLang="en-US" sz="1600" b="0" i="0" u="none" strike="noStrike" cap="none" normalizeH="0" baseline="0" dirty="0">
-                          <a:ln>
-                            <a:noFill/>
-                          </a:ln>
-                          <a:solidFill>
-                            <a:schemeClr val="tx1"/>
-                          </a:solidFill>
-                          <a:effectLst/>
-                          <a:latin typeface="Arial" panose="020B0604020202020204" pitchFamily="34" charset="0"/>
-                          <a:cs typeface="Arial" panose="020B0604020202020204" pitchFamily="34" charset="0"/>
-                        </a:rPr>
-                        <a:t> Apply </a:t>
-                      </a:r>
-                      <a:r>
-                        <a:rPr kumimoji="0" lang="en-US" altLang="en-US" sz="1600" b="1" i="0" u="none" strike="noStrike" cap="none" normalizeH="0" baseline="0" dirty="0">
-                          <a:ln>
-                            <a:noFill/>
-                          </a:ln>
-                          <a:solidFill>
-                            <a:schemeClr val="tx1"/>
-                          </a:solidFill>
-                          <a:effectLst/>
-                          <a:latin typeface="Arial" panose="020B0604020202020204" pitchFamily="34" charset="0"/>
-                          <a:cs typeface="Arial" panose="020B0604020202020204" pitchFamily="34" charset="0"/>
-                        </a:rPr>
-                        <a:t>proper indexing for performance optimization</a:t>
-                      </a:r>
-                      <a:r>
-                        <a:rPr kumimoji="0" lang="en-US" altLang="en-US" sz="1600" b="0" i="0" u="none" strike="noStrike" cap="none" normalizeH="0" baseline="0" dirty="0">
-                          <a:ln>
-                            <a:noFill/>
-                          </a:ln>
-                          <a:solidFill>
-                            <a:schemeClr val="tx1"/>
-                          </a:solidFill>
-                          <a:effectLst/>
-                          <a:latin typeface="Arial" panose="020B0604020202020204" pitchFamily="34" charset="0"/>
-                          <a:cs typeface="Arial" panose="020B0604020202020204" pitchFamily="34" charset="0"/>
-                        </a:rPr>
-                        <a:t> </a:t>
-                      </a:r>
-                    </a:p>
-                    <a:p>
-                      <a:pPr marL="0" marR="0" lvl="0" indent="0" algn="l" defTabSz="914400" rtl="0" eaLnBrk="0" fontAlgn="base" latinLnBrk="0" hangingPunct="0">
-                        <a:lnSpc>
-                          <a:spcPct val="150000"/>
-                        </a:lnSpc>
-                        <a:spcBef>
-                          <a:spcPct val="0"/>
-                        </a:spcBef>
-                        <a:spcAft>
-                          <a:spcPct val="0"/>
-                        </a:spcAft>
-                        <a:buClrTx/>
-                        <a:buSzTx/>
-                        <a:buFontTx/>
-                        <a:buChar char="•"/>
-                        <a:tabLst/>
-                      </a:pPr>
-                      <a:r>
-                        <a:rPr kumimoji="0" lang="en-US" altLang="en-US" sz="1600" b="1" i="0" u="none" strike="noStrike" cap="none" normalizeH="0" baseline="0" dirty="0" err="1">
-                          <a:ln>
-                            <a:noFill/>
-                          </a:ln>
-                          <a:solidFill>
-                            <a:schemeClr val="tx1"/>
-                          </a:solidFill>
-                          <a:effectLst/>
-                          <a:latin typeface="Arial" panose="020B0604020202020204" pitchFamily="34" charset="0"/>
-                          <a:cs typeface="Arial" panose="020B0604020202020204" pitchFamily="34" charset="0"/>
-                        </a:rPr>
-                        <a:t>Prefunding_log</a:t>
-                      </a:r>
-                      <a:br>
-                        <a:rPr kumimoji="0" lang="en-US" altLang="en-US" sz="1600" b="0" i="0" u="none" strike="noStrike" cap="none" normalizeH="0" baseline="0" dirty="0">
-                          <a:ln>
-                            <a:noFill/>
-                          </a:ln>
-                          <a:solidFill>
-                            <a:schemeClr val="tx1"/>
-                          </a:solidFill>
-                          <a:effectLst/>
-                          <a:latin typeface="Arial" panose="020B0604020202020204" pitchFamily="34" charset="0"/>
-                          <a:cs typeface="Arial" panose="020B0604020202020204" pitchFamily="34" charset="0"/>
-                        </a:rPr>
-                      </a:br>
-                      <a:r>
-                        <a:rPr kumimoji="0" lang="en-US" altLang="en-US" sz="1600" b="0" i="0" u="none" strike="noStrike" cap="none" normalizeH="0" baseline="0" dirty="0">
-                          <a:ln>
-                            <a:noFill/>
-                          </a:ln>
-                          <a:solidFill>
-                            <a:schemeClr val="tx1"/>
-                          </a:solidFill>
-                          <a:effectLst/>
-                          <a:latin typeface="Arial" panose="020B0604020202020204" pitchFamily="34" charset="0"/>
-                          <a:cs typeface="Arial" panose="020B0604020202020204" pitchFamily="34" charset="0"/>
-                        </a:rPr>
-                        <a:t> ~</a:t>
-                      </a:r>
-                      <a:r>
-                        <a:rPr kumimoji="0" lang="en-US" altLang="en-US" sz="1600" b="1" i="0" u="none" strike="noStrike" cap="none" normalizeH="0" baseline="0" dirty="0">
-                          <a:ln>
-                            <a:noFill/>
-                          </a:ln>
-                          <a:solidFill>
-                            <a:schemeClr val="tx1"/>
-                          </a:solidFill>
-                          <a:effectLst/>
-                          <a:latin typeface="Arial" panose="020B0604020202020204" pitchFamily="34" charset="0"/>
-                          <a:cs typeface="Arial" panose="020B0604020202020204" pitchFamily="34" charset="0"/>
-                        </a:rPr>
-                        <a:t>516K records (6 months)</a:t>
-                      </a:r>
-                      <a:br>
-                        <a:rPr kumimoji="0" lang="en-US" altLang="en-US" sz="1600" b="0" i="0" u="none" strike="noStrike" cap="none" normalizeH="0" baseline="0" dirty="0">
-                          <a:ln>
-                            <a:noFill/>
-                          </a:ln>
-                          <a:solidFill>
-                            <a:schemeClr val="tx1"/>
-                          </a:solidFill>
-                          <a:effectLst/>
-                          <a:latin typeface="Arial" panose="020B0604020202020204" pitchFamily="34" charset="0"/>
-                          <a:cs typeface="Arial" panose="020B0604020202020204" pitchFamily="34" charset="0"/>
-                        </a:rPr>
-                      </a:br>
-                      <a:r>
-                        <a:rPr kumimoji="0" lang="en-US" altLang="en-US" sz="1600" b="0" i="0" u="none" strike="noStrike" cap="none" normalizeH="0" baseline="0" dirty="0">
-                          <a:ln>
-                            <a:noFill/>
-                          </a:ln>
-                          <a:solidFill>
-                            <a:schemeClr val="tx1"/>
-                          </a:solidFill>
-                          <a:effectLst/>
-                          <a:latin typeface="Arial" panose="020B0604020202020204" pitchFamily="34" charset="0"/>
-                          <a:cs typeface="Arial" panose="020B0604020202020204" pitchFamily="34" charset="0"/>
-                        </a:rPr>
-                        <a:t> Retain </a:t>
-                      </a:r>
-                      <a:r>
-                        <a:rPr kumimoji="0" lang="en-US" altLang="en-US" sz="1600" b="1" i="0" u="none" strike="noStrike" cap="none" normalizeH="0" baseline="0" dirty="0">
-                          <a:ln>
-                            <a:noFill/>
-                          </a:ln>
-                          <a:solidFill>
-                            <a:schemeClr val="tx1"/>
-                          </a:solidFill>
-                          <a:effectLst/>
-                          <a:latin typeface="Arial" panose="020B0604020202020204" pitchFamily="34" charset="0"/>
-                          <a:cs typeface="Arial" panose="020B0604020202020204" pitchFamily="34" charset="0"/>
-                        </a:rPr>
-                        <a:t>6 months</a:t>
-                      </a:r>
-                      <a:r>
-                        <a:rPr kumimoji="0" lang="en-US" altLang="en-US" sz="1600" b="0" i="0" u="none" strike="noStrike" cap="none" normalizeH="0" baseline="0" dirty="0">
-                          <a:ln>
-                            <a:noFill/>
-                          </a:ln>
-                          <a:solidFill>
-                            <a:schemeClr val="tx1"/>
-                          </a:solidFill>
-                          <a:effectLst/>
-                          <a:latin typeface="Arial" panose="020B0604020202020204" pitchFamily="34" charset="0"/>
-                          <a:cs typeface="Arial" panose="020B0604020202020204" pitchFamily="34" charset="0"/>
-                        </a:rPr>
-                        <a:t> </a:t>
-                      </a:r>
-                    </a:p>
-                    <a:p>
-                      <a:pPr marL="0" marR="0" lvl="0" indent="0" algn="l" defTabSz="914400" rtl="0" eaLnBrk="0" fontAlgn="base" latinLnBrk="0" hangingPunct="0">
-                        <a:lnSpc>
-                          <a:spcPct val="150000"/>
-                        </a:lnSpc>
-                        <a:spcBef>
-                          <a:spcPct val="0"/>
-                        </a:spcBef>
-                        <a:spcAft>
-                          <a:spcPct val="0"/>
-                        </a:spcAft>
-                        <a:buClrTx/>
-                        <a:buSzTx/>
-                        <a:buFontTx/>
-                        <a:buChar char="•"/>
-                        <a:tabLst/>
-                      </a:pPr>
-                      <a:r>
-                        <a:rPr kumimoji="0" lang="en-US" altLang="en-US" sz="1600" b="1" i="0" u="none" strike="noStrike" cap="none" normalizeH="0" baseline="0" dirty="0" err="1">
-                          <a:ln>
-                            <a:noFill/>
-                          </a:ln>
-                          <a:solidFill>
-                            <a:schemeClr val="tx1"/>
-                          </a:solidFill>
-                          <a:effectLst/>
-                          <a:latin typeface="Arial" panose="020B0604020202020204" pitchFamily="34" charset="0"/>
-                          <a:cs typeface="Arial" panose="020B0604020202020204" pitchFamily="34" charset="0"/>
-                        </a:rPr>
-                        <a:t>Trigger_log</a:t>
-                      </a:r>
-                      <a:br>
-                        <a:rPr kumimoji="0" lang="en-US" altLang="en-US" sz="1600" b="0" i="0" u="none" strike="noStrike" cap="none" normalizeH="0" baseline="0" dirty="0">
-                          <a:ln>
-                            <a:noFill/>
-                          </a:ln>
-                          <a:solidFill>
-                            <a:schemeClr val="tx1"/>
-                          </a:solidFill>
-                          <a:effectLst/>
-                          <a:latin typeface="Arial" panose="020B0604020202020204" pitchFamily="34" charset="0"/>
-                          <a:cs typeface="Arial" panose="020B0604020202020204" pitchFamily="34" charset="0"/>
-                        </a:rPr>
-                      </a:br>
-                      <a:r>
-                        <a:rPr kumimoji="0" lang="en-US" altLang="en-US" sz="1600" b="0" i="0" u="none" strike="noStrike" cap="none" normalizeH="0" baseline="0" dirty="0">
-                          <a:ln>
-                            <a:noFill/>
-                          </a:ln>
-                          <a:solidFill>
-                            <a:schemeClr val="tx1"/>
-                          </a:solidFill>
-                          <a:effectLst/>
-                          <a:latin typeface="Arial" panose="020B0604020202020204" pitchFamily="34" charset="0"/>
-                          <a:cs typeface="Arial" panose="020B0604020202020204" pitchFamily="34" charset="0"/>
-                        </a:rPr>
-                        <a:t>Retain </a:t>
-                      </a:r>
-                      <a:r>
-                        <a:rPr kumimoji="0" lang="en-US" altLang="en-US" sz="1600" b="1" i="0" u="none" strike="noStrike" cap="none" normalizeH="0" baseline="0" dirty="0">
-                          <a:ln>
-                            <a:noFill/>
-                          </a:ln>
-                          <a:solidFill>
-                            <a:schemeClr val="tx1"/>
-                          </a:solidFill>
-                          <a:effectLst/>
-                          <a:latin typeface="Arial" panose="020B0604020202020204" pitchFamily="34" charset="0"/>
-                          <a:cs typeface="Arial" panose="020B0604020202020204" pitchFamily="34" charset="0"/>
-                        </a:rPr>
-                        <a:t>6 months</a:t>
-                      </a:r>
-                      <a:r>
-                        <a:rPr kumimoji="0" lang="en-US" altLang="en-US" sz="1600" b="0" i="0" u="none" strike="noStrike" cap="none" normalizeH="0" baseline="0" dirty="0">
-                          <a:ln>
-                            <a:noFill/>
-                          </a:ln>
-                          <a:solidFill>
-                            <a:schemeClr val="tx1"/>
-                          </a:solidFill>
-                          <a:effectLst/>
-                          <a:latin typeface="Arial" panose="020B0604020202020204" pitchFamily="34" charset="0"/>
-                          <a:cs typeface="Arial" panose="020B0604020202020204" pitchFamily="34" charset="0"/>
-                        </a:rPr>
-                        <a:t> </a:t>
-                      </a:r>
-                    </a:p>
-                    <a:p>
-                      <a:pPr>
-                        <a:buNone/>
-                      </a:pPr>
-                      <a:endParaRPr lang="en-US" dirty="0"/>
-                    </a:p>
-                  </a:txBody>
-                  <a:tcPr anchor="ctr">
-                    <a:lnL>
-                      <a:noFill/>
-                    </a:lnL>
-                    <a:lnR>
-                      <a:noFill/>
-                    </a:lnR>
-                    <a:lnT>
-                      <a:noFill/>
-                    </a:lnT>
-                    <a:lnB>
-                      <a:noFill/>
-                    </a:lnB>
-                    <a:noFill/>
-                  </a:tcPr>
-                </a:tc>
-                <a:extLst>
-                  <a:ext uri="{0D108BD9-81ED-4DB2-BD59-A6C34878D82A}">
-                    <a16:rowId xmlns:a16="http://schemas.microsoft.com/office/drawing/2014/main" val="1631149557"/>
-                  </a:ext>
-                </a:extLst>
-              </a:tr>
-            </a:tbl>
-          </a:graphicData>
-        </a:graphic>
-      </p:graphicFrame>
     </p:spTree>
     <p:extLst>
       <p:ext uri="{BB962C8B-B14F-4D97-AF65-F5344CB8AC3E}">
-        <p14:creationId xmlns:p14="http://schemas.microsoft.com/office/powerpoint/2010/main" val="2519374721"/>
+        <p14:creationId xmlns:p14="http://schemas.microsoft.com/office/powerpoint/2010/main" val="1904210816"/>
       </p:ext>
     </p:extLst>
   </p:cSld>
@@ -4340,7 +5223,7 @@
 </p:sld>
 </file>
 
-<file path=ppt/slides/slide5.xml><?xml version="1.0" encoding="utf-8"?>
+<file path=ppt/slides/slide6.xml><?xml version="1.0" encoding="utf-8"?>
 <p:sld xmlns:a="http://schemas.openxmlformats.org/drawingml/2006/main" xmlns:r="http://schemas.openxmlformats.org/officeDocument/2006/relationships" xmlns:p="http://schemas.openxmlformats.org/presentationml/2006/main">
   <p:cSld>
     <p:spTree>
@@ -4386,7 +5269,7 @@
           <a:p>
             <a:fld id="{93288B1A-0894-4E52-95D8-2AC74CBED725}" type="slidenum">
               <a:rPr lang="en-US" smtClean="0"/>
-              <a:t>5</a:t>
+              <a:t>6</a:t>
             </a:fld>
             <a:endParaRPr lang="en-US"/>
           </a:p>
@@ -4415,7 +5298,7 @@
           <a:p>
             <a:r>
               <a:rPr lang="en-US" dirty="0"/>
-              <a:t>Propose Solution for Archiving ,Retention &amp; Improvement</a:t>
+              <a:t>Large Volume table status with propose retention plan</a:t>
             </a:r>
           </a:p>
         </p:txBody>
@@ -4491,14 +5374,14 @@
           <p:nvPr>
             <p:extLst>
               <p:ext uri="{D42A27DB-BD31-4B8C-83A1-F6EECF244321}">
-                <p14:modId xmlns:p14="http://schemas.microsoft.com/office/powerpoint/2010/main" val="883213535"/>
+                <p14:modId xmlns:p14="http://schemas.microsoft.com/office/powerpoint/2010/main" val="118855472"/>
               </p:ext>
             </p:extLst>
           </p:nvPr>
         </p:nvGraphicFramePr>
         <p:xfrm>
-          <a:off x="688042" y="1137187"/>
-          <a:ext cx="8128002" cy="4973067"/>
+          <a:off x="212344" y="878997"/>
+          <a:ext cx="10824464" cy="5259515"/>
         </p:xfrm>
         <a:graphic>
           <a:graphicData uri="http://schemas.openxmlformats.org/drawingml/2006/table">
@@ -4507,42 +5390,42 @@
                 <a:tableStyleId>{5940675A-B579-460E-94D1-54222C63F5DA}</a:tableStyleId>
               </a:tblPr>
               <a:tblGrid>
-                <a:gridCol w="1354667">
+                <a:gridCol w="1040384">
                   <a:extLst>
                     <a:ext uri="{9D8B030D-6E8A-4147-A177-3AD203B41FA5}">
                       <a16:colId xmlns:a16="http://schemas.microsoft.com/office/drawing/2014/main" val="1938797340"/>
                     </a:ext>
                   </a:extLst>
                 </a:gridCol>
-                <a:gridCol w="1354667">
+                <a:gridCol w="2254497">
                   <a:extLst>
                     <a:ext uri="{9D8B030D-6E8A-4147-A177-3AD203B41FA5}">
                       <a16:colId xmlns:a16="http://schemas.microsoft.com/office/drawing/2014/main" val="1983860111"/>
                     </a:ext>
                   </a:extLst>
                 </a:gridCol>
-                <a:gridCol w="1354667">
+                <a:gridCol w="1351114">
                   <a:extLst>
                     <a:ext uri="{9D8B030D-6E8A-4147-A177-3AD203B41FA5}">
                       <a16:colId xmlns:a16="http://schemas.microsoft.com/office/drawing/2014/main" val="528643849"/>
                     </a:ext>
                   </a:extLst>
                 </a:gridCol>
-                <a:gridCol w="1354667">
+                <a:gridCol w="1597325">
                   <a:extLst>
                     <a:ext uri="{9D8B030D-6E8A-4147-A177-3AD203B41FA5}">
                       <a16:colId xmlns:a16="http://schemas.microsoft.com/office/drawing/2014/main" val="1154069943"/>
                     </a:ext>
                   </a:extLst>
                 </a:gridCol>
-                <a:gridCol w="1354667">
+                <a:gridCol w="1225897">
                   <a:extLst>
                     <a:ext uri="{9D8B030D-6E8A-4147-A177-3AD203B41FA5}">
                       <a16:colId xmlns:a16="http://schemas.microsoft.com/office/drawing/2014/main" val="3273392666"/>
                     </a:ext>
                   </a:extLst>
                 </a:gridCol>
-                <a:gridCol w="1354667">
+                <a:gridCol w="3355247">
                   <a:extLst>
                     <a:ext uri="{9D8B030D-6E8A-4147-A177-3AD203B41FA5}">
                       <a16:colId xmlns:a16="http://schemas.microsoft.com/office/drawing/2014/main" val="4067158745"/>
@@ -4556,7 +5439,10 @@
                     <a:bodyPr/>
                     <a:lstStyle/>
                     <a:p>
-                      <a:endParaRPr lang="en-US"/>
+                      <a:r>
+                        <a:rPr lang="en-US" dirty="0"/>
+                        <a:t>Business Impact</a:t>
+                      </a:r>
                     </a:p>
                   </a:txBody>
                   <a:tcPr/>
@@ -4571,19 +5457,11 @@
                         <a:t>Table Name</a:t>
                       </a:r>
                     </a:p>
-                  </a:txBody>
-                  <a:tcPr/>
-                </a:tc>
-                <a:tc>
-                  <a:txBody>
-                    <a:bodyPr/>
-                    <a:lstStyle/>
                     <a:p>
                       <a:r>
-                        <a:rPr lang="en-US" dirty="0" err="1"/>
-                        <a:t>RowCount</a:t>
+                        <a:rPr lang="en-US" dirty="0"/>
+                        <a:t>(immediate archive)</a:t>
                       </a:r>
-                      <a:endParaRPr lang="en-US" dirty="0"/>
                     </a:p>
                   </a:txBody>
                   <a:tcPr/>
@@ -4595,7 +5473,26 @@
                     <a:p>
                       <a:r>
                         <a:rPr lang="en-US" dirty="0"/>
-                        <a:t>After Archive</a:t>
+                        <a:t>Row Count</a:t>
+                      </a:r>
+                    </a:p>
+                  </a:txBody>
+                  <a:tcPr/>
+                </a:tc>
+                <a:tc>
+                  <a:txBody>
+                    <a:bodyPr/>
+                    <a:lstStyle/>
+                    <a:p>
+                      <a:r>
+                        <a:rPr lang="en-US" dirty="0"/>
+                        <a:t>After </a:t>
+                      </a:r>
+                    </a:p>
+                    <a:p>
+                      <a:r>
+                        <a:rPr lang="en-US" dirty="0"/>
+                        <a:t>Archive</a:t>
                       </a:r>
                     </a:p>
                   </a:txBody>
@@ -4613,10 +5510,15 @@
                     </a:p>
                     <a:p>
                       <a:r>
-                        <a:rPr lang="en-US" dirty="0" err="1"/>
-                        <a:t>Rentention</a:t>
+                        <a:rPr lang="en-US" dirty="0"/>
+                        <a:t>Retention</a:t>
                       </a:r>
-                      <a:endParaRPr lang="en-US" dirty="0"/>
+                    </a:p>
+                    <a:p>
+                      <a:r>
+                        <a:rPr lang="en-US" dirty="0"/>
+                        <a:t>Period</a:t>
+                      </a:r>
                     </a:p>
                   </a:txBody>
                   <a:tcPr/>
@@ -4649,7 +5551,11 @@
                       <a:endParaRPr lang="en-US" dirty="0"/>
                     </a:p>
                   </a:txBody>
-                  <a:tcPr/>
+                  <a:tcPr>
+                    <a:solidFill>
+                      <a:srgbClr val="FF0000"/>
+                    </a:solidFill>
+                  </a:tcPr>
                 </a:tc>
                 <a:tc>
                   <a:txBody>
@@ -4663,29 +5569,46 @@
                         <a:buNone/>
                       </a:pPr>
                       <a:r>
-                        <a:rPr lang="en-US" sz="1200" kern="100" dirty="0" err="1">
+                        <a:rPr lang="en-US" sz="1600" b="1" kern="100" dirty="0" err="1">
+                          <a:solidFill>
+                            <a:schemeClr val="bg1"/>
+                          </a:solidFill>
                           <a:effectLst/>
                         </a:rPr>
                         <a:t>sale_transaction</a:t>
                       </a:r>
-                      <a:endParaRPr lang="en-US" sz="1200" kern="100" dirty="0">
+                      <a:endParaRPr lang="en-US" sz="1600" b="1" kern="100" dirty="0">
+                        <a:solidFill>
+                          <a:schemeClr val="bg1"/>
+                        </a:solidFill>
                         <a:effectLst/>
                       </a:endParaRPr>
                     </a:p>
+                  </a:txBody>
+                  <a:tcPr marL="68580" marR="68580" marT="0" marB="0">
+                    <a:solidFill>
+                      <a:srgbClr val="FF0000"/>
+                    </a:solidFill>
+                  </a:tcPr>
+                </a:tc>
+                <a:tc>
+                  <a:txBody>
+                    <a:bodyPr/>
+                    <a:lstStyle/>
                     <a:p>
-                      <a:pPr marL="0" marR="0">
+                      <a:pPr marL="0" marR="0" algn="r">
                         <a:lnSpc>
                           <a:spcPct val="150000"/>
                         </a:lnSpc>
                         <a:buNone/>
                       </a:pPr>
                       <a:r>
-                        <a:rPr lang="en-US" sz="1200" kern="100" dirty="0">
+                        <a:rPr lang="en-US" sz="1800" b="1" kern="100" dirty="0">
                           <a:effectLst/>
                         </a:rPr>
-                        <a:t> </a:t>
+                        <a:t>7,338,714 </a:t>
                       </a:r>
-                      <a:endParaRPr lang="en-US" sz="1200" kern="100" dirty="0">
+                      <a:endParaRPr lang="en-US" sz="1800" b="1" kern="100" dirty="0">
                         <a:effectLst/>
                         <a:latin typeface="Times New Roman" panose="02020603050405020304" pitchFamily="18" charset="0"/>
                         <a:ea typeface="Times New Roman" panose="02020603050405020304" pitchFamily="18" charset="0"/>
@@ -4700,48 +5623,10 @@
                     <a:bodyPr/>
                     <a:lstStyle/>
                     <a:p>
-                      <a:pPr marL="0" marR="0" algn="r">
-                        <a:lnSpc>
-                          <a:spcPct val="150000"/>
-                        </a:lnSpc>
-                        <a:buNone/>
-                      </a:pPr>
                       <a:r>
-                        <a:rPr lang="en-US" sz="1200" kern="100">
-                          <a:effectLst/>
-                        </a:rPr>
-                        <a:t>7338714</a:t>
+                        <a:rPr lang="en-US" dirty="0"/>
+                        <a:t>1.8 M</a:t>
                       </a:r>
-                    </a:p>
-                    <a:p>
-                      <a:pPr marL="0" marR="0" algn="r">
-                        <a:lnSpc>
-                          <a:spcPct val="150000"/>
-                        </a:lnSpc>
-                        <a:buNone/>
-                      </a:pPr>
-                      <a:r>
-                        <a:rPr lang="en-US" sz="1200" kern="100">
-                          <a:effectLst/>
-                        </a:rPr>
-                        <a:t> </a:t>
-                      </a:r>
-                      <a:endParaRPr lang="en-US" sz="1200" kern="100">
-                        <a:effectLst/>
-                        <a:latin typeface="Times New Roman" panose="02020603050405020304" pitchFamily="18" charset="0"/>
-                        <a:ea typeface="Times New Roman" panose="02020603050405020304" pitchFamily="18" charset="0"/>
-                        <a:cs typeface="Times New Roman" panose="02020603050405020304" pitchFamily="18" charset="0"/>
-                      </a:endParaRPr>
-                    </a:p>
-                  </a:txBody>
-                  <a:tcPr marL="68580" marR="68580" marT="0" marB="0"/>
-                </a:tc>
-                <a:tc>
-                  <a:txBody>
-                    <a:bodyPr/>
-                    <a:lstStyle/>
-                    <a:p>
-                      <a:endParaRPr lang="en-US"/>
                     </a:p>
                   </a:txBody>
                   <a:tcPr/>
@@ -4751,7 +5636,10 @@
                     <a:bodyPr/>
                     <a:lstStyle/>
                     <a:p>
-                      <a:endParaRPr lang="en-US"/>
+                      <a:r>
+                        <a:rPr lang="en-US" dirty="0"/>
+                        <a:t>6 month</a:t>
+                      </a:r>
                     </a:p>
                   </a:txBody>
                   <a:tcPr/>
@@ -4761,7 +5649,10 @@
                     <a:bodyPr/>
                     <a:lstStyle/>
                     <a:p>
-                      <a:endParaRPr lang="en-US"/>
+                      <a:r>
+                        <a:rPr lang="en-US" dirty="0"/>
+                        <a:t>Core sale</a:t>
+                      </a:r>
                     </a:p>
                   </a:txBody>
                   <a:tcPr/>
@@ -4778,10 +5669,14 @@
                     <a:bodyPr/>
                     <a:lstStyle/>
                     <a:p>
-                      <a:endParaRPr lang="en-US"/>
+                      <a:endParaRPr lang="en-US" dirty="0"/>
                     </a:p>
                   </a:txBody>
-                  <a:tcPr/>
+                  <a:tcPr>
+                    <a:solidFill>
+                      <a:srgbClr val="FF0000"/>
+                    </a:solidFill>
+                  </a:tcPr>
                 </a:tc>
                 <a:tc>
                   <a:txBody>
@@ -4795,12 +5690,49 @@
                         <a:buNone/>
                       </a:pPr>
                       <a:r>
-                        <a:rPr lang="en-US" sz="1100" kern="100">
+                        <a:rPr lang="en-US" sz="1600" b="1" kern="100" dirty="0" err="1">
+                          <a:solidFill>
+                            <a:schemeClr val="bg1"/>
+                          </a:solidFill>
                           <a:effectLst/>
                         </a:rPr>
                         <a:t>print_summary</a:t>
                       </a:r>
-                      <a:endParaRPr lang="en-US" sz="1200" kern="100">
+                      <a:endParaRPr lang="en-US" sz="1600" b="1" kern="100" dirty="0">
+                        <a:solidFill>
+                          <a:schemeClr val="bg1"/>
+                        </a:solidFill>
+                        <a:effectLst/>
+                        <a:latin typeface="Times New Roman" panose="02020603050405020304" pitchFamily="18" charset="0"/>
+                        <a:ea typeface="Times New Roman" panose="02020603050405020304" pitchFamily="18" charset="0"/>
+                        <a:cs typeface="Times New Roman" panose="02020603050405020304" pitchFamily="18" charset="0"/>
+                      </a:endParaRPr>
+                    </a:p>
+                  </a:txBody>
+                  <a:tcPr marL="68580" marR="68580" marT="0" marB="0" anchor="ctr">
+                    <a:solidFill>
+                      <a:srgbClr val="FF0000"/>
+                    </a:solidFill>
+                  </a:tcPr>
+                </a:tc>
+                <a:tc>
+                  <a:txBody>
+                    <a:bodyPr/>
+                    <a:lstStyle/>
+                    <a:p>
+                      <a:pPr marL="0" marR="0" algn="r">
+                        <a:lnSpc>
+                          <a:spcPct val="150000"/>
+                        </a:lnSpc>
+                        <a:buNone/>
+                      </a:pPr>
+                      <a:r>
+                        <a:rPr lang="en-US" sz="1800" b="1" kern="100" dirty="0">
+                          <a:effectLst/>
+                        </a:rPr>
+                        <a:t>2,246,923</a:t>
+                      </a:r>
+                      <a:endParaRPr lang="en-US" sz="1800" b="1" kern="100" dirty="0">
                         <a:effectLst/>
                         <a:latin typeface="Times New Roman" panose="02020603050405020304" pitchFamily="18" charset="0"/>
                         <a:ea typeface="Times New Roman" panose="02020603050405020304" pitchFamily="18" charset="0"/>
@@ -4815,6 +5747,131 @@
                     <a:bodyPr/>
                     <a:lstStyle/>
                     <a:p>
+                      <a:pPr marL="0" marR="0" lvl="0" indent="0" algn="l" defTabSz="914400" rtl="0" eaLnBrk="1" fontAlgn="auto" latinLnBrk="0" hangingPunct="1">
+                        <a:lnSpc>
+                          <a:spcPct val="100000"/>
+                        </a:lnSpc>
+                        <a:spcBef>
+                          <a:spcPts val="0"/>
+                        </a:spcBef>
+                        <a:spcAft>
+                          <a:spcPts val="0"/>
+                        </a:spcAft>
+                        <a:buClrTx/>
+                        <a:buSzTx/>
+                        <a:buFontTx/>
+                        <a:buNone/>
+                        <a:tabLst/>
+                        <a:defRPr/>
+                      </a:pPr>
+                      <a:r>
+                        <a:rPr lang="en-US" dirty="0"/>
+                        <a:t>600 K</a:t>
+                      </a:r>
+                    </a:p>
+                  </a:txBody>
+                  <a:tcPr/>
+                </a:tc>
+                <a:tc>
+                  <a:txBody>
+                    <a:bodyPr/>
+                    <a:lstStyle/>
+                    <a:p>
+                      <a:r>
+                        <a:rPr lang="en-US" dirty="0"/>
+                        <a:t>3 month</a:t>
+                      </a:r>
+                    </a:p>
+                  </a:txBody>
+                  <a:tcPr/>
+                </a:tc>
+                <a:tc>
+                  <a:txBody>
+                    <a:bodyPr/>
+                    <a:lstStyle/>
+                    <a:p>
+                      <a:r>
+                        <a:rPr lang="en-US" dirty="0"/>
+                        <a:t>Shop level sale check</a:t>
+                      </a:r>
+                    </a:p>
+                  </a:txBody>
+                  <a:tcPr/>
+                </a:tc>
+                <a:extLst>
+                  <a:ext uri="{0D108BD9-81ED-4DB2-BD59-A6C34878D82A}">
+                    <a16:rowId xmlns:a16="http://schemas.microsoft.com/office/drawing/2014/main" val="3421293376"/>
+                  </a:ext>
+                </a:extLst>
+              </a:tr>
+              <a:tr h="176627">
+                <a:tc>
+                  <a:txBody>
+                    <a:bodyPr/>
+                    <a:lstStyle/>
+                    <a:p>
+                      <a:endParaRPr lang="en-US" dirty="0"/>
+                    </a:p>
+                  </a:txBody>
+                  <a:tcPr>
+                    <a:solidFill>
+                      <a:srgbClr val="FF0000"/>
+                    </a:solidFill>
+                  </a:tcPr>
+                </a:tc>
+                <a:tc>
+                  <a:txBody>
+                    <a:bodyPr/>
+                    <a:lstStyle/>
+                    <a:p>
+                      <a:pPr marL="0" marR="0" lvl="0" indent="0" algn="l" defTabSz="914400" rtl="0" eaLnBrk="1" fontAlgn="auto" latinLnBrk="0" hangingPunct="1">
+                        <a:lnSpc>
+                          <a:spcPct val="150000"/>
+                        </a:lnSpc>
+                        <a:spcBef>
+                          <a:spcPts val="0"/>
+                        </a:spcBef>
+                        <a:spcAft>
+                          <a:spcPts val="0"/>
+                        </a:spcAft>
+                        <a:buClrTx/>
+                        <a:buSzTx/>
+                        <a:buFontTx/>
+                        <a:buNone/>
+                        <a:tabLst/>
+                        <a:defRPr/>
+                      </a:pPr>
+                      <a:r>
+                        <a:rPr lang="en-US" sz="1600" b="1" kern="100" dirty="0" err="1">
+                          <a:solidFill>
+                            <a:schemeClr val="bg1"/>
+                          </a:solidFill>
+                          <a:effectLst/>
+                        </a:rPr>
+                        <a:t>commission_transaction</a:t>
+                      </a:r>
+                      <a:endParaRPr lang="en-US" sz="1600" b="1" kern="100" dirty="0">
+                        <a:solidFill>
+                          <a:schemeClr val="bg1"/>
+                        </a:solidFill>
+                        <a:effectLst/>
+                        <a:latin typeface="Times New Roman" panose="02020603050405020304" pitchFamily="18" charset="0"/>
+                        <a:ea typeface="Times New Roman" panose="02020603050405020304" pitchFamily="18" charset="0"/>
+                        <a:cs typeface="Times New Roman" panose="02020603050405020304" pitchFamily="18" charset="0"/>
+                      </a:endParaRPr>
+                    </a:p>
+                  </a:txBody>
+                  <a:tcPr marL="68580" marR="68580" marT="0" marB="0" anchor="ctr">
+                    <a:solidFill>
+                      <a:srgbClr val="FF0000"/>
+                    </a:solidFill>
+                  </a:tcPr>
+                </a:tc>
+                <a:tc>
+                  <a:txBody>
+                    <a:bodyPr/>
+                    <a:lstStyle/>
+                    <a:p>
                       <a:pPr marL="0" marR="0" algn="r">
                         <a:lnSpc>
                           <a:spcPct val="150000"/>
@@ -4822,12 +5879,198 @@
                         <a:buNone/>
                       </a:pPr>
                       <a:r>
-                        <a:rPr lang="en-US" sz="1100" kern="100">
+                        <a:rPr lang="en-US" sz="1800" b="1" kern="100" dirty="0">
                           <a:effectLst/>
                         </a:rPr>
-                        <a:t>2246923</a:t>
+                        <a:t>7,118,764</a:t>
                       </a:r>
-                      <a:endParaRPr lang="en-US" sz="1200" kern="100">
+                      <a:endParaRPr lang="en-US" sz="1800" b="1" kern="100" dirty="0">
+                        <a:effectLst/>
+                        <a:latin typeface="Times New Roman" panose="02020603050405020304" pitchFamily="18" charset="0"/>
+                        <a:ea typeface="Times New Roman" panose="02020603050405020304" pitchFamily="18" charset="0"/>
+                        <a:cs typeface="Times New Roman" panose="02020603050405020304" pitchFamily="18" charset="0"/>
+                      </a:endParaRPr>
+                    </a:p>
+                  </a:txBody>
+                  <a:tcPr marL="68580" marR="68580" marT="0" marB="0" anchor="ctr"/>
+                </a:tc>
+                <a:tc>
+                  <a:txBody>
+                    <a:bodyPr/>
+                    <a:lstStyle/>
+                    <a:p>
+                      <a:pPr marL="0" marR="0" lvl="0" indent="0" algn="l" defTabSz="914400" rtl="0" eaLnBrk="1" fontAlgn="auto" latinLnBrk="0" hangingPunct="1">
+                        <a:lnSpc>
+                          <a:spcPct val="100000"/>
+                        </a:lnSpc>
+                        <a:spcBef>
+                          <a:spcPts val="0"/>
+                        </a:spcBef>
+                        <a:spcAft>
+                          <a:spcPts val="0"/>
+                        </a:spcAft>
+                        <a:buClrTx/>
+                        <a:buSzTx/>
+                        <a:buFontTx/>
+                        <a:buNone/>
+                        <a:tabLst/>
+                        <a:defRPr/>
+                      </a:pPr>
+                      <a:r>
+                        <a:rPr lang="en-US" dirty="0"/>
+                        <a:t>1.8 M</a:t>
+                      </a:r>
+                    </a:p>
+                    <a:p>
+                      <a:endParaRPr lang="en-US" dirty="0"/>
+                    </a:p>
+                  </a:txBody>
+                  <a:tcPr/>
+                </a:tc>
+                <a:tc>
+                  <a:txBody>
+                    <a:bodyPr/>
+                    <a:lstStyle/>
+                    <a:p>
+                      <a:pPr marL="0" marR="0" lvl="0" indent="0" algn="l" defTabSz="914400" rtl="0" eaLnBrk="1" fontAlgn="auto" latinLnBrk="0" hangingPunct="1">
+                        <a:lnSpc>
+                          <a:spcPct val="100000"/>
+                        </a:lnSpc>
+                        <a:spcBef>
+                          <a:spcPts val="0"/>
+                        </a:spcBef>
+                        <a:spcAft>
+                          <a:spcPts val="0"/>
+                        </a:spcAft>
+                        <a:buClrTx/>
+                        <a:buSzTx/>
+                        <a:buFontTx/>
+                        <a:buNone/>
+                        <a:tabLst/>
+                        <a:defRPr/>
+                      </a:pPr>
+                      <a:r>
+                        <a:rPr lang="en-US" dirty="0"/>
+                        <a:t>3 month</a:t>
+                      </a:r>
+                    </a:p>
+                  </a:txBody>
+                  <a:tcPr/>
+                </a:tc>
+                <a:tc>
+                  <a:txBody>
+                    <a:bodyPr/>
+                    <a:lstStyle/>
+                    <a:p>
+                      <a:pPr marL="0" marR="0" lvl="0" indent="0" algn="l" defTabSz="914400" rtl="0" eaLnBrk="1" fontAlgn="auto" latinLnBrk="0" hangingPunct="1">
+                        <a:lnSpc>
+                          <a:spcPct val="100000"/>
+                        </a:lnSpc>
+                        <a:spcBef>
+                          <a:spcPts val="0"/>
+                        </a:spcBef>
+                        <a:spcAft>
+                          <a:spcPts val="0"/>
+                        </a:spcAft>
+                        <a:buClrTx/>
+                        <a:buSzTx/>
+                        <a:buFontTx/>
+                        <a:buNone/>
+                        <a:tabLst/>
+                        <a:defRPr/>
+                      </a:pPr>
+                      <a:r>
+                        <a:rPr lang="en-US" dirty="0"/>
+                        <a:t>Commission record</a:t>
+                      </a:r>
+                    </a:p>
+                    <a:p>
+                      <a:endParaRPr lang="en-US" dirty="0"/>
+                    </a:p>
+                  </a:txBody>
+                  <a:tcPr/>
+                </a:tc>
+                <a:extLst>
+                  <a:ext uri="{0D108BD9-81ED-4DB2-BD59-A6C34878D82A}">
+                    <a16:rowId xmlns:a16="http://schemas.microsoft.com/office/drawing/2014/main" val="3145211471"/>
+                  </a:ext>
+                </a:extLst>
+              </a:tr>
+              <a:tr h="370840">
+                <a:tc>
+                  <a:txBody>
+                    <a:bodyPr/>
+                    <a:lstStyle/>
+                    <a:p>
+                      <a:endParaRPr lang="en-US" dirty="0"/>
+                    </a:p>
+                  </a:txBody>
+                  <a:tcPr>
+                    <a:solidFill>
+                      <a:schemeClr val="accent6">
+                        <a:lumMod val="60000"/>
+                        <a:lumOff val="40000"/>
+                      </a:schemeClr>
+                    </a:solidFill>
+                  </a:tcPr>
+                </a:tc>
+                <a:tc>
+                  <a:txBody>
+                    <a:bodyPr/>
+                    <a:lstStyle/>
+                    <a:p>
+                      <a:pPr marL="0" marR="0">
+                        <a:lnSpc>
+                          <a:spcPct val="150000"/>
+                        </a:lnSpc>
+                        <a:buNone/>
+                      </a:pPr>
+                      <a:r>
+                        <a:rPr lang="en-US" sz="1600" b="1" kern="100" dirty="0" err="1">
+                          <a:solidFill>
+                            <a:schemeClr val="bg1"/>
+                          </a:solidFill>
+                          <a:effectLst/>
+                        </a:rPr>
+                        <a:t>yps_integration</a:t>
+                      </a:r>
+                      <a:endParaRPr lang="en-US" sz="1600" b="1" kern="100" dirty="0">
+                        <a:solidFill>
+                          <a:schemeClr val="bg1"/>
+                        </a:solidFill>
+                        <a:effectLst/>
+                        <a:latin typeface="Times New Roman" panose="02020603050405020304" pitchFamily="18" charset="0"/>
+                        <a:ea typeface="Times New Roman" panose="02020603050405020304" pitchFamily="18" charset="0"/>
+                        <a:cs typeface="Times New Roman" panose="02020603050405020304" pitchFamily="18" charset="0"/>
+                      </a:endParaRPr>
+                    </a:p>
+                  </a:txBody>
+                  <a:tcPr marL="68580" marR="68580" marT="0" marB="0" anchor="ctr">
+                    <a:solidFill>
+                      <a:schemeClr val="bg1">
+                        <a:lumMod val="65000"/>
+                      </a:schemeClr>
+                    </a:solidFill>
+                  </a:tcPr>
+                </a:tc>
+                <a:tc>
+                  <a:txBody>
+                    <a:bodyPr/>
+                    <a:lstStyle/>
+                    <a:p>
+                      <a:pPr marL="0" marR="0" algn="r">
+                        <a:lnSpc>
+                          <a:spcPct val="150000"/>
+                        </a:lnSpc>
+                        <a:buNone/>
+                      </a:pPr>
+                      <a:r>
+                        <a:rPr lang="en-US" sz="1800" b="1" kern="100" dirty="0">
+                          <a:effectLst/>
+                        </a:rPr>
+                        <a:t>51,677</a:t>
+                      </a:r>
+                      <a:endParaRPr lang="en-US" sz="1800" b="1" kern="100" dirty="0">
                         <a:effectLst/>
                         <a:latin typeface="Times New Roman" panose="02020603050405020304" pitchFamily="18" charset="0"/>
                         <a:ea typeface="Times New Roman" panose="02020603050405020304" pitchFamily="18" charset="0"/>
@@ -4852,7 +6095,27 @@
                     <a:bodyPr/>
                     <a:lstStyle/>
                     <a:p>
-                      <a:endParaRPr lang="en-US"/>
+                      <a:pPr marL="0" marR="0" lvl="0" indent="0" algn="l" defTabSz="914400" rtl="0" eaLnBrk="1" fontAlgn="auto" latinLnBrk="0" hangingPunct="1">
+                        <a:lnSpc>
+                          <a:spcPct val="100000"/>
+                        </a:lnSpc>
+                        <a:spcBef>
+                          <a:spcPts val="0"/>
+                        </a:spcBef>
+                        <a:spcAft>
+                          <a:spcPts val="0"/>
+                        </a:spcAft>
+                        <a:buClrTx/>
+                        <a:buSzTx/>
+                        <a:buFontTx/>
+                        <a:buNone/>
+                        <a:tabLst/>
+                        <a:defRPr/>
+                      </a:pPr>
+                      <a:r>
+                        <a:rPr lang="en-US" dirty="0"/>
+                        <a:t>3 month</a:t>
+                      </a:r>
                     </a:p>
                   </a:txBody>
                   <a:tcPr/>
@@ -4862,14 +6125,17 @@
                     <a:bodyPr/>
                     <a:lstStyle/>
                     <a:p>
-                      <a:endParaRPr lang="en-US"/>
+                      <a:r>
+                        <a:rPr lang="en-US" dirty="0"/>
+                        <a:t>YPS Entry</a:t>
+                      </a:r>
                     </a:p>
                   </a:txBody>
                   <a:tcPr/>
                 </a:tc>
                 <a:extLst>
                   <a:ext uri="{0D108BD9-81ED-4DB2-BD59-A6C34878D82A}">
-                    <a16:rowId xmlns:a16="http://schemas.microsoft.com/office/drawing/2014/main" val="3421293376"/>
+                    <a16:rowId xmlns:a16="http://schemas.microsoft.com/office/drawing/2014/main" val="1130528783"/>
                   </a:ext>
                 </a:extLst>
               </a:tr>
@@ -4879,10 +6145,17 @@
                     <a:bodyPr/>
                     <a:lstStyle/>
                     <a:p>
-                      <a:endParaRPr lang="en-US"/>
+                      <a:endParaRPr lang="en-US" dirty="0"/>
                     </a:p>
                   </a:txBody>
-                  <a:tcPr/>
+                  <a:tcPr>
+                    <a:solidFill>
+                      <a:schemeClr val="accent6">
+                        <a:lumMod val="60000"/>
+                        <a:lumOff val="40000"/>
+                      </a:schemeClr>
+                    </a:solidFill>
+                  </a:tcPr>
                 </a:tc>
                 <a:tc>
                   <a:txBody>
@@ -4896,12 +6169,49 @@
                         <a:buNone/>
                       </a:pPr>
                       <a:r>
-                        <a:rPr lang="en-US" sz="1100" kern="100">
+                        <a:rPr lang="en-US" sz="1600" b="1" kern="100" dirty="0" err="1">
+                          <a:solidFill>
+                            <a:schemeClr val="bg1"/>
+                          </a:solidFill>
                           <a:effectLst/>
                         </a:rPr>
-                        <a:t>yps_integration</a:t>
+                        <a:t>integration_history</a:t>
                       </a:r>
-                      <a:endParaRPr lang="en-US" sz="1200" kern="100">
+                      <a:endParaRPr lang="en-US" sz="1600" b="1" kern="100" dirty="0">
+                        <a:solidFill>
+                          <a:schemeClr val="bg1"/>
+                        </a:solidFill>
+                        <a:effectLst/>
+                        <a:latin typeface="Times New Roman" panose="02020603050405020304" pitchFamily="18" charset="0"/>
+                        <a:ea typeface="Times New Roman" panose="02020603050405020304" pitchFamily="18" charset="0"/>
+                        <a:cs typeface="Times New Roman" panose="02020603050405020304" pitchFamily="18" charset="0"/>
+                      </a:endParaRPr>
+                    </a:p>
+                  </a:txBody>
+                  <a:tcPr marL="68580" marR="68580" marT="0" marB="0" anchor="ctr">
+                    <a:solidFill>
+                      <a:srgbClr val="FF0000"/>
+                    </a:solidFill>
+                  </a:tcPr>
+                </a:tc>
+                <a:tc>
+                  <a:txBody>
+                    <a:bodyPr/>
+                    <a:lstStyle/>
+                    <a:p>
+                      <a:pPr marL="0" marR="0" algn="r">
+                        <a:lnSpc>
+                          <a:spcPct val="150000"/>
+                        </a:lnSpc>
+                        <a:buNone/>
+                      </a:pPr>
+                      <a:r>
+                        <a:rPr lang="en-US" sz="1800" b="1" kern="100" dirty="0">
+                          <a:effectLst/>
+                        </a:rPr>
+                        <a:t>6,887,279</a:t>
+                      </a:r>
+                      <a:endParaRPr lang="en-US" sz="1800" b="1" kern="100" dirty="0">
                         <a:effectLst/>
                         <a:latin typeface="Times New Roman" panose="02020603050405020304" pitchFamily="18" charset="0"/>
                         <a:ea typeface="Times New Roman" panose="02020603050405020304" pitchFamily="18" charset="0"/>
@@ -4916,6 +6226,131 @@
                     <a:bodyPr/>
                     <a:lstStyle/>
                     <a:p>
+                      <a:pPr marL="0" marR="0" lvl="0" indent="0" algn="l" defTabSz="914400" rtl="0" eaLnBrk="1" fontAlgn="auto" latinLnBrk="0" hangingPunct="1">
+                        <a:lnSpc>
+                          <a:spcPct val="100000"/>
+                        </a:lnSpc>
+                        <a:spcBef>
+                          <a:spcPts val="0"/>
+                        </a:spcBef>
+                        <a:spcAft>
+                          <a:spcPts val="0"/>
+                        </a:spcAft>
+                        <a:buClrTx/>
+                        <a:buSzTx/>
+                        <a:buFontTx/>
+                        <a:buNone/>
+                        <a:tabLst/>
+                        <a:defRPr/>
+                      </a:pPr>
+                      <a:r>
+                        <a:rPr lang="en-US" dirty="0"/>
+                        <a:t>1.5 M</a:t>
+                      </a:r>
+                    </a:p>
+                  </a:txBody>
+                  <a:tcPr/>
+                </a:tc>
+                <a:tc>
+                  <a:txBody>
+                    <a:bodyPr/>
+                    <a:lstStyle/>
+                    <a:p>
+                      <a:r>
+                        <a:rPr lang="en-US" dirty="0"/>
+                        <a:t>3 month</a:t>
+                      </a:r>
+                    </a:p>
+                  </a:txBody>
+                  <a:tcPr/>
+                </a:tc>
+                <a:tc>
+                  <a:txBody>
+                    <a:bodyPr/>
+                    <a:lstStyle/>
+                    <a:p>
+                      <a:r>
+                        <a:rPr lang="en-US" dirty="0"/>
+                        <a:t>G&amp;G </a:t>
+                      </a:r>
+                      <a:r>
+                        <a:rPr lang="en-US" dirty="0" err="1"/>
+                        <a:t>Eservice</a:t>
+                      </a:r>
+                      <a:r>
+                        <a:rPr lang="en-US" dirty="0"/>
+                        <a:t> Entry</a:t>
+                      </a:r>
+                    </a:p>
+                  </a:txBody>
+                  <a:tcPr/>
+                </a:tc>
+                <a:extLst>
+                  <a:ext uri="{0D108BD9-81ED-4DB2-BD59-A6C34878D82A}">
+                    <a16:rowId xmlns:a16="http://schemas.microsoft.com/office/drawing/2014/main" val="702431370"/>
+                  </a:ext>
+                </a:extLst>
+              </a:tr>
+              <a:tr h="370840">
+                <a:tc>
+                  <a:txBody>
+                    <a:bodyPr/>
+                    <a:lstStyle/>
+                    <a:p>
+                      <a:endParaRPr lang="en-US" dirty="0"/>
+                    </a:p>
+                  </a:txBody>
+                  <a:tcPr>
+                    <a:solidFill>
+                      <a:schemeClr val="accent6">
+                        <a:lumMod val="60000"/>
+                        <a:lumOff val="40000"/>
+                      </a:schemeClr>
+                    </a:solidFill>
+                  </a:tcPr>
+                </a:tc>
+                <a:tc>
+                  <a:txBody>
+                    <a:bodyPr/>
+                    <a:lstStyle/>
+                    <a:p>
+                      <a:pPr marL="0" marR="0">
+                        <a:lnSpc>
+                          <a:spcPct val="150000"/>
+                        </a:lnSpc>
+                        <a:buNone/>
+                      </a:pPr>
+                      <a:r>
+                        <a:rPr lang="en-US" sz="1600" b="1" kern="100" dirty="0" err="1">
+                          <a:solidFill>
+                            <a:schemeClr val="bg1"/>
+                          </a:solidFill>
+                          <a:effectLst/>
+                        </a:rPr>
+                        <a:t>re_print</a:t>
+                      </a:r>
+                      <a:endParaRPr lang="en-US" sz="1600" b="1" kern="100" dirty="0">
+                        <a:solidFill>
+                          <a:schemeClr val="bg1"/>
+                        </a:solidFill>
+                        <a:effectLst/>
+                        <a:latin typeface="Times New Roman" panose="02020603050405020304" pitchFamily="18" charset="0"/>
+                        <a:ea typeface="Times New Roman" panose="02020603050405020304" pitchFamily="18" charset="0"/>
+                        <a:cs typeface="Times New Roman" panose="02020603050405020304" pitchFamily="18" charset="0"/>
+                      </a:endParaRPr>
+                    </a:p>
+                  </a:txBody>
+                  <a:tcPr marL="68580" marR="68580" marT="0" marB="0" anchor="ctr">
+                    <a:solidFill>
+                      <a:srgbClr val="FF0000"/>
+                    </a:solidFill>
+                  </a:tcPr>
+                </a:tc>
+                <a:tc>
+                  <a:txBody>
+                    <a:bodyPr/>
+                    <a:lstStyle/>
+                    <a:p>
                       <a:pPr marL="0" marR="0" algn="r">
                         <a:lnSpc>
                           <a:spcPct val="150000"/>
@@ -4923,12 +6358,452 @@
                         <a:buNone/>
                       </a:pPr>
                       <a:r>
-                        <a:rPr lang="en-US" sz="1100" kern="100">
+                        <a:rPr lang="en-US" sz="1800" b="1" kern="100" dirty="0">
                           <a:effectLst/>
                         </a:rPr>
-                        <a:t>51677</a:t>
+                        <a:t>6,655,344</a:t>
                       </a:r>
-                      <a:endParaRPr lang="en-US" sz="1200" kern="100">
+                      <a:endParaRPr lang="en-US" sz="1800" b="1" kern="100" dirty="0">
+                        <a:effectLst/>
+                        <a:latin typeface="Times New Roman" panose="02020603050405020304" pitchFamily="18" charset="0"/>
+                        <a:ea typeface="Times New Roman" panose="02020603050405020304" pitchFamily="18" charset="0"/>
+                        <a:cs typeface="Times New Roman" panose="02020603050405020304" pitchFamily="18" charset="0"/>
+                      </a:endParaRPr>
+                    </a:p>
+                  </a:txBody>
+                  <a:tcPr marL="68580" marR="68580" marT="0" marB="0" anchor="ctr"/>
+                </a:tc>
+                <a:tc>
+                  <a:txBody>
+                    <a:bodyPr/>
+                    <a:lstStyle/>
+                    <a:p>
+                      <a:pPr marL="0" marR="0" lvl="0" indent="0" algn="l" defTabSz="914400" rtl="0" eaLnBrk="1" fontAlgn="auto" latinLnBrk="0" hangingPunct="1">
+                        <a:lnSpc>
+                          <a:spcPct val="100000"/>
+                        </a:lnSpc>
+                        <a:spcBef>
+                          <a:spcPts val="0"/>
+                        </a:spcBef>
+                        <a:spcAft>
+                          <a:spcPts val="0"/>
+                        </a:spcAft>
+                        <a:buClrTx/>
+                        <a:buSzTx/>
+                        <a:buFontTx/>
+                        <a:buNone/>
+                        <a:tabLst/>
+                        <a:defRPr/>
+                      </a:pPr>
+                      <a:r>
+                        <a:rPr lang="en-US" dirty="0"/>
+                        <a:t>1.4 M</a:t>
+                      </a:r>
+                    </a:p>
+                  </a:txBody>
+                  <a:tcPr/>
+                </a:tc>
+                <a:tc>
+                  <a:txBody>
+                    <a:bodyPr/>
+                    <a:lstStyle/>
+                    <a:p>
+                      <a:r>
+                        <a:rPr lang="en-US" dirty="0"/>
+                        <a:t>1 month</a:t>
+                      </a:r>
+                    </a:p>
+                  </a:txBody>
+                  <a:tcPr/>
+                </a:tc>
+                <a:tc>
+                  <a:txBody>
+                    <a:bodyPr/>
+                    <a:lstStyle/>
+                    <a:p>
+                      <a:r>
+                        <a:rPr lang="en-US" dirty="0"/>
+                        <a:t>Print</a:t>
+                      </a:r>
+                    </a:p>
+                  </a:txBody>
+                  <a:tcPr/>
+                </a:tc>
+                <a:extLst>
+                  <a:ext uri="{0D108BD9-81ED-4DB2-BD59-A6C34878D82A}">
+                    <a16:rowId xmlns:a16="http://schemas.microsoft.com/office/drawing/2014/main" val="1002451943"/>
+                  </a:ext>
+                </a:extLst>
+              </a:tr>
+              <a:tr h="360689">
+                <a:tc>
+                  <a:txBody>
+                    <a:bodyPr/>
+                    <a:lstStyle/>
+                    <a:p>
+                      <a:endParaRPr lang="en-US" dirty="0"/>
+                    </a:p>
+                  </a:txBody>
+                  <a:tcPr>
+                    <a:solidFill>
+                      <a:schemeClr val="accent6">
+                        <a:lumMod val="60000"/>
+                        <a:lumOff val="40000"/>
+                      </a:schemeClr>
+                    </a:solidFill>
+                  </a:tcPr>
+                </a:tc>
+                <a:tc>
+                  <a:txBody>
+                    <a:bodyPr/>
+                    <a:lstStyle/>
+                    <a:p>
+                      <a:pPr marL="0" marR="0">
+                        <a:lnSpc>
+                          <a:spcPct val="150000"/>
+                        </a:lnSpc>
+                        <a:buNone/>
+                      </a:pPr>
+                      <a:r>
+                        <a:rPr lang="en-US" sz="1600" b="1" kern="100" dirty="0" err="1">
+                          <a:solidFill>
+                            <a:schemeClr val="bg1"/>
+                          </a:solidFill>
+                          <a:effectLst/>
+                        </a:rPr>
+                        <a:t>prefunding_log</a:t>
+                      </a:r>
+                      <a:endParaRPr lang="en-US" sz="1600" b="1" kern="100" dirty="0">
+                        <a:solidFill>
+                          <a:schemeClr val="bg1"/>
+                        </a:solidFill>
+                        <a:effectLst/>
+                        <a:latin typeface="Times New Roman" panose="02020603050405020304" pitchFamily="18" charset="0"/>
+                        <a:ea typeface="Times New Roman" panose="02020603050405020304" pitchFamily="18" charset="0"/>
+                        <a:cs typeface="Times New Roman" panose="02020603050405020304" pitchFamily="18" charset="0"/>
+                      </a:endParaRPr>
+                    </a:p>
+                  </a:txBody>
+                  <a:tcPr marL="68580" marR="68580" marT="0" marB="0" anchor="ctr">
+                    <a:solidFill>
+                      <a:srgbClr val="FF0000"/>
+                    </a:solidFill>
+                  </a:tcPr>
+                </a:tc>
+                <a:tc>
+                  <a:txBody>
+                    <a:bodyPr/>
+                    <a:lstStyle/>
+                    <a:p>
+                      <a:pPr marL="0" marR="0" algn="r">
+                        <a:lnSpc>
+                          <a:spcPct val="150000"/>
+                        </a:lnSpc>
+                        <a:buNone/>
+                      </a:pPr>
+                      <a:r>
+                        <a:rPr lang="en-US" sz="1800" b="1" kern="100" dirty="0">
+                          <a:effectLst/>
+                        </a:rPr>
+                        <a:t>1,649,836</a:t>
+                      </a:r>
+                      <a:endParaRPr lang="en-US" sz="1800" b="1" kern="100" dirty="0">
+                        <a:effectLst/>
+                        <a:latin typeface="Times New Roman" panose="02020603050405020304" pitchFamily="18" charset="0"/>
+                        <a:ea typeface="Times New Roman" panose="02020603050405020304" pitchFamily="18" charset="0"/>
+                        <a:cs typeface="Times New Roman" panose="02020603050405020304" pitchFamily="18" charset="0"/>
+                      </a:endParaRPr>
+                    </a:p>
+                  </a:txBody>
+                  <a:tcPr marL="68580" marR="68580" marT="0" marB="0" anchor="ctr"/>
+                </a:tc>
+                <a:tc>
+                  <a:txBody>
+                    <a:bodyPr/>
+                    <a:lstStyle/>
+                    <a:p>
+                      <a:r>
+                        <a:rPr lang="en-US" dirty="0"/>
+                        <a:t>516 K</a:t>
+                      </a:r>
+                    </a:p>
+                  </a:txBody>
+                  <a:tcPr/>
+                </a:tc>
+                <a:tc>
+                  <a:txBody>
+                    <a:bodyPr/>
+                    <a:lstStyle/>
+                    <a:p>
+                      <a:pPr marL="0" marR="0" lvl="0" indent="0" algn="l" defTabSz="914400" rtl="0" eaLnBrk="1" fontAlgn="auto" latinLnBrk="0" hangingPunct="1">
+                        <a:lnSpc>
+                          <a:spcPct val="100000"/>
+                        </a:lnSpc>
+                        <a:spcBef>
+                          <a:spcPts val="0"/>
+                        </a:spcBef>
+                        <a:spcAft>
+                          <a:spcPts val="0"/>
+                        </a:spcAft>
+                        <a:buClrTx/>
+                        <a:buSzTx/>
+                        <a:buFontTx/>
+                        <a:buNone/>
+                        <a:tabLst/>
+                        <a:defRPr/>
+                      </a:pPr>
+                      <a:r>
+                        <a:rPr lang="en-US" dirty="0"/>
+                        <a:t>3 month</a:t>
+                      </a:r>
+                    </a:p>
+                  </a:txBody>
+                  <a:tcPr/>
+                </a:tc>
+                <a:tc>
+                  <a:txBody>
+                    <a:bodyPr/>
+                    <a:lstStyle/>
+                    <a:p>
+                      <a:r>
+                        <a:rPr lang="en-US" dirty="0"/>
+                        <a:t>prefunding</a:t>
+                      </a:r>
+                    </a:p>
+                  </a:txBody>
+                  <a:tcPr/>
+                </a:tc>
+                <a:extLst>
+                  <a:ext uri="{0D108BD9-81ED-4DB2-BD59-A6C34878D82A}">
+                    <a16:rowId xmlns:a16="http://schemas.microsoft.com/office/drawing/2014/main" val="2473324404"/>
+                  </a:ext>
+                </a:extLst>
+              </a:tr>
+              <a:tr h="370840">
+                <a:tc>
+                  <a:txBody>
+                    <a:bodyPr/>
+                    <a:lstStyle/>
+                    <a:p>
+                      <a:endParaRPr lang="en-US" dirty="0"/>
+                    </a:p>
+                  </a:txBody>
+                  <a:tcPr>
+                    <a:solidFill>
+                      <a:schemeClr val="accent6">
+                        <a:lumMod val="60000"/>
+                        <a:lumOff val="40000"/>
+                      </a:schemeClr>
+                    </a:solidFill>
+                  </a:tcPr>
+                </a:tc>
+                <a:tc>
+                  <a:txBody>
+                    <a:bodyPr/>
+                    <a:lstStyle/>
+                    <a:p>
+                      <a:pPr marL="0" marR="0">
+                        <a:lnSpc>
+                          <a:spcPct val="150000"/>
+                        </a:lnSpc>
+                        <a:buNone/>
+                      </a:pPr>
+                      <a:r>
+                        <a:rPr lang="en-US" sz="1600" b="1" kern="100" dirty="0" err="1">
+                          <a:solidFill>
+                            <a:schemeClr val="bg1"/>
+                          </a:solidFill>
+                          <a:effectLst/>
+                        </a:rPr>
+                        <a:t>work_shift_action</a:t>
+                      </a:r>
+                      <a:endParaRPr lang="en-US" sz="1600" b="1" kern="100" dirty="0">
+                        <a:solidFill>
+                          <a:schemeClr val="bg1"/>
+                        </a:solidFill>
+                        <a:effectLst/>
+                        <a:latin typeface="Times New Roman" panose="02020603050405020304" pitchFamily="18" charset="0"/>
+                        <a:ea typeface="Times New Roman" panose="02020603050405020304" pitchFamily="18" charset="0"/>
+                        <a:cs typeface="Times New Roman" panose="02020603050405020304" pitchFamily="18" charset="0"/>
+                      </a:endParaRPr>
+                    </a:p>
+                  </a:txBody>
+                  <a:tcPr marL="68580" marR="68580" marT="0" marB="0" anchor="ctr">
+                    <a:solidFill>
+                      <a:schemeClr val="accent6">
+                        <a:lumMod val="60000"/>
+                        <a:lumOff val="40000"/>
+                      </a:schemeClr>
+                    </a:solidFill>
+                  </a:tcPr>
+                </a:tc>
+                <a:tc>
+                  <a:txBody>
+                    <a:bodyPr/>
+                    <a:lstStyle/>
+                    <a:p>
+                      <a:pPr marL="0" marR="0" algn="r">
+                        <a:lnSpc>
+                          <a:spcPct val="150000"/>
+                        </a:lnSpc>
+                        <a:buNone/>
+                      </a:pPr>
+                      <a:r>
+                        <a:rPr lang="en-US" sz="1800" b="1" kern="100" dirty="0">
+                          <a:effectLst/>
+                        </a:rPr>
+                        <a:t>596,665</a:t>
+                      </a:r>
+                      <a:endParaRPr lang="en-US" sz="1800" b="1" kern="100" dirty="0">
+                        <a:effectLst/>
+                        <a:latin typeface="Times New Roman" panose="02020603050405020304" pitchFamily="18" charset="0"/>
+                        <a:ea typeface="Times New Roman" panose="02020603050405020304" pitchFamily="18" charset="0"/>
+                        <a:cs typeface="Times New Roman" panose="02020603050405020304" pitchFamily="18" charset="0"/>
+                      </a:endParaRPr>
+                    </a:p>
+                  </a:txBody>
+                  <a:tcPr marL="68580" marR="68580" marT="0" marB="0" anchor="ctr"/>
+                </a:tc>
+                <a:tc>
+                  <a:txBody>
+                    <a:bodyPr/>
+                    <a:lstStyle/>
+                    <a:p>
+                      <a:pPr marL="0" marR="0" lvl="0" indent="0" algn="l" defTabSz="914400" rtl="0" eaLnBrk="1" fontAlgn="auto" latinLnBrk="0" hangingPunct="1">
+                        <a:lnSpc>
+                          <a:spcPct val="100000"/>
+                        </a:lnSpc>
+                        <a:spcBef>
+                          <a:spcPts val="0"/>
+                        </a:spcBef>
+                        <a:spcAft>
+                          <a:spcPts val="0"/>
+                        </a:spcAft>
+                        <a:buClrTx/>
+                        <a:buSzTx/>
+                        <a:buFontTx/>
+                        <a:buNone/>
+                        <a:tabLst/>
+                        <a:defRPr/>
+                      </a:pPr>
+                      <a:r>
+                        <a:rPr lang="en-US" dirty="0"/>
+                        <a:t>100 K</a:t>
+                      </a:r>
+                    </a:p>
+                  </a:txBody>
+                  <a:tcPr/>
+                </a:tc>
+                <a:tc>
+                  <a:txBody>
+                    <a:bodyPr/>
+                    <a:lstStyle/>
+                    <a:p>
+                      <a:r>
+                        <a:rPr lang="en-US" dirty="0"/>
+                        <a:t>2 month</a:t>
+                      </a:r>
+                    </a:p>
+                  </a:txBody>
+                  <a:tcPr/>
+                </a:tc>
+                <a:tc>
+                  <a:txBody>
+                    <a:bodyPr/>
+                    <a:lstStyle/>
+                    <a:p>
+                      <a:r>
+                        <a:rPr lang="en-US" dirty="0" err="1"/>
+                        <a:t>Workshift</a:t>
+                      </a:r>
+                      <a:r>
+                        <a:rPr lang="en-US" dirty="0"/>
+                        <a:t> info</a:t>
+                      </a:r>
+                    </a:p>
+                  </a:txBody>
+                  <a:tcPr/>
+                </a:tc>
+                <a:extLst>
+                  <a:ext uri="{0D108BD9-81ED-4DB2-BD59-A6C34878D82A}">
+                    <a16:rowId xmlns:a16="http://schemas.microsoft.com/office/drawing/2014/main" val="3270587433"/>
+                  </a:ext>
+                </a:extLst>
+              </a:tr>
+              <a:tr h="370840">
+                <a:tc>
+                  <a:txBody>
+                    <a:bodyPr/>
+                    <a:lstStyle/>
+                    <a:p>
+                      <a:endParaRPr lang="en-US" dirty="0"/>
+                    </a:p>
+                  </a:txBody>
+                  <a:tcPr>
+                    <a:solidFill>
+                      <a:schemeClr val="bg1">
+                        <a:lumMod val="65000"/>
+                      </a:schemeClr>
+                    </a:solidFill>
+                  </a:tcPr>
+                </a:tc>
+                <a:tc>
+                  <a:txBody>
+                    <a:bodyPr/>
+                    <a:lstStyle/>
+                    <a:p>
+                      <a:pPr marL="0" marR="0">
+                        <a:lnSpc>
+                          <a:spcPct val="150000"/>
+                        </a:lnSpc>
+                        <a:buNone/>
+                      </a:pPr>
+                      <a:r>
+                        <a:rPr lang="en-US" sz="1600" b="1" kern="100" dirty="0" err="1">
+                          <a:solidFill>
+                            <a:schemeClr val="bg1"/>
+                          </a:solidFill>
+                          <a:effectLst/>
+                        </a:rPr>
+                        <a:t>revinfo</a:t>
+                      </a:r>
+                      <a:endParaRPr lang="en-US" sz="1600" b="1" kern="100" dirty="0">
+                        <a:solidFill>
+                          <a:schemeClr val="bg1"/>
+                        </a:solidFill>
+                        <a:effectLst/>
+                        <a:latin typeface="Times New Roman" panose="02020603050405020304" pitchFamily="18" charset="0"/>
+                        <a:ea typeface="Times New Roman" panose="02020603050405020304" pitchFamily="18" charset="0"/>
+                        <a:cs typeface="Times New Roman" panose="02020603050405020304" pitchFamily="18" charset="0"/>
+                      </a:endParaRPr>
+                    </a:p>
+                  </a:txBody>
+                  <a:tcPr marL="68580" marR="68580" marT="0" marB="0" anchor="ctr">
+                    <a:solidFill>
+                      <a:schemeClr val="bg1">
+                        <a:lumMod val="65000"/>
+                      </a:schemeClr>
+                    </a:solidFill>
+                  </a:tcPr>
+                </a:tc>
+                <a:tc>
+                  <a:txBody>
+                    <a:bodyPr/>
+                    <a:lstStyle/>
+                    <a:p>
+                      <a:pPr marL="0" marR="0" algn="r">
+                        <a:lnSpc>
+                          <a:spcPct val="150000"/>
+                        </a:lnSpc>
+                        <a:buNone/>
+                      </a:pPr>
+                      <a:r>
+                        <a:rPr lang="en-US" sz="1800" b="1" kern="100" dirty="0">
+                          <a:effectLst/>
+                        </a:rPr>
+                        <a:t>12,0760</a:t>
+                      </a:r>
+                      <a:endParaRPr lang="en-US" sz="1800" b="1" kern="100" dirty="0">
                         <a:effectLst/>
                         <a:latin typeface="Times New Roman" panose="02020603050405020304" pitchFamily="18" charset="0"/>
                         <a:ea typeface="Times New Roman" panose="02020603050405020304" pitchFamily="18" charset="0"/>
@@ -4953,613 +6828,27 @@
                     <a:bodyPr/>
                     <a:lstStyle/>
                     <a:p>
-                      <a:endParaRPr lang="en-US"/>
-                    </a:p>
-                  </a:txBody>
-                  <a:tcPr/>
-                </a:tc>
-                <a:tc>
-                  <a:txBody>
-                    <a:bodyPr/>
-                    <a:lstStyle/>
-                    <a:p>
-                      <a:endParaRPr lang="en-US"/>
-                    </a:p>
-                  </a:txBody>
-                  <a:tcPr/>
-                </a:tc>
-                <a:extLst>
-                  <a:ext uri="{0D108BD9-81ED-4DB2-BD59-A6C34878D82A}">
-                    <a16:rowId xmlns:a16="http://schemas.microsoft.com/office/drawing/2014/main" val="1130528783"/>
-                  </a:ext>
-                </a:extLst>
-              </a:tr>
-              <a:tr h="370840">
-                <a:tc>
-                  <a:txBody>
-                    <a:bodyPr/>
-                    <a:lstStyle/>
-                    <a:p>
-                      <a:endParaRPr lang="en-US" dirty="0"/>
-                    </a:p>
-                  </a:txBody>
-                  <a:tcPr/>
-                </a:tc>
-                <a:tc>
-                  <a:txBody>
-                    <a:bodyPr/>
-                    <a:lstStyle/>
-                    <a:p>
-                      <a:pPr marL="0" marR="0">
+                      <a:pPr marL="0" marR="0" lvl="0" indent="0" algn="l" defTabSz="914400" rtl="0" eaLnBrk="1" fontAlgn="auto" latinLnBrk="0" hangingPunct="1">
                         <a:lnSpc>
-                          <a:spcPct val="150000"/>
+                          <a:spcPct val="100000"/>
                         </a:lnSpc>
+                        <a:spcBef>
+                          <a:spcPts val="0"/>
+                        </a:spcBef>
+                        <a:spcAft>
+                          <a:spcPts val="0"/>
+                        </a:spcAft>
+                        <a:buClrTx/>
+                        <a:buSzTx/>
+                        <a:buFontTx/>
                         <a:buNone/>
+                        <a:tabLst/>
+                        <a:defRPr/>
                       </a:pPr>
                       <a:r>
-                        <a:rPr lang="en-US" sz="1100" kern="100">
-                          <a:effectLst/>
-                        </a:rPr>
-                        <a:t>integration_history</a:t>
+                        <a:rPr lang="en-US" dirty="0"/>
+                        <a:t>2 month</a:t>
                       </a:r>
-                      <a:endParaRPr lang="en-US" sz="1200" kern="100">
-                        <a:effectLst/>
-                        <a:latin typeface="Times New Roman" panose="02020603050405020304" pitchFamily="18" charset="0"/>
-                        <a:ea typeface="Times New Roman" panose="02020603050405020304" pitchFamily="18" charset="0"/>
-                        <a:cs typeface="Times New Roman" panose="02020603050405020304" pitchFamily="18" charset="0"/>
-                      </a:endParaRPr>
-                    </a:p>
-                  </a:txBody>
-                  <a:tcPr marL="68580" marR="68580" marT="0" marB="0" anchor="ctr"/>
-                </a:tc>
-                <a:tc>
-                  <a:txBody>
-                    <a:bodyPr/>
-                    <a:lstStyle/>
-                    <a:p>
-                      <a:pPr marL="0" marR="0" algn="r">
-                        <a:lnSpc>
-                          <a:spcPct val="150000"/>
-                        </a:lnSpc>
-                        <a:buNone/>
-                      </a:pPr>
-                      <a:r>
-                        <a:rPr lang="en-US" sz="1100" kern="100">
-                          <a:effectLst/>
-                        </a:rPr>
-                        <a:t>6887279</a:t>
-                      </a:r>
-                      <a:endParaRPr lang="en-US" sz="1200" kern="100">
-                        <a:effectLst/>
-                        <a:latin typeface="Times New Roman" panose="02020603050405020304" pitchFamily="18" charset="0"/>
-                        <a:ea typeface="Times New Roman" panose="02020603050405020304" pitchFamily="18" charset="0"/>
-                        <a:cs typeface="Times New Roman" panose="02020603050405020304" pitchFamily="18" charset="0"/>
-                      </a:endParaRPr>
-                    </a:p>
-                  </a:txBody>
-                  <a:tcPr marL="68580" marR="68580" marT="0" marB="0" anchor="ctr"/>
-                </a:tc>
-                <a:tc>
-                  <a:txBody>
-                    <a:bodyPr/>
-                    <a:lstStyle/>
-                    <a:p>
-                      <a:endParaRPr lang="en-US"/>
-                    </a:p>
-                  </a:txBody>
-                  <a:tcPr/>
-                </a:tc>
-                <a:tc>
-                  <a:txBody>
-                    <a:bodyPr/>
-                    <a:lstStyle/>
-                    <a:p>
-                      <a:endParaRPr lang="en-US"/>
-                    </a:p>
-                  </a:txBody>
-                  <a:tcPr/>
-                </a:tc>
-                <a:tc>
-                  <a:txBody>
-                    <a:bodyPr/>
-                    <a:lstStyle/>
-                    <a:p>
-                      <a:endParaRPr lang="en-US"/>
-                    </a:p>
-                  </a:txBody>
-                  <a:tcPr/>
-                </a:tc>
-                <a:extLst>
-                  <a:ext uri="{0D108BD9-81ED-4DB2-BD59-A6C34878D82A}">
-                    <a16:rowId xmlns:a16="http://schemas.microsoft.com/office/drawing/2014/main" val="702431370"/>
-                  </a:ext>
-                </a:extLst>
-              </a:tr>
-              <a:tr h="370840">
-                <a:tc>
-                  <a:txBody>
-                    <a:bodyPr/>
-                    <a:lstStyle/>
-                    <a:p>
-                      <a:endParaRPr lang="en-US"/>
-                    </a:p>
-                  </a:txBody>
-                  <a:tcPr/>
-                </a:tc>
-                <a:tc>
-                  <a:txBody>
-                    <a:bodyPr/>
-                    <a:lstStyle/>
-                    <a:p>
-                      <a:pPr marL="0" marR="0">
-                        <a:lnSpc>
-                          <a:spcPct val="150000"/>
-                        </a:lnSpc>
-                        <a:buNone/>
-                      </a:pPr>
-                      <a:r>
-                        <a:rPr lang="en-US" sz="1100" kern="100">
-                          <a:effectLst/>
-                        </a:rPr>
-                        <a:t>commission_transaction</a:t>
-                      </a:r>
-                      <a:endParaRPr lang="en-US" sz="1200" kern="100">
-                        <a:effectLst/>
-                        <a:latin typeface="Times New Roman" panose="02020603050405020304" pitchFamily="18" charset="0"/>
-                        <a:ea typeface="Times New Roman" panose="02020603050405020304" pitchFamily="18" charset="0"/>
-                        <a:cs typeface="Times New Roman" panose="02020603050405020304" pitchFamily="18" charset="0"/>
-                      </a:endParaRPr>
-                    </a:p>
-                  </a:txBody>
-                  <a:tcPr marL="68580" marR="68580" marT="0" marB="0" anchor="ctr"/>
-                </a:tc>
-                <a:tc>
-                  <a:txBody>
-                    <a:bodyPr/>
-                    <a:lstStyle/>
-                    <a:p>
-                      <a:pPr marL="0" marR="0" algn="r">
-                        <a:lnSpc>
-                          <a:spcPct val="150000"/>
-                        </a:lnSpc>
-                        <a:buNone/>
-                      </a:pPr>
-                      <a:r>
-                        <a:rPr lang="en-US" sz="1100" kern="100" dirty="0">
-                          <a:effectLst/>
-                        </a:rPr>
-                        <a:t>7118764</a:t>
-                      </a:r>
-                      <a:endParaRPr lang="en-US" sz="1200" kern="100" dirty="0">
-                        <a:effectLst/>
-                        <a:latin typeface="Times New Roman" panose="02020603050405020304" pitchFamily="18" charset="0"/>
-                        <a:ea typeface="Times New Roman" panose="02020603050405020304" pitchFamily="18" charset="0"/>
-                        <a:cs typeface="Times New Roman" panose="02020603050405020304" pitchFamily="18" charset="0"/>
-                      </a:endParaRPr>
-                    </a:p>
-                  </a:txBody>
-                  <a:tcPr marL="68580" marR="68580" marT="0" marB="0" anchor="ctr"/>
-                </a:tc>
-                <a:tc>
-                  <a:txBody>
-                    <a:bodyPr/>
-                    <a:lstStyle/>
-                    <a:p>
-                      <a:endParaRPr lang="en-US" dirty="0"/>
-                    </a:p>
-                  </a:txBody>
-                  <a:tcPr/>
-                </a:tc>
-                <a:tc>
-                  <a:txBody>
-                    <a:bodyPr/>
-                    <a:lstStyle/>
-                    <a:p>
-                      <a:endParaRPr lang="en-US" dirty="0"/>
-                    </a:p>
-                  </a:txBody>
-                  <a:tcPr/>
-                </a:tc>
-                <a:tc>
-                  <a:txBody>
-                    <a:bodyPr/>
-                    <a:lstStyle/>
-                    <a:p>
-                      <a:endParaRPr lang="en-US" dirty="0"/>
-                    </a:p>
-                  </a:txBody>
-                  <a:tcPr/>
-                </a:tc>
-                <a:extLst>
-                  <a:ext uri="{0D108BD9-81ED-4DB2-BD59-A6C34878D82A}">
-                    <a16:rowId xmlns:a16="http://schemas.microsoft.com/office/drawing/2014/main" val="3322697540"/>
-                  </a:ext>
-                </a:extLst>
-              </a:tr>
-              <a:tr h="370840">
-                <a:tc>
-                  <a:txBody>
-                    <a:bodyPr/>
-                    <a:lstStyle/>
-                    <a:p>
-                      <a:endParaRPr lang="en-US"/>
-                    </a:p>
-                  </a:txBody>
-                  <a:tcPr/>
-                </a:tc>
-                <a:tc>
-                  <a:txBody>
-                    <a:bodyPr/>
-                    <a:lstStyle/>
-                    <a:p>
-                      <a:pPr marL="0" marR="0">
-                        <a:lnSpc>
-                          <a:spcPct val="150000"/>
-                        </a:lnSpc>
-                        <a:buNone/>
-                      </a:pPr>
-                      <a:r>
-                        <a:rPr lang="en-US" sz="1100" kern="100">
-                          <a:effectLst/>
-                        </a:rPr>
-                        <a:t>re_print</a:t>
-                      </a:r>
-                      <a:endParaRPr lang="en-US" sz="1200" kern="100">
-                        <a:effectLst/>
-                        <a:latin typeface="Times New Roman" panose="02020603050405020304" pitchFamily="18" charset="0"/>
-                        <a:ea typeface="Times New Roman" panose="02020603050405020304" pitchFamily="18" charset="0"/>
-                        <a:cs typeface="Times New Roman" panose="02020603050405020304" pitchFamily="18" charset="0"/>
-                      </a:endParaRPr>
-                    </a:p>
-                  </a:txBody>
-                  <a:tcPr marL="68580" marR="68580" marT="0" marB="0" anchor="ctr"/>
-                </a:tc>
-                <a:tc>
-                  <a:txBody>
-                    <a:bodyPr/>
-                    <a:lstStyle/>
-                    <a:p>
-                      <a:pPr marL="0" marR="0" algn="r">
-                        <a:lnSpc>
-                          <a:spcPct val="150000"/>
-                        </a:lnSpc>
-                        <a:buNone/>
-                      </a:pPr>
-                      <a:r>
-                        <a:rPr lang="en-US" sz="1100" kern="100" dirty="0">
-                          <a:effectLst/>
-                        </a:rPr>
-                        <a:t>6655344</a:t>
-                      </a:r>
-                      <a:endParaRPr lang="en-US" sz="1200" kern="100" dirty="0">
-                        <a:effectLst/>
-                        <a:latin typeface="Times New Roman" panose="02020603050405020304" pitchFamily="18" charset="0"/>
-                        <a:ea typeface="Times New Roman" panose="02020603050405020304" pitchFamily="18" charset="0"/>
-                        <a:cs typeface="Times New Roman" panose="02020603050405020304" pitchFamily="18" charset="0"/>
-                      </a:endParaRPr>
-                    </a:p>
-                  </a:txBody>
-                  <a:tcPr marL="68580" marR="68580" marT="0" marB="0" anchor="ctr"/>
-                </a:tc>
-                <a:tc>
-                  <a:txBody>
-                    <a:bodyPr/>
-                    <a:lstStyle/>
-                    <a:p>
-                      <a:endParaRPr lang="en-US" dirty="0"/>
-                    </a:p>
-                  </a:txBody>
-                  <a:tcPr/>
-                </a:tc>
-                <a:tc>
-                  <a:txBody>
-                    <a:bodyPr/>
-                    <a:lstStyle/>
-                    <a:p>
-                      <a:endParaRPr lang="en-US" dirty="0"/>
-                    </a:p>
-                  </a:txBody>
-                  <a:tcPr/>
-                </a:tc>
-                <a:tc>
-                  <a:txBody>
-                    <a:bodyPr/>
-                    <a:lstStyle/>
-                    <a:p>
-                      <a:endParaRPr lang="en-US" dirty="0"/>
-                    </a:p>
-                  </a:txBody>
-                  <a:tcPr/>
-                </a:tc>
-                <a:extLst>
-                  <a:ext uri="{0D108BD9-81ED-4DB2-BD59-A6C34878D82A}">
-                    <a16:rowId xmlns:a16="http://schemas.microsoft.com/office/drawing/2014/main" val="1002451943"/>
-                  </a:ext>
-                </a:extLst>
-              </a:tr>
-              <a:tr h="370840">
-                <a:tc>
-                  <a:txBody>
-                    <a:bodyPr/>
-                    <a:lstStyle/>
-                    <a:p>
-                      <a:endParaRPr lang="en-US"/>
-                    </a:p>
-                  </a:txBody>
-                  <a:tcPr/>
-                </a:tc>
-                <a:tc>
-                  <a:txBody>
-                    <a:bodyPr/>
-                    <a:lstStyle/>
-                    <a:p>
-                      <a:pPr marL="0" marR="0">
-                        <a:lnSpc>
-                          <a:spcPct val="150000"/>
-                        </a:lnSpc>
-                        <a:buNone/>
-                      </a:pPr>
-                      <a:r>
-                        <a:rPr lang="en-US" sz="1100" kern="100">
-                          <a:effectLst/>
-                        </a:rPr>
-                        <a:t>prefunding_log</a:t>
-                      </a:r>
-                      <a:endParaRPr lang="en-US" sz="1200" kern="100">
-                        <a:effectLst/>
-                        <a:latin typeface="Times New Roman" panose="02020603050405020304" pitchFamily="18" charset="0"/>
-                        <a:ea typeface="Times New Roman" panose="02020603050405020304" pitchFamily="18" charset="0"/>
-                        <a:cs typeface="Times New Roman" panose="02020603050405020304" pitchFamily="18" charset="0"/>
-                      </a:endParaRPr>
-                    </a:p>
-                  </a:txBody>
-                  <a:tcPr marL="68580" marR="68580" marT="0" marB="0" anchor="ctr"/>
-                </a:tc>
-                <a:tc>
-                  <a:txBody>
-                    <a:bodyPr/>
-                    <a:lstStyle/>
-                    <a:p>
-                      <a:pPr marL="0" marR="0" algn="r">
-                        <a:lnSpc>
-                          <a:spcPct val="150000"/>
-                        </a:lnSpc>
-                        <a:buNone/>
-                      </a:pPr>
-                      <a:r>
-                        <a:rPr lang="en-US" sz="1100" kern="100" dirty="0">
-                          <a:effectLst/>
-                        </a:rPr>
-                        <a:t>1649836</a:t>
-                      </a:r>
-                      <a:endParaRPr lang="en-US" sz="1200" kern="100" dirty="0">
-                        <a:effectLst/>
-                        <a:latin typeface="Times New Roman" panose="02020603050405020304" pitchFamily="18" charset="0"/>
-                        <a:ea typeface="Times New Roman" panose="02020603050405020304" pitchFamily="18" charset="0"/>
-                        <a:cs typeface="Times New Roman" panose="02020603050405020304" pitchFamily="18" charset="0"/>
-                      </a:endParaRPr>
-                    </a:p>
-                  </a:txBody>
-                  <a:tcPr marL="68580" marR="68580" marT="0" marB="0" anchor="ctr"/>
-                </a:tc>
-                <a:tc>
-                  <a:txBody>
-                    <a:bodyPr/>
-                    <a:lstStyle/>
-                    <a:p>
-                      <a:endParaRPr lang="en-US" dirty="0"/>
-                    </a:p>
-                  </a:txBody>
-                  <a:tcPr/>
-                </a:tc>
-                <a:tc>
-                  <a:txBody>
-                    <a:bodyPr/>
-                    <a:lstStyle/>
-                    <a:p>
-                      <a:endParaRPr lang="en-US" dirty="0"/>
-                    </a:p>
-                  </a:txBody>
-                  <a:tcPr/>
-                </a:tc>
-                <a:tc>
-                  <a:txBody>
-                    <a:bodyPr/>
-                    <a:lstStyle/>
-                    <a:p>
-                      <a:endParaRPr lang="en-US" dirty="0"/>
-                    </a:p>
-                  </a:txBody>
-                  <a:tcPr/>
-                </a:tc>
-                <a:extLst>
-                  <a:ext uri="{0D108BD9-81ED-4DB2-BD59-A6C34878D82A}">
-                    <a16:rowId xmlns:a16="http://schemas.microsoft.com/office/drawing/2014/main" val="2473324404"/>
-                  </a:ext>
-                </a:extLst>
-              </a:tr>
-              <a:tr h="370840">
-                <a:tc>
-                  <a:txBody>
-                    <a:bodyPr/>
-                    <a:lstStyle/>
-                    <a:p>
-                      <a:endParaRPr lang="en-US"/>
-                    </a:p>
-                  </a:txBody>
-                  <a:tcPr/>
-                </a:tc>
-                <a:tc>
-                  <a:txBody>
-                    <a:bodyPr/>
-                    <a:lstStyle/>
-                    <a:p>
-                      <a:pPr marL="0" marR="0">
-                        <a:lnSpc>
-                          <a:spcPct val="150000"/>
-                        </a:lnSpc>
-                        <a:buNone/>
-                      </a:pPr>
-                      <a:r>
-                        <a:rPr lang="en-US" sz="1100" kern="100">
-                          <a:effectLst/>
-                        </a:rPr>
-                        <a:t>work_shift_action</a:t>
-                      </a:r>
-                      <a:endParaRPr lang="en-US" sz="1200" kern="100">
-                        <a:effectLst/>
-                        <a:latin typeface="Times New Roman" panose="02020603050405020304" pitchFamily="18" charset="0"/>
-                        <a:ea typeface="Times New Roman" panose="02020603050405020304" pitchFamily="18" charset="0"/>
-                        <a:cs typeface="Times New Roman" panose="02020603050405020304" pitchFamily="18" charset="0"/>
-                      </a:endParaRPr>
-                    </a:p>
-                  </a:txBody>
-                  <a:tcPr marL="68580" marR="68580" marT="0" marB="0" anchor="ctr"/>
-                </a:tc>
-                <a:tc>
-                  <a:txBody>
-                    <a:bodyPr/>
-                    <a:lstStyle/>
-                    <a:p>
-                      <a:pPr marL="0" marR="0" algn="r">
-                        <a:lnSpc>
-                          <a:spcPct val="150000"/>
-                        </a:lnSpc>
-                        <a:buNone/>
-                      </a:pPr>
-                      <a:r>
-                        <a:rPr lang="en-US" sz="1100" kern="100" dirty="0">
-                          <a:effectLst/>
-                        </a:rPr>
-                        <a:t>596665</a:t>
-                      </a:r>
-                      <a:endParaRPr lang="en-US" sz="1200" kern="100" dirty="0">
-                        <a:effectLst/>
-                        <a:latin typeface="Times New Roman" panose="02020603050405020304" pitchFamily="18" charset="0"/>
-                        <a:ea typeface="Times New Roman" panose="02020603050405020304" pitchFamily="18" charset="0"/>
-                        <a:cs typeface="Times New Roman" panose="02020603050405020304" pitchFamily="18" charset="0"/>
-                      </a:endParaRPr>
-                    </a:p>
-                  </a:txBody>
-                  <a:tcPr marL="68580" marR="68580" marT="0" marB="0" anchor="ctr"/>
-                </a:tc>
-                <a:tc>
-                  <a:txBody>
-                    <a:bodyPr/>
-                    <a:lstStyle/>
-                    <a:p>
-                      <a:endParaRPr lang="en-US" dirty="0"/>
-                    </a:p>
-                  </a:txBody>
-                  <a:tcPr/>
-                </a:tc>
-                <a:tc>
-                  <a:txBody>
-                    <a:bodyPr/>
-                    <a:lstStyle/>
-                    <a:p>
-                      <a:endParaRPr lang="en-US" dirty="0"/>
-                    </a:p>
-                  </a:txBody>
-                  <a:tcPr/>
-                </a:tc>
-                <a:tc>
-                  <a:txBody>
-                    <a:bodyPr/>
-                    <a:lstStyle/>
-                    <a:p>
-                      <a:endParaRPr lang="en-US" dirty="0"/>
-                    </a:p>
-                  </a:txBody>
-                  <a:tcPr/>
-                </a:tc>
-                <a:extLst>
-                  <a:ext uri="{0D108BD9-81ED-4DB2-BD59-A6C34878D82A}">
-                    <a16:rowId xmlns:a16="http://schemas.microsoft.com/office/drawing/2014/main" val="3270587433"/>
-                  </a:ext>
-                </a:extLst>
-              </a:tr>
-              <a:tr h="370840">
-                <a:tc>
-                  <a:txBody>
-                    <a:bodyPr/>
-                    <a:lstStyle/>
-                    <a:p>
-                      <a:endParaRPr lang="en-US"/>
-                    </a:p>
-                  </a:txBody>
-                  <a:tcPr/>
-                </a:tc>
-                <a:tc>
-                  <a:txBody>
-                    <a:bodyPr/>
-                    <a:lstStyle/>
-                    <a:p>
-                      <a:pPr marL="0" marR="0">
-                        <a:lnSpc>
-                          <a:spcPct val="150000"/>
-                        </a:lnSpc>
-                        <a:buNone/>
-                      </a:pPr>
-                      <a:r>
-                        <a:rPr lang="en-US" sz="1100" kern="100">
-                          <a:effectLst/>
-                        </a:rPr>
-                        <a:t>revinfo</a:t>
-                      </a:r>
-                      <a:endParaRPr lang="en-US" sz="1200" kern="100">
-                        <a:effectLst/>
-                        <a:latin typeface="Times New Roman" panose="02020603050405020304" pitchFamily="18" charset="0"/>
-                        <a:ea typeface="Times New Roman" panose="02020603050405020304" pitchFamily="18" charset="0"/>
-                        <a:cs typeface="Times New Roman" panose="02020603050405020304" pitchFamily="18" charset="0"/>
-                      </a:endParaRPr>
-                    </a:p>
-                  </a:txBody>
-                  <a:tcPr marL="68580" marR="68580" marT="0" marB="0" anchor="ctr"/>
-                </a:tc>
-                <a:tc>
-                  <a:txBody>
-                    <a:bodyPr/>
-                    <a:lstStyle/>
-                    <a:p>
-                      <a:pPr marL="0" marR="0" algn="r">
-                        <a:lnSpc>
-                          <a:spcPct val="150000"/>
-                        </a:lnSpc>
-                        <a:buNone/>
-                      </a:pPr>
-                      <a:r>
-                        <a:rPr lang="en-US" sz="1100" kern="100" dirty="0">
-                          <a:effectLst/>
-                        </a:rPr>
-                        <a:t>120760</a:t>
-                      </a:r>
-                      <a:endParaRPr lang="en-US" sz="1200" kern="100" dirty="0">
-                        <a:effectLst/>
-                        <a:latin typeface="Times New Roman" panose="02020603050405020304" pitchFamily="18" charset="0"/>
-                        <a:ea typeface="Times New Roman" panose="02020603050405020304" pitchFamily="18" charset="0"/>
-                        <a:cs typeface="Times New Roman" panose="02020603050405020304" pitchFamily="18" charset="0"/>
-                      </a:endParaRPr>
-                    </a:p>
-                  </a:txBody>
-                  <a:tcPr marL="68580" marR="68580" marT="0" marB="0" anchor="ctr"/>
-                </a:tc>
-                <a:tc>
-                  <a:txBody>
-                    <a:bodyPr/>
-                    <a:lstStyle/>
-                    <a:p>
-                      <a:endParaRPr lang="en-US" dirty="0"/>
-                    </a:p>
-                  </a:txBody>
-                  <a:tcPr/>
-                </a:tc>
-                <a:tc>
-                  <a:txBody>
-                    <a:bodyPr/>
-                    <a:lstStyle/>
-                    <a:p>
-                      <a:endParaRPr lang="en-US" dirty="0"/>
                     </a:p>
                   </a:txBody>
                   <a:tcPr/>
@@ -5586,10 +6875,16 @@
                     <a:bodyPr/>
                     <a:lstStyle/>
                     <a:p>
-                      <a:endParaRPr lang="en-US"/>
+                      <a:endParaRPr lang="en-US" dirty="0"/>
                     </a:p>
                   </a:txBody>
-                  <a:tcPr/>
+                  <a:tcPr>
+                    <a:solidFill>
+                      <a:schemeClr val="bg1">
+                        <a:lumMod val="65000"/>
+                      </a:schemeClr>
+                    </a:solidFill>
+                  </a:tcPr>
                 </a:tc>
                 <a:tc>
                   <a:txBody>
@@ -5603,12 +6898,18 @@
                         <a:buNone/>
                       </a:pPr>
                       <a:r>
-                        <a:rPr lang="en-US" sz="1100" kern="100">
+                        <a:rPr lang="en-US" sz="1600" b="1" kern="100" dirty="0" err="1">
+                          <a:solidFill>
+                            <a:schemeClr val="bg1"/>
+                          </a:solidFill>
                           <a:effectLst/>
                         </a:rPr>
                         <a:t>yps_integration_aud</a:t>
                       </a:r>
-                      <a:endParaRPr lang="en-US" sz="1200" kern="100">
+                      <a:endParaRPr lang="en-US" sz="1600" b="1" kern="100" dirty="0">
+                        <a:solidFill>
+                          <a:schemeClr val="bg1"/>
+                        </a:solidFill>
                         <a:effectLst/>
                         <a:latin typeface="Times New Roman" panose="02020603050405020304" pitchFamily="18" charset="0"/>
                         <a:ea typeface="Times New Roman" panose="02020603050405020304" pitchFamily="18" charset="0"/>
@@ -5616,7 +6917,13 @@
                       </a:endParaRPr>
                     </a:p>
                   </a:txBody>
-                  <a:tcPr marL="68580" marR="68580" marT="0" marB="0" anchor="ctr"/>
+                  <a:tcPr marL="68580" marR="68580" marT="0" marB="0" anchor="ctr">
+                    <a:solidFill>
+                      <a:schemeClr val="bg1">
+                        <a:lumMod val="65000"/>
+                      </a:schemeClr>
+                    </a:solidFill>
+                  </a:tcPr>
                 </a:tc>
                 <a:tc>
                   <a:txBody>
@@ -5630,12 +6937,12 @@
                         <a:buNone/>
                       </a:pPr>
                       <a:r>
-                        <a:rPr lang="en-US" sz="1100" kern="100" dirty="0">
+                        <a:rPr lang="en-US" sz="1800" b="1" kern="100" dirty="0">
                           <a:effectLst/>
                         </a:rPr>
-                        <a:t>105204</a:t>
+                        <a:t>105,204</a:t>
                       </a:r>
-                      <a:endParaRPr lang="en-US" sz="1200" kern="100" dirty="0">
+                      <a:endParaRPr lang="en-US" sz="1800" b="1" kern="100" dirty="0">
                         <a:effectLst/>
                         <a:latin typeface="Times New Roman" panose="02020603050405020304" pitchFamily="18" charset="0"/>
                         <a:ea typeface="Times New Roman" panose="02020603050405020304" pitchFamily="18" charset="0"/>
@@ -5660,7 +6967,27 @@
                     <a:bodyPr/>
                     <a:lstStyle/>
                     <a:p>
-                      <a:endParaRPr lang="en-US" dirty="0"/>
+                      <a:pPr marL="0" marR="0" lvl="0" indent="0" algn="l" defTabSz="914400" rtl="0" eaLnBrk="1" fontAlgn="auto" latinLnBrk="0" hangingPunct="1">
+                        <a:lnSpc>
+                          <a:spcPct val="100000"/>
+                        </a:lnSpc>
+                        <a:spcBef>
+                          <a:spcPts val="0"/>
+                        </a:spcBef>
+                        <a:spcAft>
+                          <a:spcPts val="0"/>
+                        </a:spcAft>
+                        <a:buClrTx/>
+                        <a:buSzTx/>
+                        <a:buFontTx/>
+                        <a:buNone/>
+                        <a:tabLst/>
+                        <a:defRPr/>
+                      </a:pPr>
+                      <a:r>
+                        <a:rPr lang="en-US" dirty="0"/>
+                        <a:t>2 month</a:t>
+                      </a:r>
                     </a:p>
                   </a:txBody>
                   <a:tcPr/>
@@ -5687,10 +7014,16 @@
                     <a:bodyPr/>
                     <a:lstStyle/>
                     <a:p>
-                      <a:endParaRPr lang="en-US"/>
+                      <a:endParaRPr lang="en-US" dirty="0"/>
                     </a:p>
                   </a:txBody>
-                  <a:tcPr/>
+                  <a:tcPr>
+                    <a:solidFill>
+                      <a:schemeClr val="bg1">
+                        <a:lumMod val="65000"/>
+                      </a:schemeClr>
+                    </a:solidFill>
+                  </a:tcPr>
                 </a:tc>
                 <a:tc>
                   <a:txBody>
@@ -5704,12 +7037,49 @@
                         <a:buNone/>
                       </a:pPr>
                       <a:r>
-                        <a:rPr lang="en-US" sz="1100" kern="100">
+                        <a:rPr lang="en-US" sz="1600" b="1" kern="100" dirty="0" err="1">
+                          <a:solidFill>
+                            <a:schemeClr val="bg1"/>
+                          </a:solidFill>
                           <a:effectLst/>
                         </a:rPr>
                         <a:t>trigger_log</a:t>
                       </a:r>
-                      <a:endParaRPr lang="en-US" sz="1200" kern="100">
+                      <a:endParaRPr lang="en-US" sz="1600" b="1" kern="100" dirty="0">
+                        <a:solidFill>
+                          <a:schemeClr val="bg1"/>
+                        </a:solidFill>
+                        <a:effectLst/>
+                        <a:latin typeface="Times New Roman" panose="02020603050405020304" pitchFamily="18" charset="0"/>
+                        <a:ea typeface="Times New Roman" panose="02020603050405020304" pitchFamily="18" charset="0"/>
+                        <a:cs typeface="Times New Roman" panose="02020603050405020304" pitchFamily="18" charset="0"/>
+                      </a:endParaRPr>
+                    </a:p>
+                  </a:txBody>
+                  <a:tcPr marL="68580" marR="68580" marT="0" marB="0" anchor="ctr">
+                    <a:solidFill>
+                      <a:srgbClr val="FF0000"/>
+                    </a:solidFill>
+                  </a:tcPr>
+                </a:tc>
+                <a:tc>
+                  <a:txBody>
+                    <a:bodyPr/>
+                    <a:lstStyle/>
+                    <a:p>
+                      <a:pPr marL="0" marR="0" algn="r">
+                        <a:lnSpc>
+                          <a:spcPct val="150000"/>
+                        </a:lnSpc>
+                        <a:buNone/>
+                      </a:pPr>
+                      <a:r>
+                        <a:rPr lang="en-US" sz="1800" b="1" kern="100" dirty="0">
+                          <a:effectLst/>
+                        </a:rPr>
+                        <a:t>2,647,377</a:t>
+                      </a:r>
+                      <a:endParaRPr lang="en-US" sz="1800" b="1" kern="100" dirty="0">
                         <a:effectLst/>
                         <a:latin typeface="Times New Roman" panose="02020603050405020304" pitchFamily="18" charset="0"/>
                         <a:ea typeface="Times New Roman" panose="02020603050405020304" pitchFamily="18" charset="0"/>
@@ -5724,34 +7094,10 @@
                     <a:bodyPr/>
                     <a:lstStyle/>
                     <a:p>
-                      <a:pPr marL="0" marR="0" algn="r">
-                        <a:lnSpc>
-                          <a:spcPct val="150000"/>
-                        </a:lnSpc>
-                        <a:buNone/>
-                      </a:pPr>
                       <a:r>
-                        <a:rPr lang="en-US" sz="1100" kern="100" dirty="0">
-                          <a:effectLst/>
-                        </a:rPr>
-                        <a:t>2647377</a:t>
+                        <a:rPr lang="en-US" dirty="0"/>
+                        <a:t>300 K</a:t>
                       </a:r>
-                      <a:endParaRPr lang="en-US" sz="1200" kern="100" dirty="0">
-                        <a:effectLst/>
-                        <a:latin typeface="Times New Roman" panose="02020603050405020304" pitchFamily="18" charset="0"/>
-                        <a:ea typeface="Times New Roman" panose="02020603050405020304" pitchFamily="18" charset="0"/>
-                        <a:cs typeface="Times New Roman" panose="02020603050405020304" pitchFamily="18" charset="0"/>
-                      </a:endParaRPr>
-                    </a:p>
-                  </a:txBody>
-                  <a:tcPr marL="68580" marR="68580" marT="0" marB="0" anchor="ctr"/>
-                </a:tc>
-                <a:tc>
-                  <a:txBody>
-                    <a:bodyPr/>
-                    <a:lstStyle/>
-                    <a:p>
-                      <a:endParaRPr lang="en-US" dirty="0"/>
                     </a:p>
                   </a:txBody>
                   <a:tcPr/>
@@ -5761,7 +7107,27 @@
                     <a:bodyPr/>
                     <a:lstStyle/>
                     <a:p>
-                      <a:endParaRPr lang="en-US" dirty="0"/>
+                      <a:pPr marL="0" marR="0" lvl="0" indent="0" algn="l" defTabSz="914400" rtl="0" eaLnBrk="1" fontAlgn="auto" latinLnBrk="0" hangingPunct="1">
+                        <a:lnSpc>
+                          <a:spcPct val="100000"/>
+                        </a:lnSpc>
+                        <a:spcBef>
+                          <a:spcPts val="0"/>
+                        </a:spcBef>
+                        <a:spcAft>
+                          <a:spcPts val="0"/>
+                        </a:spcAft>
+                        <a:buClrTx/>
+                        <a:buSzTx/>
+                        <a:buFontTx/>
+                        <a:buNone/>
+                        <a:tabLst/>
+                        <a:defRPr/>
+                      </a:pPr>
+                      <a:r>
+                        <a:rPr lang="en-US" dirty="0"/>
+                        <a:t>2 month</a:t>
+                      </a:r>
                     </a:p>
                   </a:txBody>
                   <a:tcPr/>
@@ -5786,6 +7152,263 @@
           </a:graphicData>
         </a:graphic>
       </p:graphicFrame>
+      <p:sp>
+        <p:nvSpPr>
+          <p:cNvPr id="4" name="Rectangle 3">
+            <a:extLst>
+              <a:ext uri="{FF2B5EF4-FFF2-40B4-BE49-F238E27FC236}">
+                <a16:creationId xmlns:a16="http://schemas.microsoft.com/office/drawing/2014/main" id="{3D58A57D-1E37-9BE8-C2A3-CE249E6B0DBC}"/>
+              </a:ext>
+            </a:extLst>
+          </p:cNvPr>
+          <p:cNvSpPr/>
+          <p:nvPr/>
+        </p:nvSpPr>
+        <p:spPr>
+          <a:xfrm>
+            <a:off x="850392" y="6428232"/>
+            <a:ext cx="228600" cy="258034"/>
+          </a:xfrm>
+          <a:prstGeom prst="rect">
+            <a:avLst/>
+          </a:prstGeom>
+          <a:solidFill>
+            <a:srgbClr val="FF0000"/>
+          </a:solidFill>
+        </p:spPr>
+        <p:style>
+          <a:lnRef idx="2">
+            <a:schemeClr val="accent1">
+              <a:shade val="15000"/>
+            </a:schemeClr>
+          </a:lnRef>
+          <a:fillRef idx="1">
+            <a:schemeClr val="accent1"/>
+          </a:fillRef>
+          <a:effectRef idx="0">
+            <a:schemeClr val="accent1"/>
+          </a:effectRef>
+          <a:fontRef idx="minor">
+            <a:schemeClr val="lt1"/>
+          </a:fontRef>
+        </p:style>
+        <p:txBody>
+          <a:bodyPr rtlCol="0" anchor="ctr"/>
+          <a:lstStyle/>
+          <a:p>
+            <a:pPr algn="ctr"/>
+            <a:endParaRPr lang="en-US" dirty="0"/>
+          </a:p>
+        </p:txBody>
+      </p:sp>
+      <p:sp>
+        <p:nvSpPr>
+          <p:cNvPr id="5" name="TextBox 4">
+            <a:extLst>
+              <a:ext uri="{FF2B5EF4-FFF2-40B4-BE49-F238E27FC236}">
+                <a16:creationId xmlns:a16="http://schemas.microsoft.com/office/drawing/2014/main" id="{8F1C8588-9A0A-77A2-88CB-64D0CD1696B6}"/>
+              </a:ext>
+            </a:extLst>
+          </p:cNvPr>
+          <p:cNvSpPr txBox="1"/>
+          <p:nvPr/>
+        </p:nvSpPr>
+        <p:spPr>
+          <a:xfrm>
+            <a:off x="1170432" y="6428232"/>
+            <a:ext cx="1463040" cy="369332"/>
+          </a:xfrm>
+          <a:prstGeom prst="rect">
+            <a:avLst/>
+          </a:prstGeom>
+          <a:noFill/>
+        </p:spPr>
+        <p:txBody>
+          <a:bodyPr wrap="square" rtlCol="0">
+            <a:spAutoFit/>
+          </a:bodyPr>
+          <a:lstStyle/>
+          <a:p>
+            <a:r>
+              <a:rPr lang="en-US" dirty="0"/>
+              <a:t>High</a:t>
+            </a:r>
+          </a:p>
+        </p:txBody>
+      </p:sp>
+      <p:sp>
+        <p:nvSpPr>
+          <p:cNvPr id="6" name="Rectangle 5">
+            <a:extLst>
+              <a:ext uri="{FF2B5EF4-FFF2-40B4-BE49-F238E27FC236}">
+                <a16:creationId xmlns:a16="http://schemas.microsoft.com/office/drawing/2014/main" id="{AD9BB917-4D53-FE24-9978-81FC7D068838}"/>
+              </a:ext>
+            </a:extLst>
+          </p:cNvPr>
+          <p:cNvSpPr/>
+          <p:nvPr/>
+        </p:nvSpPr>
+        <p:spPr>
+          <a:xfrm>
+            <a:off x="1901952" y="6465443"/>
+            <a:ext cx="228600" cy="258034"/>
+          </a:xfrm>
+          <a:prstGeom prst="rect">
+            <a:avLst/>
+          </a:prstGeom>
+          <a:solidFill>
+            <a:schemeClr val="accent6">
+              <a:lumMod val="60000"/>
+              <a:lumOff val="40000"/>
+            </a:schemeClr>
+          </a:solidFill>
+        </p:spPr>
+        <p:style>
+          <a:lnRef idx="2">
+            <a:schemeClr val="accent1">
+              <a:shade val="15000"/>
+            </a:schemeClr>
+          </a:lnRef>
+          <a:fillRef idx="1">
+            <a:schemeClr val="accent1"/>
+          </a:fillRef>
+          <a:effectRef idx="0">
+            <a:schemeClr val="accent1"/>
+          </a:effectRef>
+          <a:fontRef idx="minor">
+            <a:schemeClr val="lt1"/>
+          </a:fontRef>
+        </p:style>
+        <p:txBody>
+          <a:bodyPr rtlCol="0" anchor="ctr"/>
+          <a:lstStyle/>
+          <a:p>
+            <a:pPr algn="ctr"/>
+            <a:endParaRPr lang="en-US" dirty="0"/>
+          </a:p>
+        </p:txBody>
+      </p:sp>
+      <p:sp>
+        <p:nvSpPr>
+          <p:cNvPr id="7" name="TextBox 6">
+            <a:extLst>
+              <a:ext uri="{FF2B5EF4-FFF2-40B4-BE49-F238E27FC236}">
+                <a16:creationId xmlns:a16="http://schemas.microsoft.com/office/drawing/2014/main" id="{F5FCD791-8E6A-071D-88CF-645E3364A05A}"/>
+              </a:ext>
+            </a:extLst>
+          </p:cNvPr>
+          <p:cNvSpPr txBox="1"/>
+          <p:nvPr/>
+        </p:nvSpPr>
+        <p:spPr>
+          <a:xfrm>
+            <a:off x="2130552" y="6409794"/>
+            <a:ext cx="1463040" cy="369332"/>
+          </a:xfrm>
+          <a:prstGeom prst="rect">
+            <a:avLst/>
+          </a:prstGeom>
+          <a:noFill/>
+        </p:spPr>
+        <p:txBody>
+          <a:bodyPr wrap="square" rtlCol="0">
+            <a:spAutoFit/>
+          </a:bodyPr>
+          <a:lstStyle/>
+          <a:p>
+            <a:r>
+              <a:rPr lang="en-US" dirty="0"/>
+              <a:t>Medium</a:t>
+            </a:r>
+          </a:p>
+        </p:txBody>
+      </p:sp>
+      <p:sp>
+        <p:nvSpPr>
+          <p:cNvPr id="9" name="Rectangle 8">
+            <a:extLst>
+              <a:ext uri="{FF2B5EF4-FFF2-40B4-BE49-F238E27FC236}">
+                <a16:creationId xmlns:a16="http://schemas.microsoft.com/office/drawing/2014/main" id="{B03BC605-CBF6-46AE-EAD5-413D0A81E4A9}"/>
+              </a:ext>
+            </a:extLst>
+          </p:cNvPr>
+          <p:cNvSpPr/>
+          <p:nvPr/>
+        </p:nvSpPr>
+        <p:spPr>
+          <a:xfrm>
+            <a:off x="3250692" y="6463441"/>
+            <a:ext cx="228600" cy="258034"/>
+          </a:xfrm>
+          <a:prstGeom prst="rect">
+            <a:avLst/>
+          </a:prstGeom>
+          <a:solidFill>
+            <a:schemeClr val="bg1">
+              <a:lumMod val="65000"/>
+            </a:schemeClr>
+          </a:solidFill>
+        </p:spPr>
+        <p:style>
+          <a:lnRef idx="2">
+            <a:schemeClr val="accent1">
+              <a:shade val="15000"/>
+            </a:schemeClr>
+          </a:lnRef>
+          <a:fillRef idx="1">
+            <a:schemeClr val="accent1"/>
+          </a:fillRef>
+          <a:effectRef idx="0">
+            <a:schemeClr val="accent1"/>
+          </a:effectRef>
+          <a:fontRef idx="minor">
+            <a:schemeClr val="lt1"/>
+          </a:fontRef>
+        </p:style>
+        <p:txBody>
+          <a:bodyPr rtlCol="0" anchor="ctr"/>
+          <a:lstStyle/>
+          <a:p>
+            <a:pPr algn="ctr"/>
+            <a:endParaRPr lang="en-US" dirty="0"/>
+          </a:p>
+        </p:txBody>
+      </p:sp>
+      <p:sp>
+        <p:nvSpPr>
+          <p:cNvPr id="11" name="TextBox 10">
+            <a:extLst>
+              <a:ext uri="{FF2B5EF4-FFF2-40B4-BE49-F238E27FC236}">
+                <a16:creationId xmlns:a16="http://schemas.microsoft.com/office/drawing/2014/main" id="{EED6A9E4-08AE-DA58-58E2-4A64F464E8A3}"/>
+              </a:ext>
+            </a:extLst>
+          </p:cNvPr>
+          <p:cNvSpPr txBox="1"/>
+          <p:nvPr/>
+        </p:nvSpPr>
+        <p:spPr>
+          <a:xfrm>
+            <a:off x="3593592" y="6401651"/>
+            <a:ext cx="1463040" cy="369332"/>
+          </a:xfrm>
+          <a:prstGeom prst="rect">
+            <a:avLst/>
+          </a:prstGeom>
+          <a:noFill/>
+        </p:spPr>
+        <p:txBody>
+          <a:bodyPr wrap="square" rtlCol="0">
+            <a:spAutoFit/>
+          </a:bodyPr>
+          <a:lstStyle/>
+          <a:p>
+            <a:r>
+              <a:rPr lang="en-US" dirty="0"/>
+              <a:t>Low</a:t>
+            </a:r>
+          </a:p>
+        </p:txBody>
+      </p:sp>
     </p:spTree>
     <p:extLst>
       <p:ext uri="{BB962C8B-B14F-4D97-AF65-F5344CB8AC3E}">
@@ -5799,12 +7422,18 @@
 </p:sld>
 </file>
 
-<file path=ppt/slides/slide6.xml><?xml version="1.0" encoding="utf-8"?>
+<file path=ppt/slides/slide7.xml><?xml version="1.0" encoding="utf-8"?>
 <p:sld xmlns:a="http://schemas.openxmlformats.org/drawingml/2006/main" xmlns:r="http://schemas.openxmlformats.org/officeDocument/2006/relationships" xmlns:p="http://schemas.openxmlformats.org/presentationml/2006/main">
   <p:cSld>
     <p:spTree>
       <p:nvGrpSpPr>
-        <p:cNvPr id="1" name=""/>
+        <p:cNvPr id="1" name="">
+          <a:extLst>
+            <a:ext uri="{FF2B5EF4-FFF2-40B4-BE49-F238E27FC236}">
+              <a16:creationId xmlns:a16="http://schemas.microsoft.com/office/drawing/2014/main" id="{83CAD4D7-2F7C-1C19-2C17-4721DE3F5772}"/>
+            </a:ext>
+          </a:extLst>
+        </p:cNvPr>
         <p:cNvGrpSpPr/>
         <p:nvPr/>
       </p:nvGrpSpPr>
@@ -5821,7 +7450,7 @@
           <p:cNvPr id="2" name="Slide Number Placeholder 1">
             <a:extLst>
               <a:ext uri="{FF2B5EF4-FFF2-40B4-BE49-F238E27FC236}">
-                <a16:creationId xmlns:a16="http://schemas.microsoft.com/office/drawing/2014/main" id="{FD9C983F-458B-06E6-E4F8-F1462FB49156}"/>
+                <a16:creationId xmlns:a16="http://schemas.microsoft.com/office/drawing/2014/main" id="{46414364-B294-F113-2595-971E990D1913}"/>
               </a:ext>
             </a:extLst>
           </p:cNvPr>
@@ -5839,7 +7468,7 @@
           <a:p>
             <a:fld id="{93288B1A-0894-4E52-95D8-2AC74CBED725}" type="slidenum">
               <a:rPr lang="en-US" smtClean="0"/>
-              <a:t>6</a:t>
+              <a:t>7</a:t>
             </a:fld>
             <a:endParaRPr lang="en-US"/>
           </a:p>
@@ -5850,7 +7479,7 @@
           <p:cNvPr id="3" name="Text Placeholder 2">
             <a:extLst>
               <a:ext uri="{FF2B5EF4-FFF2-40B4-BE49-F238E27FC236}">
-                <a16:creationId xmlns:a16="http://schemas.microsoft.com/office/drawing/2014/main" id="{E2F2EA55-F46C-8AB0-0140-A4E9772F2B82}"/>
+                <a16:creationId xmlns:a16="http://schemas.microsoft.com/office/drawing/2014/main" id="{157D1155-8F24-6ACD-DAF5-B8D7EFED5C7B}"/>
               </a:ext>
             </a:extLst>
           </p:cNvPr>
@@ -5861,28 +7490,1007 @@
             <p:ph type="body" idx="1"/>
           </p:nvPr>
         </p:nvSpPr>
-        <p:spPr>
-          <a:xfrm>
-            <a:off x="0" y="3000635"/>
-            <a:ext cx="12191999" cy="518983"/>
-          </a:xfrm>
-        </p:spPr>
+        <p:spPr/>
         <p:txBody>
           <a:bodyPr/>
           <a:lstStyle/>
           <a:p>
-            <a:pPr algn="ctr"/>
             <a:r>
               <a:rPr lang="en-US" dirty="0"/>
-              <a:t>Thank You!</a:t>
-            </a:r>
+              <a:t>Propose Index for  require table</a:t>
+            </a:r>
+          </a:p>
+        </p:txBody>
+      </p:sp>
+      <p:sp>
+        <p:nvSpPr>
+          <p:cNvPr id="10" name="TextBox 9">
+            <a:extLst>
+              <a:ext uri="{FF2B5EF4-FFF2-40B4-BE49-F238E27FC236}">
+                <a16:creationId xmlns:a16="http://schemas.microsoft.com/office/drawing/2014/main" id="{80ECA897-9AFB-CAEE-53F0-5FDF9F332FBB}"/>
+              </a:ext>
+            </a:extLst>
+          </p:cNvPr>
+          <p:cNvSpPr txBox="1"/>
+          <p:nvPr/>
+        </p:nvSpPr>
+        <p:spPr>
+          <a:xfrm>
+            <a:off x="609599" y="1015483"/>
+            <a:ext cx="10412627" cy="3139321"/>
+          </a:xfrm>
+          <a:prstGeom prst="rect">
+            <a:avLst/>
+          </a:prstGeom>
+          <a:noFill/>
+        </p:spPr>
+        <p:txBody>
+          <a:bodyPr wrap="square">
+            <a:spAutoFit/>
+          </a:bodyPr>
+          <a:lstStyle/>
+          <a:p>
+            <a:pPr marL="285750" indent="-285750">
+              <a:buFont typeface="Wingdings" panose="05000000000000000000" pitchFamily="2" charset="2"/>
+              <a:buChar char="Ø"/>
+            </a:pPr>
+            <a:endParaRPr lang="en-US" dirty="0"/>
+          </a:p>
+          <a:p>
+            <a:pPr>
+              <a:lnSpc>
+                <a:spcPct val="150000"/>
+              </a:lnSpc>
+            </a:pPr>
+            <a:r>
+              <a:rPr lang="en-US" b="1" dirty="0"/>
+              <a:t>Problem</a:t>
+            </a:r>
+            <a:endParaRPr lang="en-US" dirty="0"/>
+          </a:p>
+          <a:p>
+            <a:pPr>
+              <a:lnSpc>
+                <a:spcPct val="150000"/>
+              </a:lnSpc>
+            </a:pPr>
+            <a:r>
+              <a:rPr lang="en-US" dirty="0"/>
+              <a:t>Frequent full table scans due to missing indexes </a:t>
+            </a:r>
+          </a:p>
+          <a:p>
+            <a:pPr>
+              <a:lnSpc>
+                <a:spcPct val="150000"/>
+              </a:lnSpc>
+            </a:pPr>
+            <a:r>
+              <a:rPr lang="en-US" b="1" dirty="0"/>
+              <a:t>Solution</a:t>
+            </a:r>
+            <a:endParaRPr lang="en-US" dirty="0"/>
+          </a:p>
+          <a:p>
+            <a:pPr>
+              <a:lnSpc>
+                <a:spcPct val="150000"/>
+              </a:lnSpc>
+            </a:pPr>
+            <a:r>
+              <a:rPr lang="en-US" dirty="0"/>
+              <a:t>Create indexes aligned with query patterns:</a:t>
+            </a:r>
+          </a:p>
+          <a:p>
+            <a:endParaRPr lang="en-US" dirty="0"/>
+          </a:p>
+          <a:p>
+            <a:pPr marL="285750" indent="-285750">
+              <a:buFont typeface="Wingdings" panose="05000000000000000000" pitchFamily="2" charset="2"/>
+              <a:buChar char="Ø"/>
+            </a:pPr>
+            <a:endParaRPr lang="en-US" dirty="0"/>
+          </a:p>
+          <a:p>
+            <a:pPr marL="285750" indent="-285750">
+              <a:buFont typeface="Wingdings" panose="05000000000000000000" pitchFamily="2" charset="2"/>
+              <a:buChar char="Ø"/>
+            </a:pPr>
+            <a:endParaRPr lang="en-US" dirty="0"/>
+          </a:p>
+          <a:p>
+            <a:endParaRPr lang="en-US" dirty="0"/>
+          </a:p>
+        </p:txBody>
+      </p:sp>
+      <p:graphicFrame>
+        <p:nvGraphicFramePr>
+          <p:cNvPr id="8" name="Table 7">
+            <a:extLst>
+              <a:ext uri="{FF2B5EF4-FFF2-40B4-BE49-F238E27FC236}">
+                <a16:creationId xmlns:a16="http://schemas.microsoft.com/office/drawing/2014/main" id="{57F06D1C-A4DC-AA4C-77BA-C2171B866523}"/>
+              </a:ext>
+            </a:extLst>
+          </p:cNvPr>
+          <p:cNvGraphicFramePr>
+            <a:graphicFrameLocks noGrp="1"/>
+          </p:cNvGraphicFramePr>
+          <p:nvPr>
+            <p:extLst>
+              <p:ext uri="{D42A27DB-BD31-4B8C-83A1-F6EECF244321}">
+                <p14:modId xmlns:p14="http://schemas.microsoft.com/office/powerpoint/2010/main" val="2301185599"/>
+              </p:ext>
+            </p:extLst>
+          </p:nvPr>
+        </p:nvGraphicFramePr>
+        <p:xfrm>
+          <a:off x="609599" y="3556867"/>
+          <a:ext cx="10422128" cy="2021840"/>
+        </p:xfrm>
+        <a:graphic>
+          <a:graphicData uri="http://schemas.openxmlformats.org/drawingml/2006/table">
+            <a:tbl>
+              <a:tblPr firstRow="1" bandRow="1">
+                <a:tableStyleId>{5940675A-B579-460E-94D1-54222C63F5DA}</a:tableStyleId>
+              </a:tblPr>
+              <a:tblGrid>
+                <a:gridCol w="2254497">
+                  <a:extLst>
+                    <a:ext uri="{9D8B030D-6E8A-4147-A177-3AD203B41FA5}">
+                      <a16:colId xmlns:a16="http://schemas.microsoft.com/office/drawing/2014/main" val="1983860111"/>
+                    </a:ext>
+                  </a:extLst>
+                </a:gridCol>
+                <a:gridCol w="4299719">
+                  <a:extLst>
+                    <a:ext uri="{9D8B030D-6E8A-4147-A177-3AD203B41FA5}">
+                      <a16:colId xmlns:a16="http://schemas.microsoft.com/office/drawing/2014/main" val="528643849"/>
+                    </a:ext>
+                  </a:extLst>
+                </a:gridCol>
+                <a:gridCol w="3867912">
+                  <a:extLst>
+                    <a:ext uri="{9D8B030D-6E8A-4147-A177-3AD203B41FA5}">
+                      <a16:colId xmlns:a16="http://schemas.microsoft.com/office/drawing/2014/main" val="4067158745"/>
+                    </a:ext>
+                  </a:extLst>
+                </a:gridCol>
+              </a:tblGrid>
+              <a:tr h="370840">
+                <a:tc>
+                  <a:txBody>
+                    <a:bodyPr/>
+                    <a:lstStyle/>
+                    <a:p>
+                      <a:r>
+                        <a:rPr lang="en-US" dirty="0"/>
+                        <a:t>Table Name</a:t>
+                      </a:r>
+                    </a:p>
+                    <a:p>
+                      <a:r>
+                        <a:rPr lang="en-US" dirty="0"/>
+                        <a:t>(immediate archive)</a:t>
+                      </a:r>
+                    </a:p>
+                  </a:txBody>
+                  <a:tcPr/>
+                </a:tc>
+                <a:tc>
+                  <a:txBody>
+                    <a:bodyPr/>
+                    <a:lstStyle/>
+                    <a:p>
+                      <a:r>
+                        <a:rPr lang="en-US" dirty="0"/>
+                        <a:t>Index Column</a:t>
+                      </a:r>
+                    </a:p>
+                  </a:txBody>
+                  <a:tcPr/>
+                </a:tc>
+                <a:tc>
+                  <a:txBody>
+                    <a:bodyPr/>
+                    <a:lstStyle/>
+                    <a:p>
+                      <a:r>
+                        <a:rPr lang="en-US" dirty="0"/>
+                        <a:t>Uses</a:t>
+                      </a:r>
+                    </a:p>
+                  </a:txBody>
+                  <a:tcPr/>
+                </a:tc>
+                <a:extLst>
+                  <a:ext uri="{0D108BD9-81ED-4DB2-BD59-A6C34878D82A}">
+                    <a16:rowId xmlns:a16="http://schemas.microsoft.com/office/drawing/2014/main" val="1621610168"/>
+                  </a:ext>
+                </a:extLst>
+              </a:tr>
+              <a:tr h="370840">
+                <a:tc>
+                  <a:txBody>
+                    <a:bodyPr/>
+                    <a:lstStyle/>
+                    <a:p>
+                      <a:pPr marL="0" marR="0">
+                        <a:lnSpc>
+                          <a:spcPct val="150000"/>
+                        </a:lnSpc>
+                        <a:buNone/>
+                      </a:pPr>
+                      <a:r>
+                        <a:rPr lang="en-US" sz="1600" b="0" kern="100" dirty="0" err="1">
+                          <a:solidFill>
+                            <a:schemeClr val="tx1"/>
+                          </a:solidFill>
+                          <a:effectLst/>
+                        </a:rPr>
+                        <a:t>sale_transaction</a:t>
+                      </a:r>
+                      <a:endParaRPr lang="en-US" sz="1600" b="0" kern="100" dirty="0">
+                        <a:solidFill>
+                          <a:schemeClr val="tx1"/>
+                        </a:solidFill>
+                        <a:effectLst/>
+                      </a:endParaRPr>
+                    </a:p>
+                  </a:txBody>
+                  <a:tcPr marL="68580" marR="68580" marT="0" marB="0">
+                    <a:solidFill>
+                      <a:schemeClr val="bg1"/>
+                    </a:solidFill>
+                  </a:tcPr>
+                </a:tc>
+                <a:tc>
+                  <a:txBody>
+                    <a:bodyPr/>
+                    <a:lstStyle/>
+                    <a:p>
+                      <a:pPr marL="0" marR="0" algn="r">
+                        <a:lnSpc>
+                          <a:spcPct val="150000"/>
+                        </a:lnSpc>
+                        <a:buNone/>
+                      </a:pPr>
+                      <a:r>
+                        <a:rPr lang="en-US" sz="1800" b="1" kern="100" dirty="0" err="1">
+                          <a:effectLst/>
+                        </a:rPr>
+                        <a:t>Store_code</a:t>
+                      </a:r>
+                      <a:r>
+                        <a:rPr lang="en-US" sz="1800" b="1" kern="100" dirty="0">
+                          <a:effectLst/>
+                        </a:rPr>
+                        <a:t> </a:t>
+                      </a:r>
+                      <a:endParaRPr lang="en-US" sz="1800" b="1" kern="100" dirty="0">
+                        <a:effectLst/>
+                        <a:latin typeface="Times New Roman" panose="02020603050405020304" pitchFamily="18" charset="0"/>
+                        <a:ea typeface="Times New Roman" panose="02020603050405020304" pitchFamily="18" charset="0"/>
+                        <a:cs typeface="Times New Roman" panose="02020603050405020304" pitchFamily="18" charset="0"/>
+                      </a:endParaRPr>
+                    </a:p>
+                  </a:txBody>
+                  <a:tcPr marL="68580" marR="68580" marT="0" marB="0"/>
+                </a:tc>
+                <a:tc>
+                  <a:txBody>
+                    <a:bodyPr/>
+                    <a:lstStyle/>
+                    <a:p>
+                      <a:r>
+                        <a:rPr lang="en-US" dirty="0"/>
+                        <a:t>Core sale</a:t>
+                      </a:r>
+                    </a:p>
+                  </a:txBody>
+                  <a:tcPr/>
+                </a:tc>
+                <a:extLst>
+                  <a:ext uri="{0D108BD9-81ED-4DB2-BD59-A6C34878D82A}">
+                    <a16:rowId xmlns:a16="http://schemas.microsoft.com/office/drawing/2014/main" val="3207369328"/>
+                  </a:ext>
+                </a:extLst>
+              </a:tr>
+              <a:tr h="370840">
+                <a:tc>
+                  <a:txBody>
+                    <a:bodyPr/>
+                    <a:lstStyle/>
+                    <a:p>
+                      <a:pPr marL="0" marR="0">
+                        <a:lnSpc>
+                          <a:spcPct val="150000"/>
+                        </a:lnSpc>
+                        <a:buNone/>
+                      </a:pPr>
+                      <a:r>
+                        <a:rPr lang="en-US" sz="1600" b="0" kern="100" dirty="0" err="1">
+                          <a:solidFill>
+                            <a:schemeClr val="tx1"/>
+                          </a:solidFill>
+                          <a:effectLst/>
+                        </a:rPr>
+                        <a:t>print_summary</a:t>
+                      </a:r>
+                      <a:endParaRPr lang="en-US" sz="1600" b="0" kern="100" dirty="0">
+                        <a:solidFill>
+                          <a:schemeClr val="tx1"/>
+                        </a:solidFill>
+                        <a:effectLst/>
+                        <a:latin typeface="Times New Roman" panose="02020603050405020304" pitchFamily="18" charset="0"/>
+                        <a:ea typeface="Times New Roman" panose="02020603050405020304" pitchFamily="18" charset="0"/>
+                        <a:cs typeface="Times New Roman" panose="02020603050405020304" pitchFamily="18" charset="0"/>
+                      </a:endParaRPr>
+                    </a:p>
+                  </a:txBody>
+                  <a:tcPr marL="68580" marR="68580" marT="0" marB="0" anchor="ctr">
+                    <a:solidFill>
+                      <a:schemeClr val="bg1"/>
+                    </a:solidFill>
+                  </a:tcPr>
+                </a:tc>
+                <a:tc>
+                  <a:txBody>
+                    <a:bodyPr/>
+                    <a:lstStyle/>
+                    <a:p>
+                      <a:pPr marL="0" marR="0" algn="r">
+                        <a:lnSpc>
+                          <a:spcPct val="150000"/>
+                        </a:lnSpc>
+                        <a:buNone/>
+                      </a:pPr>
+                      <a:r>
+                        <a:rPr lang="en-US" sz="1800" b="1" kern="100" dirty="0" err="1">
+                          <a:effectLst/>
+                          <a:latin typeface="Times New Roman" panose="02020603050405020304" pitchFamily="18" charset="0"/>
+                          <a:ea typeface="Times New Roman" panose="02020603050405020304" pitchFamily="18" charset="0"/>
+                          <a:cs typeface="Times New Roman" panose="02020603050405020304" pitchFamily="18" charset="0"/>
+                        </a:rPr>
+                        <a:t>Product_id</a:t>
+                      </a:r>
+                      <a:r>
+                        <a:rPr lang="en-US" sz="1800" b="1" kern="100" dirty="0">
+                          <a:effectLst/>
+                          <a:latin typeface="Times New Roman" panose="02020603050405020304" pitchFamily="18" charset="0"/>
+                          <a:ea typeface="Times New Roman" panose="02020603050405020304" pitchFamily="18" charset="0"/>
+                          <a:cs typeface="Times New Roman" panose="02020603050405020304" pitchFamily="18" charset="0"/>
+                        </a:rPr>
+                        <a:t> + </a:t>
+                      </a:r>
+                      <a:r>
+                        <a:rPr lang="en-US" sz="1800" b="1" kern="100" dirty="0" err="1">
+                          <a:effectLst/>
+                          <a:latin typeface="Times New Roman" panose="02020603050405020304" pitchFamily="18" charset="0"/>
+                          <a:ea typeface="Times New Roman" panose="02020603050405020304" pitchFamily="18" charset="0"/>
+                          <a:cs typeface="Times New Roman" panose="02020603050405020304" pitchFamily="18" charset="0"/>
+                        </a:rPr>
+                        <a:t>Session_id</a:t>
+                      </a:r>
+                      <a:r>
+                        <a:rPr lang="en-US" sz="1800" b="1" kern="100" dirty="0">
+                          <a:effectLst/>
+                          <a:latin typeface="Times New Roman" panose="02020603050405020304" pitchFamily="18" charset="0"/>
+                          <a:ea typeface="Times New Roman" panose="02020603050405020304" pitchFamily="18" charset="0"/>
+                          <a:cs typeface="Times New Roman" panose="02020603050405020304" pitchFamily="18" charset="0"/>
+                        </a:rPr>
+                        <a:t>  </a:t>
+                      </a:r>
+                    </a:p>
+                  </a:txBody>
+                  <a:tcPr marL="68580" marR="68580" marT="0" marB="0" anchor="ctr"/>
+                </a:tc>
+                <a:tc>
+                  <a:txBody>
+                    <a:bodyPr/>
+                    <a:lstStyle/>
+                    <a:p>
+                      <a:r>
+                        <a:rPr lang="en-US" dirty="0"/>
+                        <a:t>Use in selecting record for updating summary record </a:t>
+                      </a:r>
+                    </a:p>
+                  </a:txBody>
+                  <a:tcPr/>
+                </a:tc>
+                <a:extLst>
+                  <a:ext uri="{0D108BD9-81ED-4DB2-BD59-A6C34878D82A}">
+                    <a16:rowId xmlns:a16="http://schemas.microsoft.com/office/drawing/2014/main" val="3421293376"/>
+                  </a:ext>
+                </a:extLst>
+              </a:tr>
+              <a:tr h="370840">
+                <a:tc>
+                  <a:txBody>
+                    <a:bodyPr/>
+                    <a:lstStyle/>
+                    <a:p>
+                      <a:pPr marL="0" marR="0">
+                        <a:lnSpc>
+                          <a:spcPct val="150000"/>
+                        </a:lnSpc>
+                        <a:buNone/>
+                      </a:pPr>
+                      <a:r>
+                        <a:rPr lang="en-US" sz="1600" b="0" kern="100" dirty="0" err="1">
+                          <a:solidFill>
+                            <a:schemeClr val="tx1"/>
+                          </a:solidFill>
+                          <a:effectLst/>
+                        </a:rPr>
+                        <a:t>work_shift_action</a:t>
+                      </a:r>
+                      <a:endParaRPr lang="en-US" sz="1600" b="0" kern="100" dirty="0">
+                        <a:solidFill>
+                          <a:schemeClr val="tx1"/>
+                        </a:solidFill>
+                        <a:effectLst/>
+                        <a:latin typeface="Times New Roman" panose="02020603050405020304" pitchFamily="18" charset="0"/>
+                        <a:ea typeface="Times New Roman" panose="02020603050405020304" pitchFamily="18" charset="0"/>
+                        <a:cs typeface="Times New Roman" panose="02020603050405020304" pitchFamily="18" charset="0"/>
+                      </a:endParaRPr>
+                    </a:p>
+                  </a:txBody>
+                  <a:tcPr marL="68580" marR="68580" marT="0" marB="0" anchor="ctr">
+                    <a:solidFill>
+                      <a:schemeClr val="bg1"/>
+                    </a:solidFill>
+                  </a:tcPr>
+                </a:tc>
+                <a:tc>
+                  <a:txBody>
+                    <a:bodyPr/>
+                    <a:lstStyle/>
+                    <a:p>
+                      <a:pPr marL="0" marR="0" algn="r">
+                        <a:lnSpc>
+                          <a:spcPct val="150000"/>
+                        </a:lnSpc>
+                        <a:buNone/>
+                      </a:pPr>
+                      <a:r>
+                        <a:rPr lang="en-US" sz="1800" b="1" kern="100" dirty="0" err="1">
+                          <a:effectLst/>
+                        </a:rPr>
+                        <a:t>Store_code</a:t>
+                      </a:r>
+                      <a:r>
+                        <a:rPr lang="en-US" sz="1800" b="1" kern="100" dirty="0">
+                          <a:effectLst/>
+                        </a:rPr>
+                        <a:t> + status</a:t>
+                      </a:r>
+                      <a:endParaRPr lang="en-US" sz="1800" b="1" kern="100" dirty="0">
+                        <a:effectLst/>
+                        <a:latin typeface="Times New Roman" panose="02020603050405020304" pitchFamily="18" charset="0"/>
+                        <a:ea typeface="Times New Roman" panose="02020603050405020304" pitchFamily="18" charset="0"/>
+                        <a:cs typeface="Times New Roman" panose="02020603050405020304" pitchFamily="18" charset="0"/>
+                      </a:endParaRPr>
+                    </a:p>
+                  </a:txBody>
+                  <a:tcPr marL="68580" marR="68580" marT="0" marB="0" anchor="ctr"/>
+                </a:tc>
+                <a:tc>
+                  <a:txBody>
+                    <a:bodyPr/>
+                    <a:lstStyle/>
+                    <a:p>
+                      <a:r>
+                        <a:rPr lang="en-US" dirty="0"/>
+                        <a:t>Use in creating sale and sync to </a:t>
+                      </a:r>
+                      <a:r>
+                        <a:rPr lang="en-US" dirty="0" err="1"/>
+                        <a:t>erp</a:t>
+                      </a:r>
+                      <a:endParaRPr lang="en-US" dirty="0"/>
+                    </a:p>
+                  </a:txBody>
+                  <a:tcPr/>
+                </a:tc>
+                <a:extLst>
+                  <a:ext uri="{0D108BD9-81ED-4DB2-BD59-A6C34878D82A}">
+                    <a16:rowId xmlns:a16="http://schemas.microsoft.com/office/drawing/2014/main" val="3270587433"/>
+                  </a:ext>
+                </a:extLst>
+              </a:tr>
+            </a:tbl>
+          </a:graphicData>
+        </a:graphic>
+      </p:graphicFrame>
+    </p:spTree>
+    <p:extLst>
+      <p:ext uri="{BB962C8B-B14F-4D97-AF65-F5344CB8AC3E}">
+        <p14:creationId xmlns:p14="http://schemas.microsoft.com/office/powerpoint/2010/main" val="3259311305"/>
+      </p:ext>
+    </p:extLst>
+  </p:cSld>
+  <p:clrMapOvr>
+    <a:masterClrMapping/>
+  </p:clrMapOvr>
+</p:sld>
+</file>
+
+<file path=ppt/slides/slide8.xml><?xml version="1.0" encoding="utf-8"?>
+<p:sld xmlns:a="http://schemas.openxmlformats.org/drawingml/2006/main" xmlns:r="http://schemas.openxmlformats.org/officeDocument/2006/relationships" xmlns:p="http://schemas.openxmlformats.org/presentationml/2006/main">
+  <p:cSld>
+    <p:spTree>
+      <p:nvGrpSpPr>
+        <p:cNvPr id="1" name="">
+          <a:extLst>
+            <a:ext uri="{FF2B5EF4-FFF2-40B4-BE49-F238E27FC236}">
+              <a16:creationId xmlns:a16="http://schemas.microsoft.com/office/drawing/2014/main" id="{E0917A7B-B6CC-0829-1366-5A14A91EC743}"/>
+            </a:ext>
+          </a:extLst>
+        </p:cNvPr>
+        <p:cNvGrpSpPr/>
+        <p:nvPr/>
+      </p:nvGrpSpPr>
+      <p:grpSpPr>
+        <a:xfrm>
+          <a:off x="0" y="0"/>
+          <a:ext cx="0" cy="0"/>
+          <a:chOff x="0" y="0"/>
+          <a:chExt cx="0" cy="0"/>
+        </a:xfrm>
+      </p:grpSpPr>
+      <p:sp>
+        <p:nvSpPr>
+          <p:cNvPr id="2" name="Slide Number Placeholder 1">
+            <a:extLst>
+              <a:ext uri="{FF2B5EF4-FFF2-40B4-BE49-F238E27FC236}">
+                <a16:creationId xmlns:a16="http://schemas.microsoft.com/office/drawing/2014/main" id="{3029BD52-F378-91D8-A899-0384B5629B3D}"/>
+              </a:ext>
+            </a:extLst>
+          </p:cNvPr>
+          <p:cNvSpPr>
+            <a:spLocks noGrp="1"/>
+          </p:cNvSpPr>
+          <p:nvPr>
+            <p:ph type="sldNum" sz="quarter" idx="12"/>
+          </p:nvPr>
+        </p:nvSpPr>
+        <p:spPr/>
+        <p:txBody>
+          <a:bodyPr/>
+          <a:lstStyle/>
+          <a:p>
+            <a:fld id="{93288B1A-0894-4E52-95D8-2AC74CBED725}" type="slidenum">
+              <a:rPr lang="en-US" smtClean="0"/>
+              <a:t>8</a:t>
+            </a:fld>
+            <a:endParaRPr lang="en-US"/>
+          </a:p>
+        </p:txBody>
+      </p:sp>
+      <p:sp>
+        <p:nvSpPr>
+          <p:cNvPr id="3" name="Text Placeholder 2">
+            <a:extLst>
+              <a:ext uri="{FF2B5EF4-FFF2-40B4-BE49-F238E27FC236}">
+                <a16:creationId xmlns:a16="http://schemas.microsoft.com/office/drawing/2014/main" id="{4D9BA3A1-16D5-6164-92C1-B7C7DC886FD3}"/>
+              </a:ext>
+            </a:extLst>
+          </p:cNvPr>
+          <p:cNvSpPr>
+            <a:spLocks noGrp="1"/>
+          </p:cNvSpPr>
+          <p:nvPr>
+            <p:ph type="body" idx="1"/>
+          </p:nvPr>
+        </p:nvSpPr>
+        <p:spPr/>
+        <p:txBody>
+          <a:bodyPr/>
+          <a:lstStyle/>
+          <a:p>
+            <a:r>
+              <a:rPr lang="en-US" dirty="0"/>
+              <a:t>Near-Term Stabilization (Immediate Action)</a:t>
+            </a:r>
+          </a:p>
+        </p:txBody>
+      </p:sp>
+      <p:sp>
+        <p:nvSpPr>
+          <p:cNvPr id="10" name="TextBox 9">
+            <a:extLst>
+              <a:ext uri="{FF2B5EF4-FFF2-40B4-BE49-F238E27FC236}">
+                <a16:creationId xmlns:a16="http://schemas.microsoft.com/office/drawing/2014/main" id="{7A9FD224-8161-30A3-4F42-EBC27A045E39}"/>
+              </a:ext>
+            </a:extLst>
+          </p:cNvPr>
+          <p:cNvSpPr txBox="1"/>
+          <p:nvPr/>
+        </p:nvSpPr>
+        <p:spPr>
+          <a:xfrm>
+            <a:off x="609599" y="1015483"/>
+            <a:ext cx="10412627" cy="4108817"/>
+          </a:xfrm>
+          <a:prstGeom prst="rect">
+            <a:avLst/>
+          </a:prstGeom>
+          <a:noFill/>
+        </p:spPr>
+        <p:txBody>
+          <a:bodyPr wrap="square">
+            <a:spAutoFit/>
+          </a:bodyPr>
+          <a:lstStyle/>
+          <a:p>
+            <a:pPr>
+              <a:lnSpc>
+                <a:spcPct val="150000"/>
+              </a:lnSpc>
+            </a:pPr>
+            <a:r>
+              <a:rPr lang="en-US" b="1" dirty="0"/>
+              <a:t>Approach</a:t>
+            </a:r>
+            <a:endParaRPr lang="en-US" dirty="0"/>
+          </a:p>
+          <a:p>
+            <a:pPr marL="742950" lvl="1" indent="-285750">
+              <a:lnSpc>
+                <a:spcPct val="150000"/>
+              </a:lnSpc>
+              <a:buFont typeface="Wingdings" panose="05000000000000000000" pitchFamily="2" charset="2"/>
+              <a:buChar char="Ø"/>
+            </a:pPr>
+            <a:r>
+              <a:rPr lang="en-US" dirty="0"/>
+              <a:t>Move data older than retention period to </a:t>
+            </a:r>
+            <a:r>
+              <a:rPr lang="en-US" b="1" dirty="0"/>
+              <a:t>archive schema</a:t>
+            </a:r>
+            <a:r>
+              <a:rPr lang="en-US" dirty="0"/>
+              <a:t> </a:t>
+            </a:r>
+          </a:p>
+          <a:p>
+            <a:pPr marL="742950" lvl="1" indent="-285750">
+              <a:lnSpc>
+                <a:spcPct val="150000"/>
+              </a:lnSpc>
+              <a:buFont typeface="Wingdings" panose="05000000000000000000" pitchFamily="2" charset="2"/>
+              <a:buChar char="Ø"/>
+            </a:pPr>
+            <a:r>
+              <a:rPr lang="en-US" dirty="0"/>
+              <a:t>Maintain same table structure for consistency </a:t>
+            </a:r>
+          </a:p>
+          <a:p>
+            <a:pPr marL="742950" lvl="1" indent="-285750">
+              <a:lnSpc>
+                <a:spcPct val="150000"/>
+              </a:lnSpc>
+              <a:buFont typeface="Wingdings" panose="05000000000000000000" pitchFamily="2" charset="2"/>
+              <a:buChar char="Ø"/>
+            </a:pPr>
+            <a:r>
+              <a:rPr lang="en-US" dirty="0"/>
+              <a:t>Ensure </a:t>
+            </a:r>
+            <a:r>
+              <a:rPr lang="en-US" b="1" dirty="0"/>
+              <a:t>no impact on live transaction processing</a:t>
+            </a:r>
+            <a:r>
+              <a:rPr lang="en-US" dirty="0"/>
+              <a:t> </a:t>
+            </a:r>
+          </a:p>
+          <a:p>
+            <a:pPr>
+              <a:lnSpc>
+                <a:spcPct val="150000"/>
+              </a:lnSpc>
+            </a:pPr>
+            <a:r>
+              <a:rPr lang="en-US" b="1" dirty="0"/>
+              <a:t>Storage Design</a:t>
+            </a:r>
+            <a:endParaRPr lang="en-US" dirty="0"/>
+          </a:p>
+          <a:p>
+            <a:pPr>
+              <a:lnSpc>
+                <a:spcPct val="150000"/>
+              </a:lnSpc>
+            </a:pPr>
+            <a:r>
+              <a:rPr lang="en-US" dirty="0"/>
+              <a:t>Archive stored in: </a:t>
+            </a:r>
+          </a:p>
+          <a:p>
+            <a:pPr marL="742950" lvl="1" indent="-285750">
+              <a:lnSpc>
+                <a:spcPct val="150000"/>
+              </a:lnSpc>
+              <a:buFont typeface="Wingdings" panose="05000000000000000000" pitchFamily="2" charset="2"/>
+              <a:buChar char="Ø"/>
+            </a:pPr>
+            <a:r>
+              <a:rPr lang="en-US" dirty="0"/>
+              <a:t>Same DB instance (separate schema) OR </a:t>
+            </a:r>
+          </a:p>
+          <a:p>
+            <a:pPr>
+              <a:lnSpc>
+                <a:spcPct val="150000"/>
+              </a:lnSpc>
+            </a:pPr>
+            <a:r>
+              <a:rPr lang="en-US" b="1" dirty="0"/>
+              <a:t>Data Cleanup</a:t>
+            </a:r>
+            <a:endParaRPr lang="en-US" dirty="0"/>
+          </a:p>
+          <a:p>
+            <a:pPr marL="742950" lvl="1" indent="-285750">
+              <a:lnSpc>
+                <a:spcPct val="150000"/>
+              </a:lnSpc>
+              <a:buFont typeface="Wingdings" panose="05000000000000000000" pitchFamily="2" charset="2"/>
+              <a:buChar char="Ø"/>
+            </a:pPr>
+            <a:r>
+              <a:rPr lang="en-US" dirty="0"/>
+              <a:t>Remove low-value data from archive DB  at clean period 	 	</a:t>
+            </a:r>
+          </a:p>
+          <a:p>
+            <a:endParaRPr lang="en-US" dirty="0"/>
           </a:p>
         </p:txBody>
       </p:sp>
     </p:spTree>
     <p:extLst>
       <p:ext uri="{BB962C8B-B14F-4D97-AF65-F5344CB8AC3E}">
-        <p14:creationId xmlns:p14="http://schemas.microsoft.com/office/powerpoint/2010/main" val="1784669213"/>
+        <p14:creationId xmlns:p14="http://schemas.microsoft.com/office/powerpoint/2010/main" val="2523895106"/>
+      </p:ext>
+    </p:extLst>
+  </p:cSld>
+  <p:clrMapOvr>
+    <a:masterClrMapping/>
+  </p:clrMapOvr>
+</p:sld>
+</file>
+
+<file path=ppt/slides/slide9.xml><?xml version="1.0" encoding="utf-8"?>
+<p:sld xmlns:a="http://schemas.openxmlformats.org/drawingml/2006/main" xmlns:r="http://schemas.openxmlformats.org/officeDocument/2006/relationships" xmlns:p="http://schemas.openxmlformats.org/presentationml/2006/main">
+  <p:cSld>
+    <p:spTree>
+      <p:nvGrpSpPr>
+        <p:cNvPr id="1" name="">
+          <a:extLst>
+            <a:ext uri="{FF2B5EF4-FFF2-40B4-BE49-F238E27FC236}">
+              <a16:creationId xmlns:a16="http://schemas.microsoft.com/office/drawing/2014/main" id="{63FDE76A-7E69-A60C-7F64-7C34DEBDCCB2}"/>
+            </a:ext>
+          </a:extLst>
+        </p:cNvPr>
+        <p:cNvGrpSpPr/>
+        <p:nvPr/>
+      </p:nvGrpSpPr>
+      <p:grpSpPr>
+        <a:xfrm>
+          <a:off x="0" y="0"/>
+          <a:ext cx="0" cy="0"/>
+          <a:chOff x="0" y="0"/>
+          <a:chExt cx="0" cy="0"/>
+        </a:xfrm>
+      </p:grpSpPr>
+      <p:sp>
+        <p:nvSpPr>
+          <p:cNvPr id="2" name="Slide Number Placeholder 1">
+            <a:extLst>
+              <a:ext uri="{FF2B5EF4-FFF2-40B4-BE49-F238E27FC236}">
+                <a16:creationId xmlns:a16="http://schemas.microsoft.com/office/drawing/2014/main" id="{CD0D7769-BA5F-7E6C-C115-FE3B790C4D12}"/>
+              </a:ext>
+            </a:extLst>
+          </p:cNvPr>
+          <p:cNvSpPr>
+            <a:spLocks noGrp="1"/>
+          </p:cNvSpPr>
+          <p:nvPr>
+            <p:ph type="sldNum" sz="quarter" idx="12"/>
+          </p:nvPr>
+        </p:nvSpPr>
+        <p:spPr/>
+        <p:txBody>
+          <a:bodyPr/>
+          <a:lstStyle/>
+          <a:p>
+            <a:fld id="{93288B1A-0894-4E52-95D8-2AC74CBED725}" type="slidenum">
+              <a:rPr lang="en-US" smtClean="0"/>
+              <a:t>9</a:t>
+            </a:fld>
+            <a:endParaRPr lang="en-US"/>
+          </a:p>
+        </p:txBody>
+      </p:sp>
+      <p:sp>
+        <p:nvSpPr>
+          <p:cNvPr id="3" name="Text Placeholder 2">
+            <a:extLst>
+              <a:ext uri="{FF2B5EF4-FFF2-40B4-BE49-F238E27FC236}">
+                <a16:creationId xmlns:a16="http://schemas.microsoft.com/office/drawing/2014/main" id="{0EECCC57-B96F-B3E7-B79C-CEC7C8FC1C00}"/>
+              </a:ext>
+            </a:extLst>
+          </p:cNvPr>
+          <p:cNvSpPr>
+            <a:spLocks noGrp="1"/>
+          </p:cNvSpPr>
+          <p:nvPr>
+            <p:ph type="body" idx="1"/>
+          </p:nvPr>
+        </p:nvSpPr>
+        <p:spPr/>
+        <p:txBody>
+          <a:bodyPr/>
+          <a:lstStyle/>
+          <a:p>
+            <a:r>
+              <a:rPr lang="en-US" dirty="0"/>
+              <a:t>Future Consideration ( Archive Implementation Strategy)</a:t>
+            </a:r>
+          </a:p>
+        </p:txBody>
+      </p:sp>
+      <p:sp>
+        <p:nvSpPr>
+          <p:cNvPr id="10" name="TextBox 9">
+            <a:extLst>
+              <a:ext uri="{FF2B5EF4-FFF2-40B4-BE49-F238E27FC236}">
+                <a16:creationId xmlns:a16="http://schemas.microsoft.com/office/drawing/2014/main" id="{0375E2C7-69BA-FD6C-805A-D690F1D62A5B}"/>
+              </a:ext>
+            </a:extLst>
+          </p:cNvPr>
+          <p:cNvSpPr txBox="1"/>
+          <p:nvPr/>
+        </p:nvSpPr>
+        <p:spPr>
+          <a:xfrm>
+            <a:off x="609599" y="1015483"/>
+            <a:ext cx="10412627" cy="4247317"/>
+          </a:xfrm>
+          <a:prstGeom prst="rect">
+            <a:avLst/>
+          </a:prstGeom>
+          <a:noFill/>
+        </p:spPr>
+        <p:txBody>
+          <a:bodyPr wrap="square">
+            <a:spAutoFit/>
+          </a:bodyPr>
+          <a:lstStyle/>
+          <a:p>
+            <a:pPr>
+              <a:lnSpc>
+                <a:spcPct val="150000"/>
+              </a:lnSpc>
+            </a:pPr>
+            <a:r>
+              <a:rPr lang="en-US" b="1" dirty="0"/>
+              <a:t>Option 1: Automated Archiving (Recommended)</a:t>
+            </a:r>
+            <a:endParaRPr lang="en-US" dirty="0"/>
+          </a:p>
+          <a:p>
+            <a:pPr>
+              <a:lnSpc>
+                <a:spcPct val="150000"/>
+              </a:lnSpc>
+            </a:pPr>
+            <a:r>
+              <a:rPr lang="en-US" dirty="0"/>
+              <a:t>Use MySQL Event Scheduler: </a:t>
+            </a:r>
+          </a:p>
+          <a:p>
+            <a:pPr marL="742950" lvl="1" indent="-285750">
+              <a:lnSpc>
+                <a:spcPct val="150000"/>
+              </a:lnSpc>
+              <a:buFont typeface="Wingdings" panose="05000000000000000000" pitchFamily="2" charset="2"/>
+              <a:buChar char="Ø"/>
+            </a:pPr>
+            <a:r>
+              <a:rPr lang="en-US" dirty="0"/>
+              <a:t>Scheduled archive jobs </a:t>
+            </a:r>
+          </a:p>
+          <a:p>
+            <a:pPr marL="742950" lvl="1" indent="-285750">
+              <a:lnSpc>
+                <a:spcPct val="150000"/>
+              </a:lnSpc>
+              <a:buFont typeface="Wingdings" panose="05000000000000000000" pitchFamily="2" charset="2"/>
+              <a:buChar char="Ø"/>
+            </a:pPr>
+            <a:r>
+              <a:rPr lang="en-US" dirty="0"/>
+              <a:t>Periodic cleanup </a:t>
+            </a:r>
+          </a:p>
+          <a:p>
+            <a:pPr marL="742950" lvl="1" indent="-285750">
+              <a:lnSpc>
+                <a:spcPct val="150000"/>
+              </a:lnSpc>
+              <a:buFont typeface="Wingdings" panose="05000000000000000000" pitchFamily="2" charset="2"/>
+              <a:buChar char="Ø"/>
+            </a:pPr>
+            <a:r>
+              <a:rPr lang="en-US" dirty="0"/>
+              <a:t>Logging &amp; validation </a:t>
+            </a:r>
+          </a:p>
+          <a:p>
+            <a:pPr>
+              <a:lnSpc>
+                <a:spcPct val="150000"/>
+              </a:lnSpc>
+            </a:pPr>
+            <a:r>
+              <a:rPr lang="en-US" b="1" dirty="0"/>
+              <a:t>Option 2: Manual Approach</a:t>
+            </a:r>
+            <a:endParaRPr lang="en-US" dirty="0"/>
+          </a:p>
+          <a:p>
+            <a:pPr marL="285750" indent="-285750">
+              <a:lnSpc>
+                <a:spcPct val="150000"/>
+              </a:lnSpc>
+              <a:buFont typeface="Wingdings" panose="05000000000000000000" pitchFamily="2" charset="2"/>
+              <a:buChar char="Ø"/>
+            </a:pPr>
+            <a:r>
+              <a:rPr lang="en-US" dirty="0"/>
+              <a:t>Monthly archive execution </a:t>
+            </a:r>
+          </a:p>
+          <a:p>
+            <a:pPr marL="285750" indent="-285750">
+              <a:lnSpc>
+                <a:spcPct val="150000"/>
+              </a:lnSpc>
+              <a:buFont typeface="Wingdings" panose="05000000000000000000" pitchFamily="2" charset="2"/>
+              <a:buChar char="Ø"/>
+            </a:pPr>
+            <a:r>
+              <a:rPr lang="en-US" dirty="0"/>
+              <a:t>Manual monitoring</a:t>
+            </a:r>
+          </a:p>
+          <a:p>
+            <a:endParaRPr lang="en-US" dirty="0"/>
+          </a:p>
+          <a:p>
+            <a:endParaRPr lang="en-US" dirty="0"/>
+          </a:p>
+          <a:p>
+            <a:endParaRPr lang="en-US" dirty="0"/>
+          </a:p>
+        </p:txBody>
+      </p:sp>
+    </p:spTree>
+    <p:extLst>
+      <p:ext uri="{BB962C8B-B14F-4D97-AF65-F5344CB8AC3E}">
+        <p14:creationId xmlns:p14="http://schemas.microsoft.com/office/powerpoint/2010/main" val="256577266"/>
       </p:ext>
     </p:extLst>
   </p:cSld>
